--- a/slides/10_causality.pptx
+++ b/slides/10_causality.pptx
@@ -6,50 +6,49 @@
     <p:sldMasterId id="2147483660" r:id="rId2"/>
   </p:sldMasterIdLst>
   <p:notesMasterIdLst>
-    <p:notesMasterId r:id="rId44"/>
+    <p:notesMasterId r:id="rId43"/>
   </p:notesMasterIdLst>
   <p:sldIdLst>
     <p:sldId id="323" r:id="rId3"/>
-    <p:sldId id="2076137263" r:id="rId4"/>
-    <p:sldId id="2076137264" r:id="rId5"/>
-    <p:sldId id="2076137268" r:id="rId6"/>
-    <p:sldId id="2076137269" r:id="rId7"/>
-    <p:sldId id="301" r:id="rId8"/>
-    <p:sldId id="295" r:id="rId9"/>
-    <p:sldId id="257" r:id="rId10"/>
-    <p:sldId id="2076137272" r:id="rId11"/>
-    <p:sldId id="259" r:id="rId12"/>
-    <p:sldId id="310" r:id="rId13"/>
-    <p:sldId id="315" r:id="rId14"/>
-    <p:sldId id="296" r:id="rId15"/>
-    <p:sldId id="2076137270" r:id="rId16"/>
-    <p:sldId id="297" r:id="rId17"/>
-    <p:sldId id="262" r:id="rId18"/>
-    <p:sldId id="2076137271" r:id="rId19"/>
-    <p:sldId id="263" r:id="rId20"/>
-    <p:sldId id="311" r:id="rId21"/>
-    <p:sldId id="270" r:id="rId22"/>
-    <p:sldId id="266" r:id="rId23"/>
-    <p:sldId id="302" r:id="rId24"/>
-    <p:sldId id="264" r:id="rId25"/>
-    <p:sldId id="265" r:id="rId26"/>
-    <p:sldId id="267" r:id="rId27"/>
-    <p:sldId id="268" r:id="rId28"/>
-    <p:sldId id="269" r:id="rId29"/>
-    <p:sldId id="674" r:id="rId30"/>
-    <p:sldId id="276" r:id="rId31"/>
-    <p:sldId id="273" r:id="rId32"/>
-    <p:sldId id="303" r:id="rId33"/>
-    <p:sldId id="2076137273" r:id="rId34"/>
-    <p:sldId id="2076137274" r:id="rId35"/>
-    <p:sldId id="2076137275" r:id="rId36"/>
-    <p:sldId id="2076137276" r:id="rId37"/>
-    <p:sldId id="2076137244" r:id="rId38"/>
-    <p:sldId id="2076137267" r:id="rId39"/>
-    <p:sldId id="2076137277" r:id="rId40"/>
-    <p:sldId id="2076137278" r:id="rId41"/>
-    <p:sldId id="2076137266" r:id="rId42"/>
-    <p:sldId id="329" r:id="rId43"/>
+    <p:sldId id="2076137264" r:id="rId4"/>
+    <p:sldId id="2076137268" r:id="rId5"/>
+    <p:sldId id="2076137269" r:id="rId6"/>
+    <p:sldId id="301" r:id="rId7"/>
+    <p:sldId id="295" r:id="rId8"/>
+    <p:sldId id="257" r:id="rId9"/>
+    <p:sldId id="2076137272" r:id="rId10"/>
+    <p:sldId id="259" r:id="rId11"/>
+    <p:sldId id="310" r:id="rId12"/>
+    <p:sldId id="315" r:id="rId13"/>
+    <p:sldId id="296" r:id="rId14"/>
+    <p:sldId id="2076137270" r:id="rId15"/>
+    <p:sldId id="297" r:id="rId16"/>
+    <p:sldId id="262" r:id="rId17"/>
+    <p:sldId id="2076137271" r:id="rId18"/>
+    <p:sldId id="263" r:id="rId19"/>
+    <p:sldId id="311" r:id="rId20"/>
+    <p:sldId id="270" r:id="rId21"/>
+    <p:sldId id="266" r:id="rId22"/>
+    <p:sldId id="302" r:id="rId23"/>
+    <p:sldId id="264" r:id="rId24"/>
+    <p:sldId id="265" r:id="rId25"/>
+    <p:sldId id="267" r:id="rId26"/>
+    <p:sldId id="268" r:id="rId27"/>
+    <p:sldId id="269" r:id="rId28"/>
+    <p:sldId id="674" r:id="rId29"/>
+    <p:sldId id="276" r:id="rId30"/>
+    <p:sldId id="273" r:id="rId31"/>
+    <p:sldId id="303" r:id="rId32"/>
+    <p:sldId id="2076137273" r:id="rId33"/>
+    <p:sldId id="2076137274" r:id="rId34"/>
+    <p:sldId id="2076137275" r:id="rId35"/>
+    <p:sldId id="2076137276" r:id="rId36"/>
+    <p:sldId id="2076137244" r:id="rId37"/>
+    <p:sldId id="2076137267" r:id="rId38"/>
+    <p:sldId id="2076137277" r:id="rId39"/>
+    <p:sldId id="2076137278" r:id="rId40"/>
+    <p:sldId id="2076137266" r:id="rId41"/>
+    <p:sldId id="329" r:id="rId42"/>
   </p:sldIdLst>
   <p:sldSz cx="12192000" cy="6858000"/>
   <p:notesSz cx="6858000" cy="9144000"/>
@@ -238,7 +237,7 @@
           <a:p>
             <a:fld id="{24EDAC50-00D5-3946-BE94-3A206AB4E9F5}" type="datetimeFigureOut">
               <a:rPr lang="en-DE" smtClean="0"/>
-              <a:t>1/11/26</a:t>
+              <a:t>4/17/26</a:t>
             </a:fld>
             <a:endParaRPr lang="en-DE"/>
           </a:p>
@@ -655,7 +654,7 @@
           <a:p>
             <a:fld id="{19D677A5-0D75-6E4A-BFDA-5220054CEA4B}" type="datetime1">
               <a:rPr lang="de-DE" smtClean="0"/>
-              <a:t>11.01.26</a:t>
+              <a:t>17.04.26</a:t>
             </a:fld>
             <a:endParaRPr lang="en-DE"/>
           </a:p>
@@ -855,7 +854,7 @@
           <a:p>
             <a:fld id="{E1776BF0-9929-C34E-BF4F-030508FC65A2}" type="datetime1">
               <a:rPr lang="de-DE" smtClean="0"/>
-              <a:t>11.01.26</a:t>
+              <a:t>17.04.26</a:t>
             </a:fld>
             <a:endParaRPr lang="en-DE"/>
           </a:p>
@@ -1065,7 +1064,7 @@
           <a:p>
             <a:fld id="{6E1E507E-9A1C-FA4F-9242-B75B6E60AC38}" type="datetime1">
               <a:rPr lang="de-DE" smtClean="0"/>
-              <a:t>11.01.26</a:t>
+              <a:t>17.04.26</a:t>
             </a:fld>
             <a:endParaRPr lang="en-DE"/>
           </a:p>
@@ -1287,7 +1286,7 @@
           <a:p>
             <a:fld id="{7128456D-5ACD-4673-BCE9-52505EC32CEF}" type="datetime1">
               <a:rPr lang="en-GB" smtClean="0"/>
-              <a:t>11/01/2026</a:t>
+              <a:t>17/04/2026</a:t>
             </a:fld>
             <a:endParaRPr lang="en-GB"/>
           </a:p>
@@ -1487,7 +1486,7 @@
           <a:p>
             <a:fld id="{0B763083-041D-491F-A9FE-D51D99E0B41E}" type="datetime1">
               <a:rPr lang="en-GB" smtClean="0"/>
-              <a:t>11/01/2026</a:t>
+              <a:t>17/04/2026</a:t>
             </a:fld>
             <a:endParaRPr lang="en-GB"/>
           </a:p>
@@ -1763,7 +1762,7 @@
           <a:p>
             <a:fld id="{409455E6-A1CA-4CB6-9964-88D5086DA5CA}" type="datetime1">
               <a:rPr lang="en-GB" smtClean="0"/>
-              <a:t>11/01/2026</a:t>
+              <a:t>17/04/2026</a:t>
             </a:fld>
             <a:endParaRPr lang="en-GB"/>
           </a:p>
@@ -2031,7 +2030,7 @@
           <a:p>
             <a:fld id="{FAD82E38-24C1-4A8F-B916-1E714FC129DD}" type="datetime1">
               <a:rPr lang="en-GB" smtClean="0"/>
-              <a:t>11/01/2026</a:t>
+              <a:t>17/04/2026</a:t>
             </a:fld>
             <a:endParaRPr lang="en-GB"/>
           </a:p>
@@ -2446,7 +2445,7 @@
           <a:p>
             <a:fld id="{BC17BCDC-BAA6-44B5-B642-6F28D623ABB1}" type="datetime1">
               <a:rPr lang="en-GB" smtClean="0"/>
-              <a:t>11/01/2026</a:t>
+              <a:t>17/04/2026</a:t>
             </a:fld>
             <a:endParaRPr lang="en-GB"/>
           </a:p>
@@ -2588,7 +2587,7 @@
           <a:p>
             <a:fld id="{01D4BEC3-2CF9-4B19-A0A5-E70A0675B677}" type="datetime1">
               <a:rPr lang="en-GB" smtClean="0"/>
-              <a:t>11/01/2026</a:t>
+              <a:t>17/04/2026</a:t>
             </a:fld>
             <a:endParaRPr lang="en-GB"/>
           </a:p>
@@ -2701,7 +2700,7 @@
           <a:p>
             <a:fld id="{98E28BFD-B06D-4A45-8453-724AC7BA29C5}" type="datetime1">
               <a:rPr lang="en-GB" smtClean="0"/>
-              <a:t>11/01/2026</a:t>
+              <a:t>17/04/2026</a:t>
             </a:fld>
             <a:endParaRPr lang="en-GB"/>
           </a:p>
@@ -3014,7 +3013,7 @@
           <a:p>
             <a:fld id="{A14D99B0-2926-4194-B668-6A0D6123824C}" type="datetime1">
               <a:rPr lang="en-GB" smtClean="0"/>
-              <a:t>11/01/2026</a:t>
+              <a:t>17/04/2026</a:t>
             </a:fld>
             <a:endParaRPr lang="en-GB"/>
           </a:p>
@@ -3214,7 +3213,7 @@
           <a:p>
             <a:fld id="{C3CD9645-0C64-DD43-8379-E118AF15E13E}" type="datetime1">
               <a:rPr lang="de-DE" smtClean="0"/>
-              <a:t>11.01.26</a:t>
+              <a:t>17.04.26</a:t>
             </a:fld>
             <a:endParaRPr lang="en-DE"/>
           </a:p>
@@ -3503,7 +3502,7 @@
           <a:p>
             <a:fld id="{29F03426-21FD-40F4-9F0B-AD19F2317DCA}" type="datetime1">
               <a:rPr lang="en-GB" smtClean="0"/>
-              <a:t>11/01/2026</a:t>
+              <a:t>17/04/2026</a:t>
             </a:fld>
             <a:endParaRPr lang="en-GB"/>
           </a:p>
@@ -3703,7 +3702,7 @@
           <a:p>
             <a:fld id="{D99A2639-5270-4811-807B-89D4AE95E7ED}" type="datetime1">
               <a:rPr lang="en-GB" smtClean="0"/>
-              <a:t>11/01/2026</a:t>
+              <a:t>17/04/2026</a:t>
             </a:fld>
             <a:endParaRPr lang="en-GB"/>
           </a:p>
@@ -3913,7 +3912,7 @@
           <a:p>
             <a:fld id="{B552976C-D408-4E27-8D02-D7795F6D8A01}" type="datetime1">
               <a:rPr lang="en-GB" smtClean="0"/>
-              <a:t>11/01/2026</a:t>
+              <a:t>17/04/2026</a:t>
             </a:fld>
             <a:endParaRPr lang="en-GB"/>
           </a:p>
@@ -4189,7 +4188,7 @@
           <a:p>
             <a:fld id="{DE60DA2E-E8A5-4E41-9D42-B88E51BE5C61}" type="datetime1">
               <a:rPr lang="de-DE" smtClean="0"/>
-              <a:t>11.01.26</a:t>
+              <a:t>17.04.26</a:t>
             </a:fld>
             <a:endParaRPr lang="en-DE"/>
           </a:p>
@@ -4457,7 +4456,7 @@
           <a:p>
             <a:fld id="{D00B6234-720B-9644-921B-2D8EB9DF2A48}" type="datetime1">
               <a:rPr lang="de-DE" smtClean="0"/>
-              <a:t>11.01.26</a:t>
+              <a:t>17.04.26</a:t>
             </a:fld>
             <a:endParaRPr lang="en-DE"/>
           </a:p>
@@ -4872,7 +4871,7 @@
           <a:p>
             <a:fld id="{D54369BC-8FC0-1746-9337-1ABCECFCD9CF}" type="datetime1">
               <a:rPr lang="de-DE" smtClean="0"/>
-              <a:t>11.01.26</a:t>
+              <a:t>17.04.26</a:t>
             </a:fld>
             <a:endParaRPr lang="en-DE"/>
           </a:p>
@@ -5014,7 +5013,7 @@
           <a:p>
             <a:fld id="{FF585077-7888-4447-AC9A-42694C3AE1EB}" type="datetime1">
               <a:rPr lang="de-DE" smtClean="0"/>
-              <a:t>11.01.26</a:t>
+              <a:t>17.04.26</a:t>
             </a:fld>
             <a:endParaRPr lang="en-DE"/>
           </a:p>
@@ -5127,7 +5126,7 @@
           <a:p>
             <a:fld id="{15DD7FE2-8E98-3147-B0BD-81EC520BBEE7}" type="datetime1">
               <a:rPr lang="de-DE" smtClean="0"/>
-              <a:t>11.01.26</a:t>
+              <a:t>17.04.26</a:t>
             </a:fld>
             <a:endParaRPr lang="en-DE"/>
           </a:p>
@@ -5440,7 +5439,7 @@
           <a:p>
             <a:fld id="{561626BE-E67B-6C40-9CD5-F9592418BFD1}" type="datetime1">
               <a:rPr lang="de-DE" smtClean="0"/>
-              <a:t>11.01.26</a:t>
+              <a:t>17.04.26</a:t>
             </a:fld>
             <a:endParaRPr lang="en-DE"/>
           </a:p>
@@ -5729,7 +5728,7 @@
           <a:p>
             <a:fld id="{923E1818-5D6F-D546-92EE-58E4A4B748A6}" type="datetime1">
               <a:rPr lang="de-DE" smtClean="0"/>
-              <a:t>11.01.26</a:t>
+              <a:t>17.04.26</a:t>
             </a:fld>
             <a:endParaRPr lang="en-DE"/>
           </a:p>
@@ -5972,7 +5971,7 @@
           <a:p>
             <a:fld id="{643B86E1-24AE-3245-B2D6-335D998E086F}" type="datetime1">
               <a:rPr lang="de-DE" smtClean="0"/>
-              <a:t>11.01.26</a:t>
+              <a:t>17.04.26</a:t>
             </a:fld>
             <a:endParaRPr lang="en-DE"/>
           </a:p>
@@ -6543,7 +6542,7 @@
           <a:p>
             <a:fld id="{0369896D-5D36-4D31-A0CE-0C2BFB17B225}" type="datetime1">
               <a:rPr lang="en-GB" smtClean="0"/>
-              <a:t>11/01/2026</a:t>
+              <a:t>17/04/2026</a:t>
             </a:fld>
             <a:endParaRPr lang="en-GB"/>
           </a:p>
@@ -7054,446 +7053,6 @@
           <p:cNvPr id="2" name="Title 1">
             <a:extLst>
               <a:ext uri="{FF2B5EF4-FFF2-40B4-BE49-F238E27FC236}">
-                <a16:creationId xmlns:a16="http://schemas.microsoft.com/office/drawing/2014/main" id="{E4C4BC3E-08BB-EA8C-B198-8E1F4FAD5E2E}"/>
-              </a:ext>
-            </a:extLst>
-          </p:cNvPr>
-          <p:cNvSpPr>
-            <a:spLocks noGrp="1"/>
-          </p:cNvSpPr>
-          <p:nvPr>
-            <p:ph type="title"/>
-          </p:nvPr>
-        </p:nvSpPr>
-        <p:spPr/>
-        <p:txBody>
-          <a:bodyPr/>
-          <a:lstStyle/>
-          <a:p>
-            <a:r>
-              <a:rPr lang="en-US" dirty="0"/>
-              <a:t>Probabilistic Graphical Model</a:t>
-            </a:r>
-            <a:endParaRPr lang="en-DE" dirty="0"/>
-          </a:p>
-        </p:txBody>
-      </p:sp>
-      <p:sp>
-        <p:nvSpPr>
-          <p:cNvPr id="3" name="Content Placeholder 2">
-            <a:extLst>
-              <a:ext uri="{FF2B5EF4-FFF2-40B4-BE49-F238E27FC236}">
-                <a16:creationId xmlns:a16="http://schemas.microsoft.com/office/drawing/2014/main" id="{50816CC0-643D-02AB-D8AF-ECDEA31BBDD0}"/>
-              </a:ext>
-            </a:extLst>
-          </p:cNvPr>
-          <p:cNvSpPr>
-            <a:spLocks noGrp="1"/>
-          </p:cNvSpPr>
-          <p:nvPr>
-            <p:ph idx="1"/>
-          </p:nvPr>
-        </p:nvSpPr>
-        <p:spPr>
-          <a:xfrm>
-            <a:off x="838200" y="1825625"/>
-            <a:ext cx="5257800" cy="4351338"/>
-          </a:xfrm>
-        </p:spPr>
-        <p:txBody>
-          <a:bodyPr>
-            <a:noAutofit/>
-          </a:bodyPr>
-          <a:lstStyle/>
-          <a:p>
-            <a:pPr marL="0" indent="0">
-              <a:buNone/>
-            </a:pPr>
-            <a:r>
-              <a:rPr lang="en-US" sz="2400" dirty="0"/>
-              <a:t>Directed Acyclic Graph (DAG): random variables (nodes) and their (conditional) dependencies (edges)</a:t>
-            </a:r>
-            <a:endParaRPr lang="de-DE" sz="2400" dirty="0"/>
-          </a:p>
-          <a:p>
-            <a:pPr marL="0" indent="0">
-              <a:buNone/>
-            </a:pPr>
-            <a:endParaRPr lang="en-US" sz="2400" dirty="0"/>
-          </a:p>
-          <a:p>
-            <a:pPr marL="0" indent="0">
-              <a:buNone/>
-            </a:pPr>
-            <a:r>
-              <a:rPr lang="en-DE" sz="2400" dirty="0"/>
-              <a:t>Bayesian network: DAG</a:t>
-            </a:r>
-            <a:r>
-              <a:rPr lang="de-DE" sz="2400" dirty="0"/>
-              <a:t> </a:t>
-            </a:r>
-            <a:r>
-              <a:rPr lang="de-DE" sz="2400" dirty="0" err="1"/>
-              <a:t>with</a:t>
-            </a:r>
-            <a:r>
-              <a:rPr lang="de-DE" sz="2400" dirty="0"/>
-              <a:t> </a:t>
-            </a:r>
-            <a:r>
-              <a:rPr lang="de-DE" sz="2400" dirty="0" err="1"/>
-              <a:t>updates</a:t>
-            </a:r>
-            <a:r>
-              <a:rPr lang="de-DE" sz="2400" dirty="0"/>
-              <a:t> on </a:t>
-            </a:r>
-            <a:r>
-              <a:rPr lang="de-DE" sz="2400" dirty="0" err="1"/>
-              <a:t>new</a:t>
-            </a:r>
-            <a:r>
-              <a:rPr lang="de-DE" sz="2400" dirty="0"/>
-              <a:t> </a:t>
-            </a:r>
-            <a:r>
-              <a:rPr lang="de-DE" sz="2400" dirty="0" err="1"/>
-              <a:t>evidence</a:t>
-            </a:r>
-            <a:r>
-              <a:rPr lang="de-DE" sz="2400" dirty="0"/>
-              <a:t> </a:t>
-            </a:r>
-            <a:r>
-              <a:rPr lang="de-DE" sz="2400" dirty="0" err="1"/>
-              <a:t>according</a:t>
-            </a:r>
-            <a:r>
-              <a:rPr lang="de-DE" sz="2400" dirty="0"/>
-              <a:t> </a:t>
-            </a:r>
-            <a:r>
-              <a:rPr lang="de-DE" sz="2400" dirty="0" err="1"/>
-              <a:t>to</a:t>
-            </a:r>
-            <a:r>
-              <a:rPr lang="de-DE" sz="2400" dirty="0"/>
-              <a:t> Bayes</a:t>
-            </a:r>
-            <a:r>
-              <a:rPr lang="en-US" sz="2400" dirty="0"/>
-              <a:t>’</a:t>
-            </a:r>
-            <a:r>
-              <a:rPr lang="de-DE" sz="2400" dirty="0"/>
-              <a:t> </a:t>
-            </a:r>
-            <a:r>
-              <a:rPr lang="de-DE" sz="2400" dirty="0" err="1"/>
-              <a:t>rule</a:t>
-            </a:r>
-            <a:r>
-              <a:rPr lang="de-DE" sz="2400" dirty="0"/>
-              <a:t> (belief </a:t>
-            </a:r>
-            <a:r>
-              <a:rPr lang="de-DE" sz="2400" dirty="0" err="1"/>
-              <a:t>propagation</a:t>
-            </a:r>
-            <a:r>
-              <a:rPr lang="de-DE" sz="2400" dirty="0"/>
-              <a:t>)</a:t>
-            </a:r>
-          </a:p>
-          <a:p>
-            <a:r>
-              <a:rPr lang="de-DE" sz="2400" dirty="0" err="1"/>
-              <a:t>message</a:t>
-            </a:r>
-            <a:r>
-              <a:rPr lang="de-DE" sz="2400" dirty="0"/>
-              <a:t> </a:t>
-            </a:r>
-            <a:r>
-              <a:rPr lang="de-DE" sz="2400" dirty="0" err="1"/>
-              <a:t>from</a:t>
-            </a:r>
-            <a:r>
-              <a:rPr lang="de-DE" sz="2400" dirty="0"/>
-              <a:t> </a:t>
-            </a:r>
-            <a:r>
-              <a:rPr lang="de-DE" sz="2400" dirty="0" err="1"/>
-              <a:t>parent</a:t>
-            </a:r>
-            <a:r>
-              <a:rPr lang="de-DE" sz="2400" dirty="0"/>
-              <a:t> </a:t>
-            </a:r>
-            <a:r>
-              <a:rPr lang="de-DE" sz="2400" dirty="0" err="1"/>
-              <a:t>to</a:t>
-            </a:r>
-            <a:r>
-              <a:rPr lang="de-DE" sz="2400" dirty="0"/>
-              <a:t> </a:t>
-            </a:r>
-            <a:r>
-              <a:rPr lang="de-DE" sz="2400" dirty="0" err="1"/>
-              <a:t>child</a:t>
-            </a:r>
-            <a:r>
-              <a:rPr lang="de-DE" sz="2400" dirty="0"/>
-              <a:t>: update </a:t>
-            </a:r>
-            <a:r>
-              <a:rPr lang="de-DE" sz="2400" dirty="0" err="1"/>
-              <a:t>using</a:t>
-            </a:r>
-            <a:r>
-              <a:rPr lang="de-DE" sz="2400" dirty="0"/>
-              <a:t> </a:t>
-            </a:r>
-            <a:r>
-              <a:rPr lang="de-DE" sz="2400" dirty="0" err="1"/>
-              <a:t>conditional</a:t>
-            </a:r>
-            <a:r>
-              <a:rPr lang="de-DE" sz="2400" dirty="0"/>
-              <a:t> </a:t>
-            </a:r>
-            <a:r>
-              <a:rPr lang="de-DE" sz="2400" dirty="0" err="1"/>
-              <a:t>probabilities</a:t>
-            </a:r>
-            <a:endParaRPr lang="de-DE" sz="2400" dirty="0"/>
-          </a:p>
-          <a:p>
-            <a:r>
-              <a:rPr lang="de-DE" sz="2400" dirty="0" err="1"/>
-              <a:t>message</a:t>
-            </a:r>
-            <a:r>
-              <a:rPr lang="de-DE" sz="2400" dirty="0"/>
-              <a:t> </a:t>
-            </a:r>
-            <a:r>
-              <a:rPr lang="de-DE" sz="2400" dirty="0" err="1"/>
-              <a:t>from</a:t>
-            </a:r>
-            <a:r>
-              <a:rPr lang="de-DE" sz="2400" dirty="0"/>
-              <a:t> </a:t>
-            </a:r>
-            <a:r>
-              <a:rPr lang="de-DE" sz="2400" dirty="0" err="1"/>
-              <a:t>child</a:t>
-            </a:r>
-            <a:r>
-              <a:rPr lang="de-DE" sz="2400" dirty="0"/>
-              <a:t> </a:t>
-            </a:r>
-            <a:r>
-              <a:rPr lang="de-DE" sz="2400" dirty="0" err="1"/>
-              <a:t>to</a:t>
-            </a:r>
-            <a:r>
-              <a:rPr lang="de-DE" sz="2400" dirty="0"/>
-              <a:t> </a:t>
-            </a:r>
-            <a:r>
-              <a:rPr lang="de-DE" sz="2400" dirty="0" err="1"/>
-              <a:t>parent</a:t>
-            </a:r>
-            <a:r>
-              <a:rPr lang="de-DE" sz="2400" dirty="0"/>
-              <a:t>: update </a:t>
-            </a:r>
-            <a:r>
-              <a:rPr lang="de-DE" sz="2400" dirty="0" err="1"/>
-              <a:t>by</a:t>
-            </a:r>
-            <a:r>
-              <a:rPr lang="de-DE" sz="2400" dirty="0"/>
-              <a:t> </a:t>
-            </a:r>
-            <a:r>
-              <a:rPr lang="de-DE" sz="2400" dirty="0" err="1"/>
-              <a:t>multiplication</a:t>
-            </a:r>
-            <a:r>
-              <a:rPr lang="de-DE" sz="2400" dirty="0"/>
-              <a:t> </a:t>
-            </a:r>
-            <a:r>
-              <a:rPr lang="de-DE" sz="2400" dirty="0" err="1"/>
-              <a:t>with</a:t>
-            </a:r>
-            <a:r>
-              <a:rPr lang="de-DE" sz="2400" dirty="0"/>
-              <a:t> </a:t>
-            </a:r>
-            <a:r>
-              <a:rPr lang="de-DE" sz="2400" dirty="0" err="1"/>
-              <a:t>likelihood</a:t>
-            </a:r>
-            <a:r>
-              <a:rPr lang="de-DE" sz="2400" dirty="0"/>
-              <a:t> </a:t>
-            </a:r>
-            <a:r>
-              <a:rPr lang="de-DE" sz="2400" dirty="0" err="1"/>
-              <a:t>ratio</a:t>
-            </a:r>
-            <a:endParaRPr lang="de-DE" sz="2400" dirty="0"/>
-          </a:p>
-        </p:txBody>
-      </p:sp>
-      <p:sp>
-        <p:nvSpPr>
-          <p:cNvPr id="4" name="Slide Number Placeholder 3">
-            <a:extLst>
-              <a:ext uri="{FF2B5EF4-FFF2-40B4-BE49-F238E27FC236}">
-                <a16:creationId xmlns:a16="http://schemas.microsoft.com/office/drawing/2014/main" id="{D3F8F489-95B6-7077-31CC-1CF20431C499}"/>
-              </a:ext>
-            </a:extLst>
-          </p:cNvPr>
-          <p:cNvSpPr>
-            <a:spLocks noGrp="1"/>
-          </p:cNvSpPr>
-          <p:nvPr>
-            <p:ph type="sldNum" sz="quarter" idx="12"/>
-          </p:nvPr>
-        </p:nvSpPr>
-        <p:spPr/>
-        <p:txBody>
-          <a:bodyPr/>
-          <a:lstStyle/>
-          <a:p>
-            <a:fld id="{60A26886-2117-0949-B8A5-D47461AC229C}" type="slidenum">
-              <a:rPr lang="en-DE" smtClean="0"/>
-              <a:t>10</a:t>
-            </a:fld>
-            <a:endParaRPr lang="en-DE"/>
-          </a:p>
-        </p:txBody>
-      </p:sp>
-      <p:pic>
-        <p:nvPicPr>
-          <p:cNvPr id="5" name="Graphic 4">
-            <a:extLst>
-              <a:ext uri="{FF2B5EF4-FFF2-40B4-BE49-F238E27FC236}">
-                <a16:creationId xmlns:a16="http://schemas.microsoft.com/office/drawing/2014/main" id="{1B4CF1B7-04E9-B262-A1F0-17BAC445347C}"/>
-              </a:ext>
-            </a:extLst>
-          </p:cNvPr>
-          <p:cNvPicPr>
-            <a:picLocks noChangeAspect="1"/>
-          </p:cNvPicPr>
-          <p:nvPr/>
-        </p:nvPicPr>
-        <p:blipFill>
-          <a:blip r:embed="rId2">
-            <a:extLst>
-              <a:ext uri="{96DAC541-7B7A-43D3-8B79-37D633B846F1}">
-                <asvg:svgBlip xmlns:asvg="http://schemas.microsoft.com/office/drawing/2016/SVG/main" r:embed="rId3"/>
-              </a:ext>
-            </a:extLst>
-          </a:blip>
-          <a:stretch>
-            <a:fillRect/>
-          </a:stretch>
-        </p:blipFill>
-        <p:spPr>
-          <a:xfrm>
-            <a:off x="6357646" y="2350294"/>
-            <a:ext cx="5829300" cy="3302000"/>
-          </a:xfrm>
-          <a:prstGeom prst="rect">
-            <a:avLst/>
-          </a:prstGeom>
-        </p:spPr>
-      </p:pic>
-      <p:sp>
-        <p:nvSpPr>
-          <p:cNvPr id="6" name="TextBox 5">
-            <a:extLst>
-              <a:ext uri="{FF2B5EF4-FFF2-40B4-BE49-F238E27FC236}">
-                <a16:creationId xmlns:a16="http://schemas.microsoft.com/office/drawing/2014/main" id="{2E6DFD5C-A21C-4E22-8DCE-1A7A2AACE4C6}"/>
-              </a:ext>
-            </a:extLst>
-          </p:cNvPr>
-          <p:cNvSpPr txBox="1"/>
-          <p:nvPr/>
-        </p:nvSpPr>
-        <p:spPr>
-          <a:xfrm>
-            <a:off x="10577901" y="5406073"/>
-            <a:ext cx="962123" cy="246221"/>
-          </a:xfrm>
-          <a:prstGeom prst="rect">
-            <a:avLst/>
-          </a:prstGeom>
-          <a:noFill/>
-        </p:spPr>
-        <p:txBody>
-          <a:bodyPr wrap="none" rtlCol="0">
-            <a:spAutoFit/>
-          </a:bodyPr>
-          <a:lstStyle/>
-          <a:p>
-            <a:r>
-              <a:rPr lang="de-DE" sz="1000" dirty="0" err="1"/>
-              <a:t>from</a:t>
-            </a:r>
-            <a:r>
-              <a:rPr lang="de-DE" sz="1000" dirty="0"/>
-              <a:t> </a:t>
-            </a:r>
-            <a:r>
-              <a:rPr lang="de-DE" sz="1000" dirty="0" err="1"/>
-              <a:t>wikipedia</a:t>
-            </a:r>
-            <a:endParaRPr lang="de-DE" sz="1000" dirty="0"/>
-          </a:p>
-        </p:txBody>
-      </p:sp>
-    </p:spTree>
-    <p:extLst>
-      <p:ext uri="{BB962C8B-B14F-4D97-AF65-F5344CB8AC3E}">
-        <p14:creationId xmlns:p14="http://schemas.microsoft.com/office/powerpoint/2010/main" val="3495227822"/>
-      </p:ext>
-    </p:extLst>
-  </p:cSld>
-  <p:clrMapOvr>
-    <a:masterClrMapping/>
-  </p:clrMapOvr>
-</p:sld>
-</file>
-
-<file path=ppt/slides/slide11.xml><?xml version="1.0" encoding="utf-8"?>
-<p:sld xmlns:a="http://schemas.openxmlformats.org/drawingml/2006/main" xmlns:r="http://schemas.openxmlformats.org/officeDocument/2006/relationships" xmlns:p="http://schemas.openxmlformats.org/presentationml/2006/main">
-  <p:cSld>
-    <p:spTree>
-      <p:nvGrpSpPr>
-        <p:cNvPr id="1" name=""/>
-        <p:cNvGrpSpPr/>
-        <p:nvPr/>
-      </p:nvGrpSpPr>
-      <p:grpSpPr>
-        <a:xfrm>
-          <a:off x="0" y="0"/>
-          <a:ext cx="0" cy="0"/>
-          <a:chOff x="0" y="0"/>
-          <a:chExt cx="0" cy="0"/>
-        </a:xfrm>
-      </p:grpSpPr>
-      <p:sp>
-        <p:nvSpPr>
-          <p:cNvPr id="2" name="Title 1">
-            <a:extLst>
-              <a:ext uri="{FF2B5EF4-FFF2-40B4-BE49-F238E27FC236}">
                 <a16:creationId xmlns:a16="http://schemas.microsoft.com/office/drawing/2014/main" id="{E1C0CE9E-40A3-4711-37B2-073AD8608CD0}"/>
               </a:ext>
             </a:extLst>
@@ -7919,7 +7478,7 @@
           <a:p>
             <a:fld id="{60A26886-2117-0949-B8A5-D47461AC229C}" type="slidenum">
               <a:rPr lang="en-DE" smtClean="0"/>
-              <a:t>11</a:t>
+              <a:t>10</a:t>
             </a:fld>
             <a:endParaRPr lang="en-DE"/>
           </a:p>
@@ -7938,7 +7497,7 @@
 </p:sld>
 </file>
 
-<file path=ppt/slides/slide12.xml><?xml version="1.0" encoding="utf-8"?>
+<file path=ppt/slides/slide11.xml><?xml version="1.0" encoding="utf-8"?>
 <p:sld xmlns:a="http://schemas.openxmlformats.org/drawingml/2006/main" xmlns:r="http://schemas.openxmlformats.org/officeDocument/2006/relationships" xmlns:p="http://schemas.openxmlformats.org/presentationml/2006/main">
   <p:cSld>
     <p:spTree>
@@ -8605,7 +8164,7 @@
           <a:p>
             <a:fld id="{60A26886-2117-0949-B8A5-D47461AC229C}" type="slidenum">
               <a:rPr lang="en-DE" smtClean="0"/>
-              <a:t>12</a:t>
+              <a:t>11</a:t>
             </a:fld>
             <a:endParaRPr lang="en-DE"/>
           </a:p>
@@ -8615,6 +8174,419 @@
     <p:extLst>
       <p:ext uri="{BB962C8B-B14F-4D97-AF65-F5344CB8AC3E}">
         <p14:creationId xmlns:p14="http://schemas.microsoft.com/office/powerpoint/2010/main" val="191165893"/>
+      </p:ext>
+    </p:extLst>
+  </p:cSld>
+  <p:clrMapOvr>
+    <a:masterClrMapping/>
+  </p:clrMapOvr>
+</p:sld>
+</file>
+
+<file path=ppt/slides/slide12.xml><?xml version="1.0" encoding="utf-8"?>
+<p:sld xmlns:a="http://schemas.openxmlformats.org/drawingml/2006/main" xmlns:r="http://schemas.openxmlformats.org/officeDocument/2006/relationships" xmlns:p="http://schemas.openxmlformats.org/presentationml/2006/main">
+  <p:cSld>
+    <p:spTree>
+      <p:nvGrpSpPr>
+        <p:cNvPr id="1" name=""/>
+        <p:cNvGrpSpPr/>
+        <p:nvPr/>
+      </p:nvGrpSpPr>
+      <p:grpSpPr>
+        <a:xfrm>
+          <a:off x="0" y="0"/>
+          <a:ext cx="0" cy="0"/>
+          <a:chOff x="0" y="0"/>
+          <a:chExt cx="0" cy="0"/>
+        </a:xfrm>
+      </p:grpSpPr>
+      <p:sp>
+        <p:nvSpPr>
+          <p:cNvPr id="2" name="Title 1">
+            <a:extLst>
+              <a:ext uri="{FF2B5EF4-FFF2-40B4-BE49-F238E27FC236}">
+                <a16:creationId xmlns:a16="http://schemas.microsoft.com/office/drawing/2014/main" id="{4A2E373D-B8E1-C80F-6850-AB342C4A9864}"/>
+              </a:ext>
+            </a:extLst>
+          </p:cNvPr>
+          <p:cNvSpPr>
+            <a:spLocks noGrp="1"/>
+          </p:cNvSpPr>
+          <p:nvPr>
+            <p:ph type="title"/>
+          </p:nvPr>
+        </p:nvSpPr>
+        <p:spPr/>
+        <p:txBody>
+          <a:bodyPr/>
+          <a:lstStyle/>
+          <a:p>
+            <a:r>
+              <a:rPr lang="de-DE" dirty="0" err="1"/>
+              <a:t>Toward</a:t>
+            </a:r>
+            <a:r>
+              <a:rPr lang="de-DE" dirty="0"/>
+              <a:t> </a:t>
+            </a:r>
+            <a:r>
+              <a:rPr lang="de-DE" dirty="0" err="1"/>
+              <a:t>Causal</a:t>
+            </a:r>
+            <a:r>
+              <a:rPr lang="de-DE" dirty="0"/>
+              <a:t> </a:t>
+            </a:r>
+            <a:r>
+              <a:rPr lang="de-DE" dirty="0" err="1"/>
+              <a:t>Diagrams</a:t>
+            </a:r>
+            <a:endParaRPr lang="en-DE" dirty="0"/>
+          </a:p>
+        </p:txBody>
+      </p:sp>
+      <p:sp>
+        <p:nvSpPr>
+          <p:cNvPr id="3" name="Content Placeholder 2">
+            <a:extLst>
+              <a:ext uri="{FF2B5EF4-FFF2-40B4-BE49-F238E27FC236}">
+                <a16:creationId xmlns:a16="http://schemas.microsoft.com/office/drawing/2014/main" id="{383D6E6C-043B-0FB2-F9D9-1C01623A376A}"/>
+              </a:ext>
+            </a:extLst>
+          </p:cNvPr>
+          <p:cNvSpPr>
+            <a:spLocks noGrp="1"/>
+          </p:cNvSpPr>
+          <p:nvPr>
+            <p:ph idx="1"/>
+          </p:nvPr>
+        </p:nvSpPr>
+        <p:spPr/>
+        <p:txBody>
+          <a:bodyPr>
+            <a:normAutofit/>
+          </a:bodyPr>
+          <a:lstStyle/>
+          <a:p>
+            <a:pPr marL="0" indent="0">
+              <a:buNone/>
+            </a:pPr>
+            <a:r>
+              <a:rPr lang="de-DE" sz="2600" dirty="0" err="1"/>
+              <a:t>load</a:t>
+            </a:r>
+            <a:r>
+              <a:rPr lang="de-DE" sz="2600" dirty="0"/>
+              <a:t> </a:t>
+            </a:r>
+            <a:r>
+              <a:rPr lang="de-DE" sz="2600" dirty="0" err="1"/>
+              <a:t>graph</a:t>
+            </a:r>
+            <a:r>
+              <a:rPr lang="de-DE" sz="2600" dirty="0"/>
+              <a:t> </a:t>
+            </a:r>
+            <a:r>
+              <a:rPr lang="de-DE" sz="2600" dirty="0" err="1"/>
+              <a:t>with</a:t>
+            </a:r>
+            <a:r>
+              <a:rPr lang="de-DE" sz="2600" dirty="0"/>
+              <a:t> </a:t>
+            </a:r>
+            <a:r>
+              <a:rPr lang="de-DE" sz="2600" dirty="0" err="1"/>
+              <a:t>causal</a:t>
+            </a:r>
+            <a:r>
+              <a:rPr lang="de-DE" sz="2600" dirty="0"/>
+              <a:t> </a:t>
+            </a:r>
+            <a:r>
+              <a:rPr lang="de-DE" sz="2600" dirty="0" err="1"/>
+              <a:t>assumptions</a:t>
+            </a:r>
+            <a:r>
+              <a:rPr lang="de-DE" sz="2600" dirty="0"/>
+              <a:t> (</a:t>
+            </a:r>
+            <a:r>
+              <a:rPr lang="de-DE" sz="2600" dirty="0" err="1"/>
+              <a:t>model</a:t>
+            </a:r>
+            <a:r>
+              <a:rPr lang="de-DE" sz="2600" dirty="0"/>
+              <a:t>)</a:t>
+            </a:r>
+          </a:p>
+          <a:p>
+            <a:pPr marL="0" indent="0">
+              <a:buNone/>
+            </a:pPr>
+            <a:r>
+              <a:rPr lang="de-DE" sz="2600" dirty="0">
+                <a:sym typeface="Wingdings" pitchFamily="2" charset="2"/>
+              </a:rPr>
+              <a:t> </a:t>
+            </a:r>
+            <a:r>
+              <a:rPr lang="de-DE" sz="2600" dirty="0" err="1"/>
+              <a:t>arrows</a:t>
+            </a:r>
+            <a:r>
+              <a:rPr lang="de-DE" sz="2600" dirty="0"/>
+              <a:t> </a:t>
+            </a:r>
+            <a:r>
+              <a:rPr lang="de-DE" sz="2600" dirty="0" err="1"/>
+              <a:t>give</a:t>
+            </a:r>
+            <a:r>
+              <a:rPr lang="de-DE" sz="2600" dirty="0"/>
+              <a:t> </a:t>
+            </a:r>
+            <a:r>
+              <a:rPr lang="de-DE" sz="2600" dirty="0" err="1"/>
+              <a:t>direction</a:t>
+            </a:r>
+            <a:r>
+              <a:rPr lang="de-DE" sz="2600" dirty="0"/>
+              <a:t> </a:t>
+            </a:r>
+            <a:r>
+              <a:rPr lang="de-DE" sz="2600" dirty="0" err="1"/>
+              <a:t>of</a:t>
+            </a:r>
+            <a:r>
+              <a:rPr lang="de-DE" sz="2600" dirty="0"/>
+              <a:t> </a:t>
+            </a:r>
+            <a:r>
+              <a:rPr lang="de-DE" sz="2600" dirty="0" err="1"/>
+              <a:t>cause-effect</a:t>
+            </a:r>
+            <a:r>
+              <a:rPr lang="de-DE" sz="2600" dirty="0"/>
+              <a:t> </a:t>
+            </a:r>
+            <a:r>
+              <a:rPr lang="de-DE" sz="2600" dirty="0" err="1"/>
+              <a:t>relationships</a:t>
+            </a:r>
+            <a:endParaRPr lang="de-DE" sz="2600" dirty="0"/>
+          </a:p>
+          <a:p>
+            <a:pPr marL="0" indent="0">
+              <a:buNone/>
+            </a:pPr>
+            <a:endParaRPr lang="de-DE" sz="2600" dirty="0"/>
+          </a:p>
+          <a:p>
+            <a:pPr marL="0" indent="0">
+              <a:buNone/>
+            </a:pPr>
+            <a:r>
+              <a:rPr lang="de-DE" sz="2600" dirty="0" err="1"/>
+              <a:t>causal</a:t>
+            </a:r>
+            <a:r>
+              <a:rPr lang="de-DE" sz="2600" dirty="0"/>
+              <a:t> Markov </a:t>
+            </a:r>
+            <a:r>
+              <a:rPr lang="de-DE" sz="2600" dirty="0" err="1"/>
+              <a:t>property</a:t>
+            </a:r>
+            <a:r>
+              <a:rPr lang="de-DE" sz="2600" dirty="0"/>
+              <a:t>: </a:t>
+            </a:r>
+            <a:r>
+              <a:rPr lang="en-GB" sz="2600" dirty="0"/>
+              <a:t>E</a:t>
+            </a:r>
+            <a:r>
+              <a:rPr lang="en-GB" sz="2600" dirty="0">
+                <a:effectLst/>
+              </a:rPr>
+              <a:t>ach variable in a causal graph is probabilistically independent of its non-effects conditional on its direct causes.</a:t>
+            </a:r>
+            <a:endParaRPr lang="de-DE" sz="2600" dirty="0"/>
+          </a:p>
+          <a:p>
+            <a:pPr marL="0" indent="0">
+              <a:buNone/>
+            </a:pPr>
+            <a:endParaRPr lang="de-DE" sz="2600" dirty="0"/>
+          </a:p>
+          <a:p>
+            <a:pPr marL="0" indent="0">
+              <a:buNone/>
+            </a:pPr>
+            <a:r>
+              <a:rPr lang="de-DE" sz="2600" dirty="0" err="1"/>
+              <a:t>causal</a:t>
+            </a:r>
+            <a:r>
+              <a:rPr lang="de-DE" sz="2600" dirty="0"/>
+              <a:t> </a:t>
+            </a:r>
+            <a:r>
+              <a:rPr lang="de-DE" sz="2600" dirty="0" err="1"/>
+              <a:t>models</a:t>
+            </a:r>
+            <a:r>
+              <a:rPr lang="de-DE" sz="2600" dirty="0"/>
+              <a:t> (</a:t>
+            </a:r>
+            <a:r>
+              <a:rPr lang="de-DE" sz="2600" dirty="0" err="1"/>
+              <a:t>represented</a:t>
+            </a:r>
+            <a:r>
+              <a:rPr lang="de-DE" sz="2600" dirty="0"/>
+              <a:t> </a:t>
+            </a:r>
+            <a:r>
+              <a:rPr lang="de-DE" sz="2600" dirty="0" err="1"/>
+              <a:t>by</a:t>
+            </a:r>
+            <a:r>
+              <a:rPr lang="de-DE" sz="2600" dirty="0"/>
+              <a:t> </a:t>
+            </a:r>
+            <a:r>
+              <a:rPr lang="de-DE" sz="2600" dirty="0" err="1"/>
+              <a:t>graphs</a:t>
+            </a:r>
+            <a:r>
+              <a:rPr lang="de-DE" sz="2600" dirty="0"/>
+              <a:t>) </a:t>
+            </a:r>
+            <a:r>
+              <a:rPr lang="de-DE" sz="2600" dirty="0" err="1"/>
+              <a:t>allow</a:t>
+            </a:r>
+            <a:r>
+              <a:rPr lang="de-DE" sz="2600" dirty="0"/>
+              <a:t> </a:t>
+            </a:r>
+            <a:r>
+              <a:rPr lang="de-DE" sz="2600" dirty="0" err="1"/>
+              <a:t>to</a:t>
+            </a:r>
+            <a:r>
+              <a:rPr lang="de-DE" sz="2600" dirty="0"/>
+              <a:t> </a:t>
+            </a:r>
+            <a:r>
+              <a:rPr lang="de-DE" sz="2600" dirty="0" err="1"/>
+              <a:t>answer</a:t>
+            </a:r>
+            <a:r>
+              <a:rPr lang="de-DE" sz="2600" dirty="0"/>
+              <a:t> interventional and </a:t>
+            </a:r>
+            <a:r>
+              <a:rPr lang="de-DE" sz="2600" dirty="0" err="1"/>
+              <a:t>counterfactual</a:t>
+            </a:r>
+            <a:r>
+              <a:rPr lang="de-DE" sz="2600" dirty="0"/>
+              <a:t> (</a:t>
+            </a:r>
+            <a:r>
+              <a:rPr lang="de-DE" sz="2600" dirty="0" err="1"/>
+              <a:t>fictional</a:t>
+            </a:r>
+            <a:r>
+              <a:rPr lang="de-DE" sz="2600" dirty="0"/>
+              <a:t>) </a:t>
+            </a:r>
+            <a:r>
+              <a:rPr lang="de-DE" sz="2600" dirty="0" err="1"/>
+              <a:t>queries</a:t>
+            </a:r>
+            <a:endParaRPr lang="de-DE" sz="2600" dirty="0"/>
+          </a:p>
+          <a:p>
+            <a:pPr marL="0" indent="0">
+              <a:buNone/>
+            </a:pPr>
+            <a:r>
+              <a:rPr lang="de-DE" sz="2600" dirty="0" err="1"/>
+              <a:t>often</a:t>
+            </a:r>
+            <a:r>
+              <a:rPr lang="de-DE" sz="2600" dirty="0"/>
+              <a:t> </a:t>
+            </a:r>
+            <a:r>
+              <a:rPr lang="de-DE" sz="2600" dirty="0" err="1"/>
+              <a:t>even</a:t>
+            </a:r>
+            <a:r>
+              <a:rPr lang="de-DE" sz="2600" dirty="0"/>
+              <a:t> </a:t>
+            </a:r>
+            <a:r>
+              <a:rPr lang="de-DE" sz="2600" dirty="0" err="1"/>
+              <a:t>without</a:t>
+            </a:r>
+            <a:r>
+              <a:rPr lang="de-DE" sz="2600" dirty="0"/>
+              <a:t> </a:t>
+            </a:r>
+            <a:r>
+              <a:rPr lang="de-DE" sz="2600" dirty="0" err="1"/>
+              <a:t>conducting</a:t>
+            </a:r>
+            <a:r>
+              <a:rPr lang="de-DE" sz="2600" dirty="0"/>
+              <a:t> </a:t>
+            </a:r>
+            <a:r>
+              <a:rPr lang="de-DE" sz="2600" dirty="0" err="1"/>
+              <a:t>experiments</a:t>
+            </a:r>
+            <a:endParaRPr lang="de-DE" sz="2600" dirty="0"/>
+          </a:p>
+        </p:txBody>
+      </p:sp>
+      <p:sp>
+        <p:nvSpPr>
+          <p:cNvPr id="4" name="Slide Number Placeholder 3">
+            <a:extLst>
+              <a:ext uri="{FF2B5EF4-FFF2-40B4-BE49-F238E27FC236}">
+                <a16:creationId xmlns:a16="http://schemas.microsoft.com/office/drawing/2014/main" id="{758895FB-389B-F41D-953E-4E57C3F789EF}"/>
+              </a:ext>
+            </a:extLst>
+          </p:cNvPr>
+          <p:cNvSpPr>
+            <a:spLocks noGrp="1"/>
+          </p:cNvSpPr>
+          <p:nvPr>
+            <p:ph type="sldNum" sz="quarter" idx="12"/>
+          </p:nvPr>
+        </p:nvSpPr>
+        <p:spPr/>
+        <p:txBody>
+          <a:bodyPr/>
+          <a:lstStyle/>
+          <a:p>
+            <a:fld id="{60A26886-2117-0949-B8A5-D47461AC229C}" type="slidenum">
+              <a:rPr lang="en-DE" smtClean="0"/>
+              <a:t>12</a:t>
+            </a:fld>
+            <a:endParaRPr lang="en-DE"/>
+          </a:p>
+        </p:txBody>
+      </p:sp>
+    </p:spTree>
+    <p:extLst>
+      <p:ext uri="{BB962C8B-B14F-4D97-AF65-F5344CB8AC3E}">
+        <p14:creationId xmlns:p14="http://schemas.microsoft.com/office/powerpoint/2010/main" val="4287020381"/>
       </p:ext>
     </p:extLst>
   </p:cSld>
@@ -8643,10 +8615,10 @@
       </p:grpSpPr>
       <p:sp>
         <p:nvSpPr>
-          <p:cNvPr id="2" name="Title 1">
-            <a:extLst>
-              <a:ext uri="{FF2B5EF4-FFF2-40B4-BE49-F238E27FC236}">
-                <a16:creationId xmlns:a16="http://schemas.microsoft.com/office/drawing/2014/main" id="{4A2E373D-B8E1-C80F-6850-AB342C4A9864}"/>
+          <p:cNvPr id="2" name="Titel 1">
+            <a:extLst>
+              <a:ext uri="{FF2B5EF4-FFF2-40B4-BE49-F238E27FC236}">
+                <a16:creationId xmlns:a16="http://schemas.microsoft.com/office/drawing/2014/main" id="{9DF8B12C-F9AB-B558-9DA3-71233F2DB433}"/>
               </a:ext>
             </a:extLst>
           </p:cNvPr>
@@ -8664,34 +8636,26 @@
           <a:p>
             <a:r>
               <a:rPr lang="de-DE" dirty="0" err="1"/>
-              <a:t>Toward</a:t>
+              <a:t>Causal</a:t>
             </a:r>
             <a:r>
               <a:rPr lang="de-DE" dirty="0"/>
-              <a:t> </a:t>
+              <a:t> Questions and </a:t>
             </a:r>
             <a:r>
               <a:rPr lang="de-DE" dirty="0" err="1"/>
-              <a:t>Causal</a:t>
-            </a:r>
-            <a:r>
-              <a:rPr lang="de-DE" dirty="0"/>
-              <a:t> </a:t>
-            </a:r>
-            <a:r>
-              <a:rPr lang="de-DE" dirty="0" err="1"/>
-              <a:t>Diagrams</a:t>
-            </a:r>
-            <a:endParaRPr lang="en-DE" dirty="0"/>
+              <a:t>Estimands</a:t>
+            </a:r>
+            <a:endParaRPr lang="de-DE" dirty="0"/>
           </a:p>
         </p:txBody>
       </p:sp>
       <p:sp>
         <p:nvSpPr>
-          <p:cNvPr id="3" name="Content Placeholder 2">
-            <a:extLst>
-              <a:ext uri="{FF2B5EF4-FFF2-40B4-BE49-F238E27FC236}">
-                <a16:creationId xmlns:a16="http://schemas.microsoft.com/office/drawing/2014/main" id="{383D6E6C-043B-0FB2-F9D9-1C01623A376A}"/>
+          <p:cNvPr id="3" name="Inhaltsplatzhalter 2">
+            <a:extLst>
+              <a:ext uri="{FF2B5EF4-FFF2-40B4-BE49-F238E27FC236}">
+                <a16:creationId xmlns:a16="http://schemas.microsoft.com/office/drawing/2014/main" id="{80C83CDE-2222-0484-4DAC-BB2A911800BA}"/>
               </a:ext>
             </a:extLst>
           </p:cNvPr>
@@ -8704,303 +8668,19 @@
         </p:nvSpPr>
         <p:spPr/>
         <p:txBody>
-          <a:bodyPr>
-            <a:normAutofit/>
-          </a:bodyPr>
+          <a:bodyPr/>
           <a:lstStyle/>
           <a:p>
-            <a:pPr marL="0" indent="0">
-              <a:buNone/>
-            </a:pPr>
-            <a:r>
-              <a:rPr lang="de-DE" sz="2600" dirty="0" err="1"/>
-              <a:t>load</a:t>
-            </a:r>
-            <a:r>
-              <a:rPr lang="de-DE" sz="2600" dirty="0"/>
-              <a:t> </a:t>
-            </a:r>
-            <a:r>
-              <a:rPr lang="de-DE" sz="2600" dirty="0" err="1"/>
-              <a:t>graph</a:t>
-            </a:r>
-            <a:r>
-              <a:rPr lang="de-DE" sz="2600" dirty="0"/>
-              <a:t> </a:t>
-            </a:r>
-            <a:r>
-              <a:rPr lang="de-DE" sz="2600" dirty="0" err="1"/>
-              <a:t>with</a:t>
-            </a:r>
-            <a:r>
-              <a:rPr lang="de-DE" sz="2600" dirty="0"/>
-              <a:t> </a:t>
-            </a:r>
-            <a:r>
-              <a:rPr lang="de-DE" sz="2600" dirty="0" err="1"/>
-              <a:t>causal</a:t>
-            </a:r>
-            <a:r>
-              <a:rPr lang="de-DE" sz="2600" dirty="0"/>
-              <a:t> </a:t>
-            </a:r>
-            <a:r>
-              <a:rPr lang="de-DE" sz="2600" dirty="0" err="1"/>
-              <a:t>assumptions</a:t>
-            </a:r>
-            <a:r>
-              <a:rPr lang="de-DE" sz="2600" dirty="0"/>
-              <a:t> (</a:t>
-            </a:r>
-            <a:r>
-              <a:rPr lang="de-DE" sz="2600" dirty="0" err="1"/>
-              <a:t>model</a:t>
-            </a:r>
-            <a:r>
-              <a:rPr lang="de-DE" sz="2600" dirty="0"/>
-              <a:t>)</a:t>
-            </a:r>
-          </a:p>
-          <a:p>
-            <a:pPr marL="0" indent="0">
-              <a:buNone/>
-            </a:pPr>
-            <a:r>
-              <a:rPr lang="de-DE" sz="2600" dirty="0">
-                <a:sym typeface="Wingdings" pitchFamily="2" charset="2"/>
-              </a:rPr>
-              <a:t> </a:t>
-            </a:r>
-            <a:r>
-              <a:rPr lang="de-DE" sz="2600" dirty="0" err="1"/>
-              <a:t>arrows</a:t>
-            </a:r>
-            <a:r>
-              <a:rPr lang="de-DE" sz="2600" dirty="0"/>
-              <a:t> </a:t>
-            </a:r>
-            <a:r>
-              <a:rPr lang="de-DE" sz="2600" dirty="0" err="1"/>
-              <a:t>give</a:t>
-            </a:r>
-            <a:r>
-              <a:rPr lang="de-DE" sz="2600" dirty="0"/>
-              <a:t> </a:t>
-            </a:r>
-            <a:r>
-              <a:rPr lang="de-DE" sz="2600" dirty="0" err="1"/>
-              <a:t>direction</a:t>
-            </a:r>
-            <a:r>
-              <a:rPr lang="de-DE" sz="2600" dirty="0"/>
-              <a:t> </a:t>
-            </a:r>
-            <a:r>
-              <a:rPr lang="de-DE" sz="2600" dirty="0" err="1"/>
-              <a:t>of</a:t>
-            </a:r>
-            <a:r>
-              <a:rPr lang="de-DE" sz="2600" dirty="0"/>
-              <a:t> </a:t>
-            </a:r>
-            <a:r>
-              <a:rPr lang="de-DE" sz="2600" dirty="0" err="1"/>
-              <a:t>cause-effect</a:t>
-            </a:r>
-            <a:r>
-              <a:rPr lang="de-DE" sz="2600" dirty="0"/>
-              <a:t> </a:t>
-            </a:r>
-            <a:r>
-              <a:rPr lang="de-DE" sz="2600" dirty="0" err="1"/>
-              <a:t>relationships</a:t>
-            </a:r>
-            <a:endParaRPr lang="de-DE" sz="2600" dirty="0"/>
-          </a:p>
-          <a:p>
-            <a:pPr marL="0" indent="0">
-              <a:buNone/>
-            </a:pPr>
-            <a:endParaRPr lang="de-DE" sz="2600" dirty="0"/>
-          </a:p>
-          <a:p>
-            <a:pPr marL="0" indent="0">
-              <a:buNone/>
-            </a:pPr>
-            <a:r>
-              <a:rPr lang="de-DE" sz="2600" dirty="0" err="1"/>
-              <a:t>causal</a:t>
-            </a:r>
-            <a:r>
-              <a:rPr lang="de-DE" sz="2600" dirty="0"/>
-              <a:t> Markov </a:t>
-            </a:r>
-            <a:r>
-              <a:rPr lang="de-DE" sz="2600" dirty="0" err="1"/>
-              <a:t>property</a:t>
-            </a:r>
-            <a:r>
-              <a:rPr lang="de-DE" sz="2600" dirty="0"/>
-              <a:t>: </a:t>
-            </a:r>
-            <a:r>
-              <a:rPr lang="en-GB" sz="2600" dirty="0"/>
-              <a:t>E</a:t>
-            </a:r>
-            <a:r>
-              <a:rPr lang="en-GB" sz="2600" dirty="0">
-                <a:effectLst/>
-              </a:rPr>
-              <a:t>ach variable in a causal graph is probabilistically independent of its non-effects conditional on its direct causes.</a:t>
-            </a:r>
-            <a:endParaRPr lang="de-DE" sz="2600" dirty="0"/>
-          </a:p>
-          <a:p>
-            <a:pPr marL="0" indent="0">
-              <a:buNone/>
-            </a:pPr>
-            <a:endParaRPr lang="de-DE" sz="2600" dirty="0"/>
-          </a:p>
-          <a:p>
-            <a:pPr marL="0" indent="0">
-              <a:buNone/>
-            </a:pPr>
-            <a:r>
-              <a:rPr lang="de-DE" sz="2600" dirty="0" err="1"/>
-              <a:t>causal</a:t>
-            </a:r>
-            <a:r>
-              <a:rPr lang="de-DE" sz="2600" dirty="0"/>
-              <a:t> </a:t>
-            </a:r>
-            <a:r>
-              <a:rPr lang="de-DE" sz="2600" dirty="0" err="1"/>
-              <a:t>models</a:t>
-            </a:r>
-            <a:r>
-              <a:rPr lang="de-DE" sz="2600" dirty="0"/>
-              <a:t> (</a:t>
-            </a:r>
-            <a:r>
-              <a:rPr lang="de-DE" sz="2600" dirty="0" err="1"/>
-              <a:t>represented</a:t>
-            </a:r>
-            <a:r>
-              <a:rPr lang="de-DE" sz="2600" dirty="0"/>
-              <a:t> </a:t>
-            </a:r>
-            <a:r>
-              <a:rPr lang="de-DE" sz="2600" dirty="0" err="1"/>
-              <a:t>by</a:t>
-            </a:r>
-            <a:r>
-              <a:rPr lang="de-DE" sz="2600" dirty="0"/>
-              <a:t> </a:t>
-            </a:r>
-            <a:r>
-              <a:rPr lang="de-DE" sz="2600" dirty="0" err="1"/>
-              <a:t>graphs</a:t>
-            </a:r>
-            <a:r>
-              <a:rPr lang="de-DE" sz="2600" dirty="0"/>
-              <a:t>) </a:t>
-            </a:r>
-            <a:r>
-              <a:rPr lang="de-DE" sz="2600" dirty="0" err="1"/>
-              <a:t>allow</a:t>
-            </a:r>
-            <a:r>
-              <a:rPr lang="de-DE" sz="2600" dirty="0"/>
-              <a:t> </a:t>
-            </a:r>
-            <a:r>
-              <a:rPr lang="de-DE" sz="2600" dirty="0" err="1"/>
-              <a:t>to</a:t>
-            </a:r>
-            <a:r>
-              <a:rPr lang="de-DE" sz="2600" dirty="0"/>
-              <a:t> </a:t>
-            </a:r>
-            <a:r>
-              <a:rPr lang="de-DE" sz="2600" dirty="0" err="1"/>
-              <a:t>answer</a:t>
-            </a:r>
-            <a:r>
-              <a:rPr lang="de-DE" sz="2600" dirty="0"/>
-              <a:t> interventional and </a:t>
-            </a:r>
-            <a:r>
-              <a:rPr lang="de-DE" sz="2600" dirty="0" err="1"/>
-              <a:t>counterfactual</a:t>
-            </a:r>
-            <a:r>
-              <a:rPr lang="de-DE" sz="2600" dirty="0"/>
-              <a:t> (</a:t>
-            </a:r>
-            <a:r>
-              <a:rPr lang="de-DE" sz="2600" dirty="0" err="1"/>
-              <a:t>fictional</a:t>
-            </a:r>
-            <a:r>
-              <a:rPr lang="de-DE" sz="2600" dirty="0"/>
-              <a:t>) </a:t>
-            </a:r>
-            <a:r>
-              <a:rPr lang="de-DE" sz="2600" dirty="0" err="1"/>
-              <a:t>queries</a:t>
-            </a:r>
-            <a:endParaRPr lang="de-DE" sz="2600" dirty="0"/>
-          </a:p>
-          <a:p>
-            <a:pPr marL="0" indent="0">
-              <a:buNone/>
-            </a:pPr>
-            <a:r>
-              <a:rPr lang="de-DE" sz="2600" dirty="0" err="1"/>
-              <a:t>often</a:t>
-            </a:r>
-            <a:r>
-              <a:rPr lang="de-DE" sz="2600" dirty="0"/>
-              <a:t> </a:t>
-            </a:r>
-            <a:r>
-              <a:rPr lang="de-DE" sz="2600" dirty="0" err="1"/>
-              <a:t>even</a:t>
-            </a:r>
-            <a:r>
-              <a:rPr lang="de-DE" sz="2600" dirty="0"/>
-              <a:t> </a:t>
-            </a:r>
-            <a:r>
-              <a:rPr lang="de-DE" sz="2600" dirty="0" err="1"/>
-              <a:t>without</a:t>
-            </a:r>
-            <a:r>
-              <a:rPr lang="de-DE" sz="2600" dirty="0"/>
-              <a:t> </a:t>
-            </a:r>
-            <a:r>
-              <a:rPr lang="de-DE" sz="2600" dirty="0" err="1"/>
-              <a:t>conducting</a:t>
-            </a:r>
-            <a:r>
-              <a:rPr lang="de-DE" sz="2600" dirty="0"/>
-              <a:t> </a:t>
-            </a:r>
-            <a:r>
-              <a:rPr lang="de-DE" sz="2600" dirty="0" err="1"/>
-              <a:t>experiments</a:t>
-            </a:r>
-            <a:endParaRPr lang="de-DE" sz="2600" dirty="0"/>
+            <a:endParaRPr lang="de-DE"/>
           </a:p>
         </p:txBody>
       </p:sp>
       <p:sp>
         <p:nvSpPr>
-          <p:cNvPr id="4" name="Slide Number Placeholder 3">
-            <a:extLst>
-              <a:ext uri="{FF2B5EF4-FFF2-40B4-BE49-F238E27FC236}">
-                <a16:creationId xmlns:a16="http://schemas.microsoft.com/office/drawing/2014/main" id="{758895FB-389B-F41D-953E-4E57C3F789EF}"/>
+          <p:cNvPr id="4" name="Foliennummernplatzhalter 3">
+            <a:extLst>
+              <a:ext uri="{FF2B5EF4-FFF2-40B4-BE49-F238E27FC236}">
+                <a16:creationId xmlns:a16="http://schemas.microsoft.com/office/drawing/2014/main" id="{86B57ECB-7B5C-6E92-8C0C-78D823B7D48A}"/>
               </a:ext>
             </a:extLst>
           </p:cNvPr>
@@ -9016,18 +8696,18 @@
           <a:bodyPr/>
           <a:lstStyle/>
           <a:p>
-            <a:fld id="{60A26886-2117-0949-B8A5-D47461AC229C}" type="slidenum">
-              <a:rPr lang="en-DE" smtClean="0"/>
+            <a:fld id="{3D4C94FE-FF23-4504-88E9-14D481113291}" type="slidenum">
+              <a:rPr lang="en-GB" smtClean="0"/>
               <a:t>13</a:t>
             </a:fld>
-            <a:endParaRPr lang="en-DE"/>
+            <a:endParaRPr lang="en-GB"/>
           </a:p>
         </p:txBody>
       </p:sp>
     </p:spTree>
     <p:extLst>
       <p:ext uri="{BB962C8B-B14F-4D97-AF65-F5344CB8AC3E}">
-        <p14:creationId xmlns:p14="http://schemas.microsoft.com/office/powerpoint/2010/main" val="4287020381"/>
+        <p14:creationId xmlns:p14="http://schemas.microsoft.com/office/powerpoint/2010/main" val="3671568899"/>
       </p:ext>
     </p:extLst>
   </p:cSld>
@@ -9056,127 +8736,6 @@
       </p:grpSpPr>
       <p:sp>
         <p:nvSpPr>
-          <p:cNvPr id="2" name="Titel 1">
-            <a:extLst>
-              <a:ext uri="{FF2B5EF4-FFF2-40B4-BE49-F238E27FC236}">
-                <a16:creationId xmlns:a16="http://schemas.microsoft.com/office/drawing/2014/main" id="{9DF8B12C-F9AB-B558-9DA3-71233F2DB433}"/>
-              </a:ext>
-            </a:extLst>
-          </p:cNvPr>
-          <p:cNvSpPr>
-            <a:spLocks noGrp="1"/>
-          </p:cNvSpPr>
-          <p:nvPr>
-            <p:ph type="title"/>
-          </p:nvPr>
-        </p:nvSpPr>
-        <p:spPr/>
-        <p:txBody>
-          <a:bodyPr/>
-          <a:lstStyle/>
-          <a:p>
-            <a:r>
-              <a:rPr lang="de-DE" dirty="0" err="1"/>
-              <a:t>Causal</a:t>
-            </a:r>
-            <a:r>
-              <a:rPr lang="de-DE" dirty="0"/>
-              <a:t> Questions and </a:t>
-            </a:r>
-            <a:r>
-              <a:rPr lang="de-DE" dirty="0" err="1"/>
-              <a:t>Estimands</a:t>
-            </a:r>
-            <a:endParaRPr lang="de-DE" dirty="0"/>
-          </a:p>
-        </p:txBody>
-      </p:sp>
-      <p:sp>
-        <p:nvSpPr>
-          <p:cNvPr id="3" name="Inhaltsplatzhalter 2">
-            <a:extLst>
-              <a:ext uri="{FF2B5EF4-FFF2-40B4-BE49-F238E27FC236}">
-                <a16:creationId xmlns:a16="http://schemas.microsoft.com/office/drawing/2014/main" id="{80C83CDE-2222-0484-4DAC-BB2A911800BA}"/>
-              </a:ext>
-            </a:extLst>
-          </p:cNvPr>
-          <p:cNvSpPr>
-            <a:spLocks noGrp="1"/>
-          </p:cNvSpPr>
-          <p:nvPr>
-            <p:ph idx="1"/>
-          </p:nvPr>
-        </p:nvSpPr>
-        <p:spPr/>
-        <p:txBody>
-          <a:bodyPr/>
-          <a:lstStyle/>
-          <a:p>
-            <a:endParaRPr lang="de-DE"/>
-          </a:p>
-        </p:txBody>
-      </p:sp>
-      <p:sp>
-        <p:nvSpPr>
-          <p:cNvPr id="4" name="Foliennummernplatzhalter 3">
-            <a:extLst>
-              <a:ext uri="{FF2B5EF4-FFF2-40B4-BE49-F238E27FC236}">
-                <a16:creationId xmlns:a16="http://schemas.microsoft.com/office/drawing/2014/main" id="{86B57ECB-7B5C-6E92-8C0C-78D823B7D48A}"/>
-              </a:ext>
-            </a:extLst>
-          </p:cNvPr>
-          <p:cNvSpPr>
-            <a:spLocks noGrp="1"/>
-          </p:cNvSpPr>
-          <p:nvPr>
-            <p:ph type="sldNum" sz="quarter" idx="12"/>
-          </p:nvPr>
-        </p:nvSpPr>
-        <p:spPr/>
-        <p:txBody>
-          <a:bodyPr/>
-          <a:lstStyle/>
-          <a:p>
-            <a:fld id="{3D4C94FE-FF23-4504-88E9-14D481113291}" type="slidenum">
-              <a:rPr lang="en-GB" smtClean="0"/>
-              <a:t>14</a:t>
-            </a:fld>
-            <a:endParaRPr lang="en-GB"/>
-          </a:p>
-        </p:txBody>
-      </p:sp>
-    </p:spTree>
-    <p:extLst>
-      <p:ext uri="{BB962C8B-B14F-4D97-AF65-F5344CB8AC3E}">
-        <p14:creationId xmlns:p14="http://schemas.microsoft.com/office/powerpoint/2010/main" val="3671568899"/>
-      </p:ext>
-    </p:extLst>
-  </p:cSld>
-  <p:clrMapOvr>
-    <a:masterClrMapping/>
-  </p:clrMapOvr>
-</p:sld>
-</file>
-
-<file path=ppt/slides/slide15.xml><?xml version="1.0" encoding="utf-8"?>
-<p:sld xmlns:a="http://schemas.openxmlformats.org/drawingml/2006/main" xmlns:r="http://schemas.openxmlformats.org/officeDocument/2006/relationships" xmlns:p="http://schemas.openxmlformats.org/presentationml/2006/main">
-  <p:cSld>
-    <p:spTree>
-      <p:nvGrpSpPr>
-        <p:cNvPr id="1" name=""/>
-        <p:cNvGrpSpPr/>
-        <p:nvPr/>
-      </p:nvGrpSpPr>
-      <p:grpSpPr>
-        <a:xfrm>
-          <a:off x="0" y="0"/>
-          <a:ext cx="0" cy="0"/>
-          <a:chOff x="0" y="0"/>
-          <a:chExt cx="0" cy="0"/>
-        </a:xfrm>
-      </p:grpSpPr>
-      <p:sp>
-        <p:nvSpPr>
           <p:cNvPr id="2" name="Title 1">
             <a:extLst>
               <a:ext uri="{FF2B5EF4-FFF2-40B4-BE49-F238E27FC236}">
@@ -9604,7 +9163,7 @@
           <a:p>
             <a:fld id="{60A26886-2117-0949-B8A5-D47461AC229C}" type="slidenum">
               <a:rPr lang="en-DE" smtClean="0"/>
-              <a:t>15</a:t>
+              <a:t>14</a:t>
             </a:fld>
             <a:endParaRPr lang="en-DE"/>
           </a:p>
@@ -9623,7 +9182,7 @@
 </p:sld>
 </file>
 
-<file path=ppt/slides/slide16.xml><?xml version="1.0" encoding="utf-8"?>
+<file path=ppt/slides/slide15.xml><?xml version="1.0" encoding="utf-8"?>
 <p:sld xmlns:a="http://schemas.openxmlformats.org/drawingml/2006/main" xmlns:r="http://schemas.openxmlformats.org/officeDocument/2006/relationships" xmlns:p="http://schemas.openxmlformats.org/presentationml/2006/main">
   <p:cSld>
     <p:spTree>
@@ -10171,7 +9730,7 @@
           <a:p>
             <a:fld id="{60A26886-2117-0949-B8A5-D47461AC229C}" type="slidenum">
               <a:rPr lang="en-DE" smtClean="0"/>
-              <a:t>16</a:t>
+              <a:t>15</a:t>
             </a:fld>
             <a:endParaRPr lang="en-DE"/>
           </a:p>
@@ -10970,7 +10529,7 @@
 </p:sld>
 </file>
 
-<file path=ppt/slides/slide17.xml><?xml version="1.0" encoding="utf-8"?>
+<file path=ppt/slides/slide16.xml><?xml version="1.0" encoding="utf-8"?>
 <p:sld xmlns:a="http://schemas.openxmlformats.org/drawingml/2006/main" xmlns:r="http://schemas.openxmlformats.org/officeDocument/2006/relationships" xmlns:p="http://schemas.openxmlformats.org/presentationml/2006/main">
   <p:cSld>
     <p:spTree>
@@ -11067,7 +10626,7 @@
           <a:p>
             <a:fld id="{3D4C94FE-FF23-4504-88E9-14D481113291}" type="slidenum">
               <a:rPr lang="en-GB" smtClean="0"/>
-              <a:t>17</a:t>
+              <a:t>16</a:t>
             </a:fld>
             <a:endParaRPr lang="en-GB"/>
           </a:p>
@@ -11086,7 +10645,7 @@
 </p:sld>
 </file>
 
-<file path=ppt/slides/slide18.xml><?xml version="1.0" encoding="utf-8"?>
+<file path=ppt/slides/slide17.xml><?xml version="1.0" encoding="utf-8"?>
 <p:sld xmlns:a="http://schemas.openxmlformats.org/drawingml/2006/main" xmlns:r="http://schemas.openxmlformats.org/officeDocument/2006/relationships" xmlns:p="http://schemas.openxmlformats.org/presentationml/2006/main">
   <p:cSld>
     <p:spTree>
@@ -12197,7 +11756,7 @@
           <a:p>
             <a:fld id="{60A26886-2117-0949-B8A5-D47461AC229C}" type="slidenum">
               <a:rPr lang="en-DE" smtClean="0"/>
-              <a:t>18</a:t>
+              <a:t>17</a:t>
             </a:fld>
             <a:endParaRPr lang="en-DE"/>
           </a:p>
@@ -12207,6 +11766,176 @@
     <p:extLst>
       <p:ext uri="{BB962C8B-B14F-4D97-AF65-F5344CB8AC3E}">
         <p14:creationId xmlns:p14="http://schemas.microsoft.com/office/powerpoint/2010/main" val="3789138857"/>
+      </p:ext>
+    </p:extLst>
+  </p:cSld>
+  <p:clrMapOvr>
+    <a:masterClrMapping/>
+  </p:clrMapOvr>
+</p:sld>
+</file>
+
+<file path=ppt/slides/slide18.xml><?xml version="1.0" encoding="utf-8"?>
+<p:sld xmlns:a="http://schemas.openxmlformats.org/drawingml/2006/main" xmlns:r="http://schemas.openxmlformats.org/officeDocument/2006/relationships" xmlns:p="http://schemas.openxmlformats.org/presentationml/2006/main">
+  <p:cSld>
+    <p:spTree>
+      <p:nvGrpSpPr>
+        <p:cNvPr id="1" name=""/>
+        <p:cNvGrpSpPr/>
+        <p:nvPr/>
+      </p:nvGrpSpPr>
+      <p:grpSpPr>
+        <a:xfrm>
+          <a:off x="0" y="0"/>
+          <a:ext cx="0" cy="0"/>
+          <a:chOff x="0" y="0"/>
+          <a:chExt cx="0" cy="0"/>
+        </a:xfrm>
+      </p:grpSpPr>
+      <p:sp>
+        <p:nvSpPr>
+          <p:cNvPr id="2" name="Title 1">
+            <a:extLst>
+              <a:ext uri="{FF2B5EF4-FFF2-40B4-BE49-F238E27FC236}">
+                <a16:creationId xmlns:a16="http://schemas.microsoft.com/office/drawing/2014/main" id="{EECB9D83-64A4-3C53-97D5-7979A3620543}"/>
+              </a:ext>
+            </a:extLst>
+          </p:cNvPr>
+          <p:cNvSpPr>
+            <a:spLocks noGrp="1"/>
+          </p:cNvSpPr>
+          <p:nvPr>
+            <p:ph type="title"/>
+          </p:nvPr>
+        </p:nvSpPr>
+        <p:spPr/>
+        <p:txBody>
+          <a:bodyPr/>
+          <a:lstStyle/>
+          <a:p>
+            <a:r>
+              <a:rPr lang="en-DE" dirty="0"/>
+              <a:t>Example: Pricing in Retail</a:t>
+            </a:r>
+          </a:p>
+        </p:txBody>
+      </p:sp>
+      <p:sp>
+        <p:nvSpPr>
+          <p:cNvPr id="3" name="Content Placeholder 2">
+            <a:extLst>
+              <a:ext uri="{FF2B5EF4-FFF2-40B4-BE49-F238E27FC236}">
+                <a16:creationId xmlns:a16="http://schemas.microsoft.com/office/drawing/2014/main" id="{08E87C38-FD5C-F468-4679-B3544B286ACF}"/>
+              </a:ext>
+            </a:extLst>
+          </p:cNvPr>
+          <p:cNvSpPr>
+            <a:spLocks noGrp="1"/>
+          </p:cNvSpPr>
+          <p:nvPr>
+            <p:ph idx="1"/>
+          </p:nvPr>
+        </p:nvSpPr>
+        <p:spPr/>
+        <p:txBody>
+          <a:bodyPr>
+            <a:normAutofit/>
+          </a:bodyPr>
+          <a:lstStyle/>
+          <a:p>
+            <a:pPr marL="0" indent="0">
+              <a:buNone/>
+            </a:pPr>
+            <a:r>
+              <a:rPr lang="en-GB" sz="2600" dirty="0"/>
+              <a:t>price setting for a product can be considered a d</a:t>
+            </a:r>
+            <a:r>
+              <a:rPr lang="en-DE" sz="2600" dirty="0"/>
+              <a:t>emand shaping method</a:t>
+            </a:r>
+          </a:p>
+          <a:p>
+            <a:pPr marL="0" indent="0">
+              <a:buNone/>
+            </a:pPr>
+            <a:r>
+              <a:rPr lang="en-GB" sz="2600" dirty="0"/>
+              <a:t>the idea is a causal effect: lower price leads to higher demand</a:t>
+            </a:r>
+          </a:p>
+          <a:p>
+            <a:pPr marL="0" indent="0">
+              <a:buNone/>
+            </a:pPr>
+            <a:r>
+              <a:rPr lang="en-GB" sz="2600" dirty="0">
+                <a:sym typeface="Wingdings" pitchFamily="2" charset="2"/>
+              </a:rPr>
+              <a:t> by estimating this causal effect one can find an optimal price according to a given policy (like maximizing profit)</a:t>
+            </a:r>
+            <a:endParaRPr lang="en-GB" sz="2600" dirty="0"/>
+          </a:p>
+          <a:p>
+            <a:pPr marL="0" indent="0">
+              <a:buNone/>
+            </a:pPr>
+            <a:endParaRPr lang="en-DE" sz="2600" dirty="0"/>
+          </a:p>
+          <a:p>
+            <a:pPr marL="0" indent="0">
+              <a:buNone/>
+            </a:pPr>
+            <a:r>
+              <a:rPr lang="en-GB" sz="2600" dirty="0"/>
+              <a:t>p</a:t>
+            </a:r>
+            <a:r>
+              <a:rPr lang="en-DE" sz="2600" dirty="0"/>
+              <a:t>roblem: confounders influencing both pricing in past (obverved) data and demand, e.g., lowering prices on weekends only for grocery or lowering prices toward end of a season for fashion (most sales at beginning of season)</a:t>
+            </a:r>
+          </a:p>
+          <a:p>
+            <a:pPr marL="0" indent="0">
+              <a:buNone/>
+            </a:pPr>
+            <a:endParaRPr lang="en-DE" sz="2600" dirty="0"/>
+          </a:p>
+        </p:txBody>
+      </p:sp>
+      <p:sp>
+        <p:nvSpPr>
+          <p:cNvPr id="4" name="Slide Number Placeholder 3">
+            <a:extLst>
+              <a:ext uri="{FF2B5EF4-FFF2-40B4-BE49-F238E27FC236}">
+                <a16:creationId xmlns:a16="http://schemas.microsoft.com/office/drawing/2014/main" id="{68047069-74C6-E8C0-167D-0751091BD02F}"/>
+              </a:ext>
+            </a:extLst>
+          </p:cNvPr>
+          <p:cNvSpPr>
+            <a:spLocks noGrp="1"/>
+          </p:cNvSpPr>
+          <p:nvPr>
+            <p:ph type="sldNum" sz="quarter" idx="12"/>
+          </p:nvPr>
+        </p:nvSpPr>
+        <p:spPr/>
+        <p:txBody>
+          <a:bodyPr/>
+          <a:lstStyle/>
+          <a:p>
+            <a:fld id="{60A26886-2117-0949-B8A5-D47461AC229C}" type="slidenum">
+              <a:rPr lang="en-DE" smtClean="0"/>
+              <a:t>18</a:t>
+            </a:fld>
+            <a:endParaRPr lang="en-DE"/>
+          </a:p>
+        </p:txBody>
+      </p:sp>
+    </p:spTree>
+    <p:extLst>
+      <p:ext uri="{BB962C8B-B14F-4D97-AF65-F5344CB8AC3E}">
+        <p14:creationId xmlns:p14="http://schemas.microsoft.com/office/powerpoint/2010/main" val="361719772"/>
       </p:ext>
     </p:extLst>
   </p:cSld>
@@ -12238,7 +11967,7 @@
           <p:cNvPr id="2" name="Title 1">
             <a:extLst>
               <a:ext uri="{FF2B5EF4-FFF2-40B4-BE49-F238E27FC236}">
-                <a16:creationId xmlns:a16="http://schemas.microsoft.com/office/drawing/2014/main" id="{EECB9D83-64A4-3C53-97D5-7979A3620543}"/>
+                <a16:creationId xmlns:a16="http://schemas.microsoft.com/office/drawing/2014/main" id="{E7782324-CE57-4CE6-FEF9-50E74735010C}"/>
               </a:ext>
             </a:extLst>
           </p:cNvPr>
@@ -12256,7 +11985,7 @@
           <a:p>
             <a:r>
               <a:rPr lang="en-DE" dirty="0"/>
-              <a:t>Example: Pricing in Retail</a:t>
+              <a:t>Example: Temporal Confounding</a:t>
             </a:r>
           </a:p>
         </p:txBody>
@@ -12266,7 +11995,7 @@
           <p:cNvPr id="3" name="Content Placeholder 2">
             <a:extLst>
               <a:ext uri="{FF2B5EF4-FFF2-40B4-BE49-F238E27FC236}">
-                <a16:creationId xmlns:a16="http://schemas.microsoft.com/office/drawing/2014/main" id="{08E87C38-FD5C-F468-4679-B3544B286ACF}"/>
+                <a16:creationId xmlns:a16="http://schemas.microsoft.com/office/drawing/2014/main" id="{4F155B54-E9AB-8C70-657B-A214D682BCF7}"/>
               </a:ext>
             </a:extLst>
           </p:cNvPr>
@@ -12288,12 +12017,20 @@
               <a:buNone/>
             </a:pPr>
             <a:r>
-              <a:rPr lang="en-GB" sz="2600" dirty="0"/>
-              <a:t>price setting for a product can be considered a d</a:t>
-            </a:r>
-            <a:r>
-              <a:rPr lang="en-DE" sz="2600" dirty="0"/>
-              <a:t>emand shaping method</a:t>
+              <a:rPr lang="en-GB" sz="2400" dirty="0"/>
+              <a:t>forecasting of times series can rely on endogenous (past values of the time series to forecast in the future) or exogenous (other variables) information</a:t>
+            </a:r>
+          </a:p>
+          <a:p>
+            <a:r>
+              <a:rPr lang="en-GB" sz="2400" dirty="0"/>
+              <a:t>endogenous information means auto-correlation</a:t>
+            </a:r>
+          </a:p>
+          <a:p>
+            <a:r>
+              <a:rPr lang="en-GB" sz="2400" dirty="0"/>
+              <a:t>auto-correlation often spurious (temporal confounding, e.g., common causes at consecutive times), i.e., no direct causal effects</a:t>
             </a:r>
           </a:p>
           <a:p>
@@ -12301,8 +12038,12 @@
               <a:buNone/>
             </a:pPr>
             <a:r>
-              <a:rPr lang="en-GB" sz="2600" dirty="0"/>
-              <a:t>the idea is a causal effect: lower price leads to higher demand</a:t>
+              <a:rPr lang="en-GB" sz="2400" dirty="0"/>
+              <a:t>most s</a:t>
+            </a:r>
+            <a:r>
+              <a:rPr lang="en-DE" sz="2400" dirty="0"/>
+              <a:t>tate-of-the-art forecasting methods rely mainly on endogenous information, i.e., temporal confounding</a:t>
             </a:r>
           </a:p>
           <a:p>
@@ -12310,37 +12051,46 @@
               <a:buNone/>
             </a:pPr>
             <a:r>
-              <a:rPr lang="en-GB" sz="2600" dirty="0">
-                <a:sym typeface="Wingdings" pitchFamily="2" charset="2"/>
-              </a:rPr>
-              <a:t> by estimating this causal effect one can find an optimal price according to a given policy (like maximizing profit)</a:t>
-            </a:r>
-            <a:endParaRPr lang="en-GB" sz="2600" dirty="0"/>
+              <a:rPr lang="en-GB" sz="2400" dirty="0"/>
+              <a:t>b</a:t>
+            </a:r>
+            <a:r>
+              <a:rPr lang="en-DE" sz="2400" dirty="0"/>
+              <a:t>ut learning of direct causal effects from exogenous information offers several advantages, like </a:t>
+            </a:r>
+            <a:r>
+              <a:rPr lang="en-GB" sz="2400" dirty="0"/>
+              <a:t>e</a:t>
+            </a:r>
+            <a:r>
+              <a:rPr lang="en-DE" sz="2400" dirty="0"/>
+              <a:t>xplainability, long-term forecasting, </a:t>
+            </a:r>
+            <a:r>
+              <a:rPr lang="en-GB" sz="2400" dirty="0"/>
+              <a:t>predictability of r</a:t>
+            </a:r>
+            <a:r>
+              <a:rPr lang="en-DE" sz="2400" dirty="0"/>
+              <a:t>are events</a:t>
+            </a:r>
           </a:p>
           <a:p>
             <a:pPr marL="0" indent="0">
               <a:buNone/>
             </a:pPr>
-            <a:endParaRPr lang="en-DE" sz="2600" dirty="0"/>
-          </a:p>
-          <a:p>
-            <a:pPr marL="0" indent="0">
-              <a:buNone/>
-            </a:pPr>
-            <a:r>
-              <a:rPr lang="en-GB" sz="2600" dirty="0"/>
-              <a:t>p</a:t>
-            </a:r>
-            <a:r>
-              <a:rPr lang="en-DE" sz="2600" dirty="0"/>
-              <a:t>roblem: confounders influencing both pricing in past (obverved) data and demand, e.g., lowering prices on weekends only for grocery or lowering prices toward end of a season for fashion (most sales at beginning of season)</a:t>
-            </a:r>
-          </a:p>
-          <a:p>
-            <a:pPr marL="0" indent="0">
-              <a:buNone/>
-            </a:pPr>
-            <a:endParaRPr lang="en-DE" sz="2600" dirty="0"/>
+            <a:r>
+              <a:rPr lang="en-GB" sz="2400" dirty="0">
+                <a:sym typeface="Wingdings" pitchFamily="2" charset="2"/>
+              </a:rPr>
+              <a:t>one simple possible solution: n</a:t>
+            </a:r>
+            <a:r>
+              <a:rPr lang="en-DE" sz="2400" dirty="0">
+                <a:sym typeface="Wingdings" pitchFamily="2" charset="2"/>
+              </a:rPr>
+              <a:t>o use of target auto-correlation in (quasi-causal) ML model, but subsequent residual correction</a:t>
+            </a:r>
           </a:p>
         </p:txBody>
       </p:sp>
@@ -12349,7 +12099,7 @@
           <p:cNvPr id="4" name="Slide Number Placeholder 3">
             <a:extLst>
               <a:ext uri="{FF2B5EF4-FFF2-40B4-BE49-F238E27FC236}">
-                <a16:creationId xmlns:a16="http://schemas.microsoft.com/office/drawing/2014/main" id="{68047069-74C6-E8C0-167D-0751091BD02F}"/>
+                <a16:creationId xmlns:a16="http://schemas.microsoft.com/office/drawing/2014/main" id="{933A2B48-7C85-CD10-8C2B-E64B70045133}"/>
               </a:ext>
             </a:extLst>
           </p:cNvPr>
@@ -12376,7 +12126,7 @@
     </p:spTree>
     <p:extLst>
       <p:ext uri="{BB962C8B-B14F-4D97-AF65-F5344CB8AC3E}">
-        <p14:creationId xmlns:p14="http://schemas.microsoft.com/office/powerpoint/2010/main" val="361719772"/>
+        <p14:creationId xmlns:p14="http://schemas.microsoft.com/office/powerpoint/2010/main" val="3179789590"/>
       </p:ext>
     </p:extLst>
   </p:cSld>
@@ -12405,10 +12155,10 @@
       </p:grpSpPr>
       <p:sp>
         <p:nvSpPr>
-          <p:cNvPr id="4" name="Title 3">
-            <a:extLst>
-              <a:ext uri="{FF2B5EF4-FFF2-40B4-BE49-F238E27FC236}">
-                <a16:creationId xmlns:a16="http://schemas.microsoft.com/office/drawing/2014/main" id="{080AD447-446B-E09E-6F4A-522C1DBB462E}"/>
+          <p:cNvPr id="6" name="Titel 5">
+            <a:extLst>
+              <a:ext uri="{FF2B5EF4-FFF2-40B4-BE49-F238E27FC236}">
+                <a16:creationId xmlns:a16="http://schemas.microsoft.com/office/drawing/2014/main" id="{C3897D96-EE3F-5B83-BF99-D21AC76D1DDC}"/>
               </a:ext>
             </a:extLst>
           </p:cNvPr>
@@ -12425,128 +12175,10 @@
           <a:lstStyle/>
           <a:p>
             <a:r>
-              <a:rPr lang="en-GB" dirty="0"/>
-              <a:t>Course Schedule</a:t>
-            </a:r>
-          </a:p>
-        </p:txBody>
-      </p:sp>
-      <p:sp>
-        <p:nvSpPr>
-          <p:cNvPr id="6" name="Inhaltsplatzhalter 5">
-            <a:extLst>
-              <a:ext uri="{FF2B5EF4-FFF2-40B4-BE49-F238E27FC236}">
-                <a16:creationId xmlns:a16="http://schemas.microsoft.com/office/drawing/2014/main" id="{CF502483-E45D-7D7D-D169-ACA4F8327D26}"/>
-              </a:ext>
-            </a:extLst>
-          </p:cNvPr>
-          <p:cNvSpPr>
-            <a:spLocks noGrp="1"/>
-          </p:cNvSpPr>
-          <p:nvPr>
-            <p:ph sz="half" idx="1"/>
-          </p:nvPr>
-        </p:nvSpPr>
-        <p:spPr/>
-        <p:txBody>
-          <a:bodyPr>
-            <a:normAutofit lnSpcReduction="10000"/>
-          </a:bodyPr>
-          <a:lstStyle/>
-          <a:p>
-            <a:pPr marL="514350" indent="-514350">
-              <a:buFont typeface="+mj-lt"/>
-              <a:buAutoNum type="arabicPeriod"/>
-            </a:pPr>
-            <a:r>
               <a:rPr lang="de-DE" dirty="0" err="1"/>
-              <a:t>Exploratory</a:t>
-            </a:r>
-            <a:r>
-              <a:rPr lang="de-DE" dirty="0"/>
-              <a:t> Data Analysis</a:t>
-            </a:r>
-          </a:p>
-          <a:p>
-            <a:pPr marL="514350" indent="-514350">
-              <a:buFont typeface="+mj-lt"/>
-              <a:buAutoNum type="arabicPeriod"/>
-            </a:pPr>
+              <a:t>Causality</a:t>
+            </a:r>
             <a:endParaRPr lang="de-DE" dirty="0"/>
-          </a:p>
-          <a:p>
-            <a:pPr marL="514350" indent="-514350">
-              <a:buFont typeface="+mj-lt"/>
-              <a:buAutoNum type="arabicPeriod"/>
-            </a:pPr>
-            <a:r>
-              <a:rPr lang="de-DE" dirty="0"/>
-              <a:t>Clustering</a:t>
-            </a:r>
-          </a:p>
-          <a:p>
-            <a:pPr marL="514350" indent="-514350">
-              <a:buFont typeface="+mj-lt"/>
-              <a:buAutoNum type="arabicPeriod"/>
-            </a:pPr>
-            <a:endParaRPr lang="de-DE" dirty="0"/>
-          </a:p>
-          <a:p>
-            <a:pPr marL="514350" indent="-514350">
-              <a:buFont typeface="+mj-lt"/>
-              <a:buAutoNum type="arabicPeriod"/>
-            </a:pPr>
-            <a:r>
-              <a:rPr lang="de-DE" dirty="0" err="1"/>
-              <a:t>Probabilistic</a:t>
-            </a:r>
-            <a:r>
-              <a:rPr lang="de-DE" dirty="0"/>
-              <a:t> Models</a:t>
-            </a:r>
-          </a:p>
-          <a:p>
-            <a:pPr marL="514350" indent="-514350">
-              <a:buFont typeface="+mj-lt"/>
-              <a:buAutoNum type="arabicPeriod"/>
-            </a:pPr>
-            <a:endParaRPr lang="de-DE" dirty="0"/>
-          </a:p>
-          <a:p>
-            <a:pPr marL="514350" indent="-514350">
-              <a:buFont typeface="+mj-lt"/>
-              <a:buAutoNum type="arabicPeriod"/>
-            </a:pPr>
-            <a:r>
-              <a:rPr lang="de-DE" dirty="0"/>
-              <a:t>Statistical </a:t>
-            </a:r>
-            <a:r>
-              <a:rPr lang="de-DE" dirty="0" err="1"/>
-              <a:t>Inference</a:t>
-            </a:r>
-            <a:endParaRPr lang="de-DE" dirty="0"/>
-          </a:p>
-          <a:p>
-            <a:pPr marL="514350" indent="-514350">
-              <a:buFont typeface="+mj-lt"/>
-              <a:buAutoNum type="arabicPeriod"/>
-            </a:pPr>
-            <a:endParaRPr lang="de-DE" dirty="0"/>
-          </a:p>
-          <a:p>
-            <a:pPr marL="514350" indent="-514350">
-              <a:buFont typeface="+mj-lt"/>
-              <a:buAutoNum type="arabicPeriod"/>
-            </a:pPr>
-            <a:r>
-              <a:rPr lang="de-DE" dirty="0" err="1"/>
-              <a:t>Machine</a:t>
-            </a:r>
-            <a:r>
-              <a:rPr lang="de-DE" dirty="0"/>
-              <a:t> Learning</a:t>
-            </a:r>
           </a:p>
         </p:txBody>
       </p:sp>
@@ -12555,7 +12187,7 @@
           <p:cNvPr id="7" name="Inhaltsplatzhalter 6">
             <a:extLst>
               <a:ext uri="{FF2B5EF4-FFF2-40B4-BE49-F238E27FC236}">
-                <a16:creationId xmlns:a16="http://schemas.microsoft.com/office/drawing/2014/main" id="{B671907E-FFFA-73EF-8E7D-4AB4EBDD957B}"/>
+                <a16:creationId xmlns:a16="http://schemas.microsoft.com/office/drawing/2014/main" id="{17DFFDE4-8332-E672-8CEA-495A8A1F1DBF}"/>
               </a:ext>
             </a:extLst>
           </p:cNvPr>
@@ -12563,102 +12195,97 @@
             <a:spLocks noGrp="1"/>
           </p:cNvSpPr>
           <p:nvPr>
-            <p:ph sz="half" idx="2"/>
+            <p:ph idx="1"/>
           </p:nvPr>
         </p:nvSpPr>
         <p:spPr/>
         <p:txBody>
-          <a:bodyPr>
-            <a:normAutofit lnSpcReduction="10000"/>
-          </a:bodyPr>
+          <a:bodyPr/>
           <a:lstStyle/>
           <a:p>
-            <a:pPr marL="514350" indent="-514350">
-              <a:buFont typeface="+mj-lt"/>
-              <a:buAutoNum type="arabicPeriod" startAt="6"/>
-            </a:pPr>
+            <a:r>
+              <a:rPr lang="de-DE" dirty="0" err="1"/>
+              <a:t>causal</a:t>
+            </a:r>
             <a:r>
               <a:rPr lang="de-DE" dirty="0"/>
-              <a:t>Feature Engineering</a:t>
-            </a:r>
-          </a:p>
-          <a:p>
-            <a:pPr marL="514350" indent="-514350">
-              <a:buFont typeface="+mj-lt"/>
-              <a:buAutoNum type="arabicPeriod" startAt="6"/>
-            </a:pPr>
+              <a:t> </a:t>
+            </a:r>
+            <a:r>
+              <a:rPr lang="de-DE" dirty="0" err="1"/>
+              <a:t>inference</a:t>
+            </a:r>
             <a:endParaRPr lang="de-DE" dirty="0"/>
           </a:p>
           <a:p>
-            <a:pPr marL="514350" indent="-514350">
-              <a:buFont typeface="+mj-lt"/>
-              <a:buAutoNum type="arabicPeriod" startAt="6"/>
-            </a:pPr>
+            <a:r>
+              <a:rPr lang="de-DE" dirty="0" err="1"/>
+              <a:t>confounding</a:t>
+            </a:r>
+            <a:endParaRPr lang="de-DE" dirty="0"/>
+          </a:p>
+          <a:p>
             <a:r>
               <a:rPr lang="de-DE" dirty="0"/>
-              <a:t>Model Evaluation</a:t>
-            </a:r>
-          </a:p>
-          <a:p>
-            <a:pPr marL="514350" indent="-514350">
-              <a:buFont typeface="+mj-lt"/>
-              <a:buAutoNum type="arabicPeriod" startAt="6"/>
-            </a:pPr>
+              <a:t>DAG</a:t>
+            </a:r>
+          </a:p>
+          <a:p>
+            <a:r>
+              <a:rPr lang="de-DE" dirty="0"/>
+              <a:t>do-</a:t>
+            </a:r>
+            <a:r>
+              <a:rPr lang="de-DE" dirty="0" err="1"/>
+              <a:t>formalism</a:t>
+            </a:r>
             <a:endParaRPr lang="de-DE" dirty="0"/>
           </a:p>
           <a:p>
-            <a:pPr marL="514350" indent="-514350">
-              <a:buFont typeface="+mj-lt"/>
-              <a:buAutoNum type="arabicPeriod" startAt="6"/>
-            </a:pPr>
+            <a:r>
+              <a:rPr lang="de-DE" dirty="0" err="1"/>
+              <a:t>counterfactuals</a:t>
+            </a:r>
+            <a:endParaRPr lang="de-DE" dirty="0"/>
+          </a:p>
+          <a:p>
             <a:r>
               <a:rPr lang="de-DE" dirty="0"/>
-              <a:t>Deep Learning</a:t>
-            </a:r>
-          </a:p>
-          <a:p>
-            <a:pPr marL="514350" indent="-514350">
-              <a:buFont typeface="+mj-lt"/>
-              <a:buAutoNum type="arabicPeriod" startAt="6"/>
-            </a:pPr>
-            <a:endParaRPr lang="de-DE" dirty="0"/>
-          </a:p>
-          <a:p>
-            <a:pPr marL="514350" indent="-514350">
-              <a:buFont typeface="+mj-lt"/>
-              <a:buAutoNum type="arabicPeriod" startAt="6"/>
-            </a:pPr>
+              <a:t>inverse </a:t>
+            </a:r>
+            <a:r>
+              <a:rPr lang="de-DE" dirty="0" err="1"/>
+              <a:t>propensity</a:t>
+            </a:r>
             <a:r>
               <a:rPr lang="de-DE" dirty="0"/>
-              <a:t>Time Series</a:t>
-            </a:r>
-          </a:p>
-          <a:p>
-            <a:pPr marL="514350" indent="-514350">
-              <a:buFont typeface="+mj-lt"/>
-              <a:buAutoNum type="arabicPeriod" startAt="6"/>
-            </a:pPr>
-            <a:endParaRPr lang="de-DE" dirty="0"/>
-          </a:p>
-          <a:p>
-            <a:pPr marL="514350" indent="-514350">
-              <a:buFont typeface="+mj-lt"/>
-              <a:buAutoNum type="arabicPeriod" startAt="6"/>
-            </a:pPr>
+              <a:t> score </a:t>
+            </a:r>
             <a:r>
               <a:rPr lang="de-DE" dirty="0" err="1"/>
-              <a:t>Causality</a:t>
-            </a:r>
-            <a:endParaRPr lang="de-DE" dirty="0"/>
+              <a:t>weighting</a:t>
+            </a:r>
+            <a:r>
+              <a:rPr lang="de-DE" dirty="0"/>
+              <a:t> </a:t>
+            </a:r>
+            <a:r>
+              <a:rPr lang="de-DE" dirty="0" err="1"/>
+              <a:t>for</a:t>
+            </a:r>
+            <a:r>
+              <a:rPr lang="de-DE" dirty="0"/>
+              <a:t> ML</a:t>
+            </a:r>
           </a:p>
         </p:txBody>
       </p:sp>
       <p:sp>
         <p:nvSpPr>
-          <p:cNvPr id="3" name="Slide Number Placeholder 2">
-            <a:extLst>
-              <a:ext uri="{FF2B5EF4-FFF2-40B4-BE49-F238E27FC236}">
-                <a16:creationId xmlns:a16="http://schemas.microsoft.com/office/drawing/2014/main" id="{A0664D44-83AC-6A7A-17E0-C1AE2ED18FF5}"/>
+          <p:cNvPr id="5" name="Foliennummernplatzhalter 4">
+            <a:extLst>
+              <a:ext uri="{FF2B5EF4-FFF2-40B4-BE49-F238E27FC236}">
+                <a16:creationId xmlns:a16="http://schemas.microsoft.com/office/drawing/2014/main" id="{63B78F69-38CB-DF06-CD98-6D4C89B207C3}"/>
               </a:ext>
             </a:extLst>
           </p:cNvPr>
@@ -12674,18 +12301,18 @@
           <a:bodyPr/>
           <a:lstStyle/>
           <a:p>
-            <a:fld id="{08C366F5-AFAD-49CB-854A-9D9E238FCA13}" type="slidenum">
+            <a:fld id="{3D4C94FE-FF23-4504-88E9-14D481113291}" type="slidenum">
               <a:rPr lang="en-GB" smtClean="0"/>
               <a:t>2</a:t>
             </a:fld>
-            <a:endParaRPr lang="en-GB" dirty="0"/>
+            <a:endParaRPr lang="en-GB"/>
           </a:p>
         </p:txBody>
       </p:sp>
     </p:spTree>
     <p:extLst>
       <p:ext uri="{BB962C8B-B14F-4D97-AF65-F5344CB8AC3E}">
-        <p14:creationId xmlns:p14="http://schemas.microsoft.com/office/powerpoint/2010/main" val="310336692"/>
+        <p14:creationId xmlns:p14="http://schemas.microsoft.com/office/powerpoint/2010/main" val="4177832565"/>
       </p:ext>
     </p:extLst>
   </p:cSld>
@@ -12717,7 +12344,7 @@
           <p:cNvPr id="2" name="Title 1">
             <a:extLst>
               <a:ext uri="{FF2B5EF4-FFF2-40B4-BE49-F238E27FC236}">
-                <a16:creationId xmlns:a16="http://schemas.microsoft.com/office/drawing/2014/main" id="{E7782324-CE57-4CE6-FEF9-50E74735010C}"/>
+                <a16:creationId xmlns:a16="http://schemas.microsoft.com/office/drawing/2014/main" id="{A72B981D-FFE0-796E-56F3-3E6A22CCC128}"/>
               </a:ext>
             </a:extLst>
           </p:cNvPr>
@@ -12734,9 +12361,26 @@
           <a:lstStyle/>
           <a:p>
             <a:r>
-              <a:rPr lang="en-DE" dirty="0"/>
-              <a:t>Example: Temporal Confounding</a:t>
-            </a:r>
+              <a:rPr lang="de-DE" dirty="0" err="1"/>
+              <a:t>Interventions</a:t>
+            </a:r>
+            <a:r>
+              <a:rPr lang="de-DE" dirty="0"/>
+              <a:t> </a:t>
+            </a:r>
+            <a:r>
+              <a:rPr lang="de-DE" dirty="0" err="1"/>
+              <a:t>vs</a:t>
+            </a:r>
+            <a:r>
+              <a:rPr lang="de-DE" dirty="0"/>
+              <a:t> </a:t>
+            </a:r>
+            <a:r>
+              <a:rPr lang="de-DE" dirty="0" err="1"/>
+              <a:t>Observations</a:t>
+            </a:r>
+            <a:endParaRPr lang="en-DE" dirty="0"/>
           </a:p>
         </p:txBody>
       </p:sp>
@@ -12745,7 +12389,7 @@
           <p:cNvPr id="3" name="Content Placeholder 2">
             <a:extLst>
               <a:ext uri="{FF2B5EF4-FFF2-40B4-BE49-F238E27FC236}">
-                <a16:creationId xmlns:a16="http://schemas.microsoft.com/office/drawing/2014/main" id="{4F155B54-E9AB-8C70-657B-A214D682BCF7}"/>
+                <a16:creationId xmlns:a16="http://schemas.microsoft.com/office/drawing/2014/main" id="{855BECF9-A2A3-6EAE-C306-1D3A352C1F59}"/>
               </a:ext>
             </a:extLst>
           </p:cNvPr>
@@ -12767,20 +12411,16 @@
               <a:buNone/>
             </a:pPr>
             <a:r>
-              <a:rPr lang="en-GB" sz="2400" dirty="0"/>
-              <a:t>forecasting of times series can rely on endogenous (past values of the time series to forecast in the future) or exogenous (other variables) information</a:t>
-            </a:r>
-          </a:p>
-          <a:p>
-            <a:r>
-              <a:rPr lang="en-GB" sz="2400" dirty="0"/>
-              <a:t>endogenous information means auto-correlation</a:t>
-            </a:r>
-          </a:p>
-          <a:p>
-            <a:r>
-              <a:rPr lang="en-GB" sz="2400" dirty="0"/>
-              <a:t>auto-correlation often spurious (temporal confounding, e.g., common causes at consecutive times), i.e., no direct causal effects</a:t>
+              <a:rPr lang="de-DE" sz="2600" dirty="0" err="1">
+                <a:sym typeface="Wingdings" pitchFamily="2" charset="2"/>
+              </a:rPr>
+              <a:t>aim</a:t>
+            </a:r>
+            <a:r>
+              <a:rPr lang="de-DE" sz="2600" dirty="0">
+                <a:sym typeface="Wingdings" pitchFamily="2" charset="2"/>
+              </a:rPr>
+              <a:t>:</a:t>
             </a:r>
           </a:p>
           <a:p>
@@ -12788,59 +12428,483 @@
               <a:buNone/>
             </a:pPr>
             <a:r>
-              <a:rPr lang="en-GB" sz="2400" dirty="0"/>
-              <a:t>most s</a:t>
-            </a:r>
-            <a:r>
-              <a:rPr lang="en-DE" sz="2400" dirty="0"/>
-              <a:t>tate-of-the-art forecasting methods rely mainly on endogenous information, i.e., temporal confounding</a:t>
+              <a:rPr lang="de-DE" sz="2600" dirty="0" err="1">
+                <a:sym typeface="Wingdings" pitchFamily="2" charset="2"/>
+              </a:rPr>
+              <a:t>prediction</a:t>
+            </a:r>
+            <a:r>
+              <a:rPr lang="de-DE" sz="2600" dirty="0">
+                <a:sym typeface="Wingdings" pitchFamily="2" charset="2"/>
+              </a:rPr>
+              <a:t> </a:t>
+            </a:r>
+            <a:r>
+              <a:rPr lang="de-DE" sz="2600" dirty="0" err="1">
+                <a:sym typeface="Wingdings" pitchFamily="2" charset="2"/>
+              </a:rPr>
+              <a:t>of</a:t>
+            </a:r>
+            <a:r>
+              <a:rPr lang="de-DE" sz="2600" dirty="0">
+                <a:sym typeface="Wingdings" pitchFamily="2" charset="2"/>
+              </a:rPr>
+              <a:t> (</a:t>
+            </a:r>
+            <a:r>
+              <a:rPr lang="de-DE" sz="2600" dirty="0" err="1">
+                <a:sym typeface="Wingdings" pitchFamily="2" charset="2"/>
+              </a:rPr>
+              <a:t>average</a:t>
+            </a:r>
+            <a:r>
+              <a:rPr lang="de-DE" sz="2600" dirty="0">
+                <a:sym typeface="Wingdings" pitchFamily="2" charset="2"/>
+              </a:rPr>
+              <a:t>) </a:t>
+            </a:r>
+            <a:r>
+              <a:rPr lang="de-DE" sz="2600" dirty="0" err="1">
+                <a:sym typeface="Wingdings" pitchFamily="2" charset="2"/>
+              </a:rPr>
+              <a:t>causal</a:t>
+            </a:r>
+            <a:r>
+              <a:rPr lang="de-DE" sz="2600" dirty="0">
+                <a:sym typeface="Wingdings" pitchFamily="2" charset="2"/>
+              </a:rPr>
+              <a:t> </a:t>
+            </a:r>
+            <a:r>
+              <a:rPr lang="de-DE" sz="2600" dirty="0" err="1">
+                <a:sym typeface="Wingdings" pitchFamily="2" charset="2"/>
+              </a:rPr>
+              <a:t>effect</a:t>
+            </a:r>
+            <a:r>
+              <a:rPr lang="de-DE" sz="2600" dirty="0">
+                <a:sym typeface="Wingdings" pitchFamily="2" charset="2"/>
+              </a:rPr>
+              <a:t> </a:t>
+            </a:r>
+            <a:r>
+              <a:rPr lang="de-DE" sz="2600" dirty="0" err="1">
+                <a:sym typeface="Wingdings" pitchFamily="2" charset="2"/>
+              </a:rPr>
+              <a:t>of</a:t>
+            </a:r>
+            <a:r>
+              <a:rPr lang="de-DE" sz="2600" dirty="0">
+                <a:sym typeface="Wingdings" pitchFamily="2" charset="2"/>
+              </a:rPr>
+              <a:t> (</a:t>
+            </a:r>
+            <a:r>
+              <a:rPr lang="de-DE" sz="2600" dirty="0" err="1">
+                <a:sym typeface="Wingdings" pitchFamily="2" charset="2"/>
+              </a:rPr>
+              <a:t>yet</a:t>
+            </a:r>
+            <a:r>
+              <a:rPr lang="de-DE" sz="2600" dirty="0">
+                <a:sym typeface="Wingdings" pitchFamily="2" charset="2"/>
+              </a:rPr>
+              <a:t> </a:t>
+            </a:r>
+            <a:r>
+              <a:rPr lang="de-DE" sz="2600" dirty="0" err="1">
+                <a:sym typeface="Wingdings" pitchFamily="2" charset="2"/>
+              </a:rPr>
+              <a:t>untried</a:t>
+            </a:r>
+            <a:r>
+              <a:rPr lang="de-DE" sz="2600" dirty="0">
+                <a:sym typeface="Wingdings" pitchFamily="2" charset="2"/>
+              </a:rPr>
+              <a:t>) </a:t>
+            </a:r>
+            <a:r>
+              <a:rPr lang="de-DE" sz="2600" dirty="0" err="1">
+                <a:sym typeface="Wingdings" pitchFamily="2" charset="2"/>
+              </a:rPr>
+              <a:t>actions</a:t>
+            </a:r>
+            <a:r>
+              <a:rPr lang="de-DE" sz="2600" dirty="0">
+                <a:sym typeface="Wingdings" pitchFamily="2" charset="2"/>
+              </a:rPr>
+              <a:t> (</a:t>
+            </a:r>
+            <a:r>
+              <a:rPr lang="de-DE" sz="2600" dirty="0" err="1">
+                <a:sym typeface="Wingdings" pitchFamily="2" charset="2"/>
+              </a:rPr>
+              <a:t>interventions</a:t>
+            </a:r>
+            <a:r>
+              <a:rPr lang="de-DE" sz="2600" dirty="0">
+                <a:sym typeface="Wingdings" pitchFamily="2" charset="2"/>
+              </a:rPr>
+              <a:t>)</a:t>
             </a:r>
           </a:p>
           <a:p>
             <a:pPr marL="0" indent="0">
               <a:buNone/>
             </a:pPr>
-            <a:r>
-              <a:rPr lang="en-GB" sz="2400" dirty="0"/>
-              <a:t>b</a:t>
-            </a:r>
-            <a:r>
-              <a:rPr lang="en-DE" sz="2400" dirty="0"/>
-              <a:t>ut learning of direct causal effects from exogenous information offers several advantages, like </a:t>
-            </a:r>
-            <a:r>
-              <a:rPr lang="en-GB" sz="2400" dirty="0"/>
-              <a:t>e</a:t>
-            </a:r>
-            <a:r>
-              <a:rPr lang="en-DE" sz="2400" dirty="0"/>
-              <a:t>xplainability, long-term forecasting, </a:t>
-            </a:r>
-            <a:r>
-              <a:rPr lang="en-GB" sz="2400" dirty="0"/>
-              <a:t>predictability of r</a:t>
-            </a:r>
-            <a:r>
-              <a:rPr lang="en-DE" sz="2400" dirty="0"/>
-              <a:t>are events</a:t>
-            </a:r>
+            <a:endParaRPr lang="de-DE" sz="2600" dirty="0">
+              <a:sym typeface="Wingdings" pitchFamily="2" charset="2"/>
+            </a:endParaRPr>
           </a:p>
           <a:p>
             <a:pPr marL="0" indent="0">
               <a:buNone/>
             </a:pPr>
             <a:r>
-              <a:rPr lang="en-GB" sz="2400" dirty="0">
+              <a:rPr lang="de-DE" sz="2600" dirty="0" err="1">
                 <a:sym typeface="Wingdings" pitchFamily="2" charset="2"/>
               </a:rPr>
-              <a:t>one simple possible solution: n</a:t>
-            </a:r>
-            <a:r>
-              <a:rPr lang="en-DE" sz="2400" dirty="0">
+              <a:t>two</a:t>
+            </a:r>
+            <a:r>
+              <a:rPr lang="de-DE" sz="2600" dirty="0">
                 <a:sym typeface="Wingdings" pitchFamily="2" charset="2"/>
               </a:rPr>
-              <a:t>o use of target auto-correlation in (quasi-causal) ML model, but subsequent residual correction</a:t>
-            </a:r>
+              <a:t> </a:t>
+            </a:r>
+            <a:r>
+              <a:rPr lang="de-DE" sz="2600" dirty="0" err="1">
+                <a:sym typeface="Wingdings" pitchFamily="2" charset="2"/>
+              </a:rPr>
+              <a:t>ways</a:t>
+            </a:r>
+            <a:r>
+              <a:rPr lang="de-DE" sz="2600" dirty="0">
+                <a:sym typeface="Wingdings" pitchFamily="2" charset="2"/>
+              </a:rPr>
+              <a:t>:</a:t>
+            </a:r>
+            <a:endParaRPr lang="de-DE" sz="2600" dirty="0"/>
+          </a:p>
+          <a:p>
+            <a:r>
+              <a:rPr lang="de-DE" sz="2600" dirty="0" err="1"/>
+              <a:t>intervene</a:t>
+            </a:r>
+            <a:r>
+              <a:rPr lang="de-DE" sz="2600" dirty="0"/>
+              <a:t> via </a:t>
+            </a:r>
+            <a:r>
+              <a:rPr lang="de-DE" sz="2600" dirty="0" err="1"/>
+              <a:t>randomized</a:t>
+            </a:r>
+            <a:r>
+              <a:rPr lang="de-DE" sz="2600" dirty="0"/>
+              <a:t> </a:t>
+            </a:r>
+            <a:r>
+              <a:rPr lang="de-DE" sz="2600" dirty="0" err="1"/>
+              <a:t>controlled</a:t>
+            </a:r>
+            <a:r>
+              <a:rPr lang="de-DE" sz="2600" dirty="0"/>
+              <a:t> </a:t>
+            </a:r>
+            <a:r>
+              <a:rPr lang="de-DE" sz="2600" dirty="0" err="1"/>
+              <a:t>trials</a:t>
+            </a:r>
+            <a:r>
+              <a:rPr lang="de-DE" sz="2600" dirty="0"/>
+              <a:t> (RCT): </a:t>
+            </a:r>
+            <a:r>
+              <a:rPr lang="de-DE" sz="2600" dirty="0" err="1"/>
+              <a:t>set</a:t>
+            </a:r>
+            <a:r>
+              <a:rPr lang="de-DE" sz="2600" dirty="0"/>
+              <a:t> </a:t>
+            </a:r>
+            <a:r>
+              <a:rPr lang="de-DE" sz="2600" dirty="0" err="1"/>
+              <a:t>action</a:t>
+            </a:r>
+            <a:r>
+              <a:rPr lang="de-DE" sz="2600" dirty="0"/>
+              <a:t> </a:t>
+            </a:r>
+            <a:r>
+              <a:rPr lang="de-DE" sz="2600" dirty="0" err="1"/>
+              <a:t>randomly</a:t>
+            </a:r>
+            <a:r>
+              <a:rPr lang="de-DE" sz="2600" dirty="0"/>
+              <a:t> and check </a:t>
+            </a:r>
+            <a:r>
+              <a:rPr lang="de-DE" sz="2600" dirty="0" err="1"/>
+              <a:t>effect</a:t>
+            </a:r>
+            <a:r>
+              <a:rPr lang="de-DE" sz="2600" dirty="0"/>
+              <a:t> </a:t>
+            </a:r>
+            <a:r>
+              <a:rPr lang="de-DE" sz="2600" dirty="0">
+                <a:sym typeface="Wingdings" pitchFamily="2" charset="2"/>
+              </a:rPr>
+              <a:t> </a:t>
+            </a:r>
+            <a:r>
+              <a:rPr lang="de-DE" sz="2600" dirty="0" err="1">
+                <a:sym typeface="Wingdings" pitchFamily="2" charset="2"/>
+              </a:rPr>
+              <a:t>physically</a:t>
+            </a:r>
+            <a:r>
+              <a:rPr lang="de-DE" sz="2600" dirty="0">
+                <a:sym typeface="Wingdings" pitchFamily="2" charset="2"/>
+              </a:rPr>
+              <a:t> </a:t>
+            </a:r>
+            <a:r>
+              <a:rPr lang="de-DE" sz="2600" dirty="0" err="1">
+                <a:sym typeface="Wingdings" pitchFamily="2" charset="2"/>
+              </a:rPr>
+              <a:t>disassociate</a:t>
+            </a:r>
+            <a:r>
+              <a:rPr lang="de-DE" sz="2600" dirty="0">
+                <a:sym typeface="Wingdings" pitchFamily="2" charset="2"/>
+              </a:rPr>
+              <a:t> </a:t>
+            </a:r>
+            <a:r>
+              <a:rPr lang="de-DE" sz="2600" dirty="0" err="1">
+                <a:sym typeface="Wingdings" pitchFamily="2" charset="2"/>
+              </a:rPr>
+              <a:t>cause</a:t>
+            </a:r>
+            <a:r>
+              <a:rPr lang="de-DE" sz="2600" dirty="0">
+                <a:sym typeface="Wingdings" pitchFamily="2" charset="2"/>
+              </a:rPr>
+              <a:t> </a:t>
+            </a:r>
+            <a:r>
+              <a:rPr lang="de-DE" sz="2600" dirty="0" err="1">
+                <a:sym typeface="Wingdings" pitchFamily="2" charset="2"/>
+              </a:rPr>
+              <a:t>from</a:t>
+            </a:r>
+            <a:r>
+              <a:rPr lang="de-DE" sz="2600" dirty="0">
+                <a:sym typeface="Wingdings" pitchFamily="2" charset="2"/>
+              </a:rPr>
+              <a:t> </a:t>
+            </a:r>
+            <a:r>
+              <a:rPr lang="de-DE" sz="2600" dirty="0" err="1">
+                <a:sym typeface="Wingdings" pitchFamily="2" charset="2"/>
+              </a:rPr>
+              <a:t>confounders</a:t>
+            </a:r>
+            <a:endParaRPr lang="de-DE" sz="2600" dirty="0">
+              <a:sym typeface="Wingdings" pitchFamily="2" charset="2"/>
+            </a:endParaRPr>
+          </a:p>
+          <a:p>
+            <a:r>
+              <a:rPr lang="de-DE" sz="2600" dirty="0" err="1">
+                <a:sym typeface="Wingdings" pitchFamily="2" charset="2"/>
+              </a:rPr>
+              <a:t>causal</a:t>
+            </a:r>
+            <a:r>
+              <a:rPr lang="de-DE" sz="2600" dirty="0">
+                <a:sym typeface="Wingdings" pitchFamily="2" charset="2"/>
+              </a:rPr>
+              <a:t> </a:t>
+            </a:r>
+            <a:r>
+              <a:rPr lang="de-DE" sz="2600" dirty="0" err="1">
+                <a:sym typeface="Wingdings" pitchFamily="2" charset="2"/>
+              </a:rPr>
+              <a:t>model</a:t>
+            </a:r>
+            <a:r>
+              <a:rPr lang="de-DE" sz="2600" dirty="0">
+                <a:sym typeface="Wingdings" pitchFamily="2" charset="2"/>
+              </a:rPr>
+              <a:t>: </a:t>
+            </a:r>
+            <a:r>
+              <a:rPr lang="de-DE" sz="2600" dirty="0" err="1">
+                <a:sym typeface="Wingdings" pitchFamily="2" charset="2"/>
+              </a:rPr>
+              <a:t>emulating</a:t>
+            </a:r>
+            <a:r>
+              <a:rPr lang="de-DE" sz="2600" dirty="0">
+                <a:sym typeface="Wingdings" pitchFamily="2" charset="2"/>
+              </a:rPr>
+              <a:t> </a:t>
+            </a:r>
+            <a:r>
+              <a:rPr lang="de-DE" sz="2600" dirty="0" err="1">
+                <a:sym typeface="Wingdings" pitchFamily="2" charset="2"/>
+              </a:rPr>
+              <a:t>interventions</a:t>
+            </a:r>
+            <a:r>
+              <a:rPr lang="de-DE" sz="2600" dirty="0">
+                <a:sym typeface="Wingdings" pitchFamily="2" charset="2"/>
+              </a:rPr>
+              <a:t> </a:t>
+            </a:r>
+            <a:r>
+              <a:rPr lang="de-DE" sz="2600" dirty="0" err="1">
+                <a:sym typeface="Wingdings" pitchFamily="2" charset="2"/>
+              </a:rPr>
+              <a:t>by</a:t>
+            </a:r>
+            <a:r>
+              <a:rPr lang="de-DE" sz="2600" dirty="0">
+                <a:sym typeface="Wingdings" pitchFamily="2" charset="2"/>
+              </a:rPr>
+              <a:t> smart </a:t>
+            </a:r>
+            <a:r>
+              <a:rPr lang="de-DE" sz="2600" dirty="0" err="1">
+                <a:sym typeface="Wingdings" pitchFamily="2" charset="2"/>
+              </a:rPr>
+              <a:t>calculations</a:t>
+            </a:r>
+            <a:r>
+              <a:rPr lang="de-DE" sz="2600" dirty="0">
+                <a:sym typeface="Wingdings" pitchFamily="2" charset="2"/>
+              </a:rPr>
+              <a:t>  </a:t>
+            </a:r>
+            <a:r>
+              <a:rPr lang="de-DE" sz="2600" dirty="0" err="1">
+                <a:sym typeface="Wingdings" pitchFamily="2" charset="2"/>
+              </a:rPr>
+              <a:t>predict</a:t>
+            </a:r>
+            <a:r>
+              <a:rPr lang="de-DE" sz="2600" dirty="0">
+                <a:sym typeface="Wingdings" pitchFamily="2" charset="2"/>
+              </a:rPr>
+              <a:t> </a:t>
+            </a:r>
+            <a:r>
+              <a:rPr lang="de-DE" sz="2600" dirty="0" err="1">
+                <a:sym typeface="Wingdings" pitchFamily="2" charset="2"/>
+              </a:rPr>
+              <a:t>effects</a:t>
+            </a:r>
+            <a:r>
+              <a:rPr lang="de-DE" sz="2600" dirty="0">
+                <a:sym typeface="Wingdings" pitchFamily="2" charset="2"/>
+              </a:rPr>
+              <a:t> </a:t>
+            </a:r>
+            <a:r>
+              <a:rPr lang="de-DE" sz="2600" dirty="0" err="1">
+                <a:sym typeface="Wingdings" pitchFamily="2" charset="2"/>
+              </a:rPr>
+              <a:t>of</a:t>
+            </a:r>
+            <a:r>
+              <a:rPr lang="de-DE" sz="2600" dirty="0">
+                <a:sym typeface="Wingdings" pitchFamily="2" charset="2"/>
+              </a:rPr>
+              <a:t> potential </a:t>
+            </a:r>
+            <a:r>
+              <a:rPr lang="de-DE" sz="2600" dirty="0" err="1">
+                <a:sym typeface="Wingdings" pitchFamily="2" charset="2"/>
+              </a:rPr>
+              <a:t>interventions</a:t>
+            </a:r>
+            <a:r>
+              <a:rPr lang="de-DE" sz="2600" dirty="0">
+                <a:sym typeface="Wingdings" pitchFamily="2" charset="2"/>
+              </a:rPr>
+              <a:t> </a:t>
+            </a:r>
+            <a:r>
+              <a:rPr lang="de-DE" sz="2600" dirty="0" err="1">
+                <a:sym typeface="Wingdings" pitchFamily="2" charset="2"/>
+              </a:rPr>
+              <a:t>from</a:t>
+            </a:r>
+            <a:r>
+              <a:rPr lang="de-DE" sz="2600" dirty="0">
+                <a:sym typeface="Wingdings" pitchFamily="2" charset="2"/>
+              </a:rPr>
+              <a:t> </a:t>
+            </a:r>
+            <a:r>
+              <a:rPr lang="de-DE" sz="2600" dirty="0" err="1">
+                <a:sym typeface="Wingdings" pitchFamily="2" charset="2"/>
+              </a:rPr>
+              <a:t>observational</a:t>
+            </a:r>
+            <a:r>
+              <a:rPr lang="de-DE" sz="2600" dirty="0">
+                <a:sym typeface="Wingdings" pitchFamily="2" charset="2"/>
+              </a:rPr>
+              <a:t> </a:t>
+            </a:r>
+            <a:r>
+              <a:rPr lang="de-DE" sz="2600" dirty="0" err="1">
+                <a:sym typeface="Wingdings" pitchFamily="2" charset="2"/>
+              </a:rPr>
+              <a:t>studies</a:t>
+            </a:r>
+            <a:r>
+              <a:rPr lang="de-DE" sz="2600" dirty="0">
+                <a:sym typeface="Wingdings" pitchFamily="2" charset="2"/>
+              </a:rPr>
+              <a:t> </a:t>
+            </a:r>
+            <a:r>
+              <a:rPr lang="de-DE" sz="2600" dirty="0" err="1">
+                <a:sym typeface="Wingdings" pitchFamily="2" charset="2"/>
+              </a:rPr>
+              <a:t>only</a:t>
+            </a:r>
+            <a:r>
+              <a:rPr lang="de-DE" sz="2600" dirty="0">
+                <a:sym typeface="Wingdings" pitchFamily="2" charset="2"/>
+              </a:rPr>
+              <a:t>, i.e., </a:t>
+            </a:r>
+            <a:r>
+              <a:rPr lang="de-DE" sz="2600" dirty="0" err="1">
+                <a:sym typeface="Wingdings" pitchFamily="2" charset="2"/>
+              </a:rPr>
+              <a:t>without</a:t>
+            </a:r>
+            <a:r>
+              <a:rPr lang="de-DE" sz="2600" dirty="0">
+                <a:sym typeface="Wingdings" pitchFamily="2" charset="2"/>
+              </a:rPr>
+              <a:t> </a:t>
+            </a:r>
+            <a:r>
+              <a:rPr lang="de-DE" sz="2600" dirty="0" err="1">
+                <a:sym typeface="Wingdings" pitchFamily="2" charset="2"/>
+              </a:rPr>
+              <a:t>experiment</a:t>
+            </a:r>
+            <a:endParaRPr lang="de-DE" sz="2600" dirty="0">
+              <a:sym typeface="Wingdings" pitchFamily="2" charset="2"/>
+            </a:endParaRPr>
           </a:p>
         </p:txBody>
       </p:sp>
@@ -12849,7 +12913,7 @@
           <p:cNvPr id="4" name="Slide Number Placeholder 3">
             <a:extLst>
               <a:ext uri="{FF2B5EF4-FFF2-40B4-BE49-F238E27FC236}">
-                <a16:creationId xmlns:a16="http://schemas.microsoft.com/office/drawing/2014/main" id="{933A2B48-7C85-CD10-8C2B-E64B70045133}"/>
+                <a16:creationId xmlns:a16="http://schemas.microsoft.com/office/drawing/2014/main" id="{F0886F0E-A415-6FBF-76A1-BEF5897F841D}"/>
               </a:ext>
             </a:extLst>
           </p:cNvPr>
@@ -12868,634 +12932,6 @@
             <a:fld id="{60A26886-2117-0949-B8A5-D47461AC229C}" type="slidenum">
               <a:rPr lang="en-DE" smtClean="0"/>
               <a:t>20</a:t>
-            </a:fld>
-            <a:endParaRPr lang="en-DE"/>
-          </a:p>
-        </p:txBody>
-      </p:sp>
-    </p:spTree>
-    <p:extLst>
-      <p:ext uri="{BB962C8B-B14F-4D97-AF65-F5344CB8AC3E}">
-        <p14:creationId xmlns:p14="http://schemas.microsoft.com/office/powerpoint/2010/main" val="3179789590"/>
-      </p:ext>
-    </p:extLst>
-  </p:cSld>
-  <p:clrMapOvr>
-    <a:masterClrMapping/>
-  </p:clrMapOvr>
-</p:sld>
-</file>
-
-<file path=ppt/slides/slide21.xml><?xml version="1.0" encoding="utf-8"?>
-<p:sld xmlns:a="http://schemas.openxmlformats.org/drawingml/2006/main" xmlns:r="http://schemas.openxmlformats.org/officeDocument/2006/relationships" xmlns:p="http://schemas.openxmlformats.org/presentationml/2006/main">
-  <p:cSld>
-    <p:spTree>
-      <p:nvGrpSpPr>
-        <p:cNvPr id="1" name=""/>
-        <p:cNvGrpSpPr/>
-        <p:nvPr/>
-      </p:nvGrpSpPr>
-      <p:grpSpPr>
-        <a:xfrm>
-          <a:off x="0" y="0"/>
-          <a:ext cx="0" cy="0"/>
-          <a:chOff x="0" y="0"/>
-          <a:chExt cx="0" cy="0"/>
-        </a:xfrm>
-      </p:grpSpPr>
-      <p:sp>
-        <p:nvSpPr>
-          <p:cNvPr id="2" name="Title 1">
-            <a:extLst>
-              <a:ext uri="{FF2B5EF4-FFF2-40B4-BE49-F238E27FC236}">
-                <a16:creationId xmlns:a16="http://schemas.microsoft.com/office/drawing/2014/main" id="{A72B981D-FFE0-796E-56F3-3E6A22CCC128}"/>
-              </a:ext>
-            </a:extLst>
-          </p:cNvPr>
-          <p:cNvSpPr>
-            <a:spLocks noGrp="1"/>
-          </p:cNvSpPr>
-          <p:nvPr>
-            <p:ph type="title"/>
-          </p:nvPr>
-        </p:nvSpPr>
-        <p:spPr/>
-        <p:txBody>
-          <a:bodyPr/>
-          <a:lstStyle/>
-          <a:p>
-            <a:r>
-              <a:rPr lang="de-DE" dirty="0" err="1"/>
-              <a:t>Interventions</a:t>
-            </a:r>
-            <a:r>
-              <a:rPr lang="de-DE" dirty="0"/>
-              <a:t> </a:t>
-            </a:r>
-            <a:r>
-              <a:rPr lang="de-DE" dirty="0" err="1"/>
-              <a:t>vs</a:t>
-            </a:r>
-            <a:r>
-              <a:rPr lang="de-DE" dirty="0"/>
-              <a:t> </a:t>
-            </a:r>
-            <a:r>
-              <a:rPr lang="de-DE" dirty="0" err="1"/>
-              <a:t>Observations</a:t>
-            </a:r>
-            <a:endParaRPr lang="en-DE" dirty="0"/>
-          </a:p>
-        </p:txBody>
-      </p:sp>
-      <p:sp>
-        <p:nvSpPr>
-          <p:cNvPr id="3" name="Content Placeholder 2">
-            <a:extLst>
-              <a:ext uri="{FF2B5EF4-FFF2-40B4-BE49-F238E27FC236}">
-                <a16:creationId xmlns:a16="http://schemas.microsoft.com/office/drawing/2014/main" id="{855BECF9-A2A3-6EAE-C306-1D3A352C1F59}"/>
-              </a:ext>
-            </a:extLst>
-          </p:cNvPr>
-          <p:cNvSpPr>
-            <a:spLocks noGrp="1"/>
-          </p:cNvSpPr>
-          <p:nvPr>
-            <p:ph idx="1"/>
-          </p:nvPr>
-        </p:nvSpPr>
-        <p:spPr/>
-        <p:txBody>
-          <a:bodyPr>
-            <a:normAutofit/>
-          </a:bodyPr>
-          <a:lstStyle/>
-          <a:p>
-            <a:pPr marL="0" indent="0">
-              <a:buNone/>
-            </a:pPr>
-            <a:r>
-              <a:rPr lang="de-DE" sz="2600" dirty="0" err="1">
-                <a:sym typeface="Wingdings" pitchFamily="2" charset="2"/>
-              </a:rPr>
-              <a:t>aim</a:t>
-            </a:r>
-            <a:r>
-              <a:rPr lang="de-DE" sz="2600" dirty="0">
-                <a:sym typeface="Wingdings" pitchFamily="2" charset="2"/>
-              </a:rPr>
-              <a:t>:</a:t>
-            </a:r>
-          </a:p>
-          <a:p>
-            <a:pPr marL="0" indent="0">
-              <a:buNone/>
-            </a:pPr>
-            <a:r>
-              <a:rPr lang="de-DE" sz="2600" dirty="0" err="1">
-                <a:sym typeface="Wingdings" pitchFamily="2" charset="2"/>
-              </a:rPr>
-              <a:t>prediction</a:t>
-            </a:r>
-            <a:r>
-              <a:rPr lang="de-DE" sz="2600" dirty="0">
-                <a:sym typeface="Wingdings" pitchFamily="2" charset="2"/>
-              </a:rPr>
-              <a:t> </a:t>
-            </a:r>
-            <a:r>
-              <a:rPr lang="de-DE" sz="2600" dirty="0" err="1">
-                <a:sym typeface="Wingdings" pitchFamily="2" charset="2"/>
-              </a:rPr>
-              <a:t>of</a:t>
-            </a:r>
-            <a:r>
-              <a:rPr lang="de-DE" sz="2600" dirty="0">
-                <a:sym typeface="Wingdings" pitchFamily="2" charset="2"/>
-              </a:rPr>
-              <a:t> (</a:t>
-            </a:r>
-            <a:r>
-              <a:rPr lang="de-DE" sz="2600" dirty="0" err="1">
-                <a:sym typeface="Wingdings" pitchFamily="2" charset="2"/>
-              </a:rPr>
-              <a:t>average</a:t>
-            </a:r>
-            <a:r>
-              <a:rPr lang="de-DE" sz="2600" dirty="0">
-                <a:sym typeface="Wingdings" pitchFamily="2" charset="2"/>
-              </a:rPr>
-              <a:t>) </a:t>
-            </a:r>
-            <a:r>
-              <a:rPr lang="de-DE" sz="2600" dirty="0" err="1">
-                <a:sym typeface="Wingdings" pitchFamily="2" charset="2"/>
-              </a:rPr>
-              <a:t>causal</a:t>
-            </a:r>
-            <a:r>
-              <a:rPr lang="de-DE" sz="2600" dirty="0">
-                <a:sym typeface="Wingdings" pitchFamily="2" charset="2"/>
-              </a:rPr>
-              <a:t> </a:t>
-            </a:r>
-            <a:r>
-              <a:rPr lang="de-DE" sz="2600" dirty="0" err="1">
-                <a:sym typeface="Wingdings" pitchFamily="2" charset="2"/>
-              </a:rPr>
-              <a:t>effect</a:t>
-            </a:r>
-            <a:r>
-              <a:rPr lang="de-DE" sz="2600" dirty="0">
-                <a:sym typeface="Wingdings" pitchFamily="2" charset="2"/>
-              </a:rPr>
-              <a:t> </a:t>
-            </a:r>
-            <a:r>
-              <a:rPr lang="de-DE" sz="2600" dirty="0" err="1">
-                <a:sym typeface="Wingdings" pitchFamily="2" charset="2"/>
-              </a:rPr>
-              <a:t>of</a:t>
-            </a:r>
-            <a:r>
-              <a:rPr lang="de-DE" sz="2600" dirty="0">
-                <a:sym typeface="Wingdings" pitchFamily="2" charset="2"/>
-              </a:rPr>
-              <a:t> (</a:t>
-            </a:r>
-            <a:r>
-              <a:rPr lang="de-DE" sz="2600" dirty="0" err="1">
-                <a:sym typeface="Wingdings" pitchFamily="2" charset="2"/>
-              </a:rPr>
-              <a:t>yet</a:t>
-            </a:r>
-            <a:r>
-              <a:rPr lang="de-DE" sz="2600" dirty="0">
-                <a:sym typeface="Wingdings" pitchFamily="2" charset="2"/>
-              </a:rPr>
-              <a:t> </a:t>
-            </a:r>
-            <a:r>
-              <a:rPr lang="de-DE" sz="2600" dirty="0" err="1">
-                <a:sym typeface="Wingdings" pitchFamily="2" charset="2"/>
-              </a:rPr>
-              <a:t>untried</a:t>
-            </a:r>
-            <a:r>
-              <a:rPr lang="de-DE" sz="2600" dirty="0">
-                <a:sym typeface="Wingdings" pitchFamily="2" charset="2"/>
-              </a:rPr>
-              <a:t>) </a:t>
-            </a:r>
-            <a:r>
-              <a:rPr lang="de-DE" sz="2600" dirty="0" err="1">
-                <a:sym typeface="Wingdings" pitchFamily="2" charset="2"/>
-              </a:rPr>
-              <a:t>actions</a:t>
-            </a:r>
-            <a:r>
-              <a:rPr lang="de-DE" sz="2600" dirty="0">
-                <a:sym typeface="Wingdings" pitchFamily="2" charset="2"/>
-              </a:rPr>
-              <a:t> (</a:t>
-            </a:r>
-            <a:r>
-              <a:rPr lang="de-DE" sz="2600" dirty="0" err="1">
-                <a:sym typeface="Wingdings" pitchFamily="2" charset="2"/>
-              </a:rPr>
-              <a:t>interventions</a:t>
-            </a:r>
-            <a:r>
-              <a:rPr lang="de-DE" sz="2600" dirty="0">
-                <a:sym typeface="Wingdings" pitchFamily="2" charset="2"/>
-              </a:rPr>
-              <a:t>)</a:t>
-            </a:r>
-          </a:p>
-          <a:p>
-            <a:pPr marL="0" indent="0">
-              <a:buNone/>
-            </a:pPr>
-            <a:endParaRPr lang="de-DE" sz="2600" dirty="0">
-              <a:sym typeface="Wingdings" pitchFamily="2" charset="2"/>
-            </a:endParaRPr>
-          </a:p>
-          <a:p>
-            <a:pPr marL="0" indent="0">
-              <a:buNone/>
-            </a:pPr>
-            <a:r>
-              <a:rPr lang="de-DE" sz="2600" dirty="0" err="1">
-                <a:sym typeface="Wingdings" pitchFamily="2" charset="2"/>
-              </a:rPr>
-              <a:t>two</a:t>
-            </a:r>
-            <a:r>
-              <a:rPr lang="de-DE" sz="2600" dirty="0">
-                <a:sym typeface="Wingdings" pitchFamily="2" charset="2"/>
-              </a:rPr>
-              <a:t> </a:t>
-            </a:r>
-            <a:r>
-              <a:rPr lang="de-DE" sz="2600" dirty="0" err="1">
-                <a:sym typeface="Wingdings" pitchFamily="2" charset="2"/>
-              </a:rPr>
-              <a:t>ways</a:t>
-            </a:r>
-            <a:r>
-              <a:rPr lang="de-DE" sz="2600" dirty="0">
-                <a:sym typeface="Wingdings" pitchFamily="2" charset="2"/>
-              </a:rPr>
-              <a:t>:</a:t>
-            </a:r>
-            <a:endParaRPr lang="de-DE" sz="2600" dirty="0"/>
-          </a:p>
-          <a:p>
-            <a:r>
-              <a:rPr lang="de-DE" sz="2600" dirty="0" err="1"/>
-              <a:t>intervene</a:t>
-            </a:r>
-            <a:r>
-              <a:rPr lang="de-DE" sz="2600" dirty="0"/>
-              <a:t> via </a:t>
-            </a:r>
-            <a:r>
-              <a:rPr lang="de-DE" sz="2600" dirty="0" err="1"/>
-              <a:t>randomized</a:t>
-            </a:r>
-            <a:r>
-              <a:rPr lang="de-DE" sz="2600" dirty="0"/>
-              <a:t> </a:t>
-            </a:r>
-            <a:r>
-              <a:rPr lang="de-DE" sz="2600" dirty="0" err="1"/>
-              <a:t>controlled</a:t>
-            </a:r>
-            <a:r>
-              <a:rPr lang="de-DE" sz="2600" dirty="0"/>
-              <a:t> </a:t>
-            </a:r>
-            <a:r>
-              <a:rPr lang="de-DE" sz="2600" dirty="0" err="1"/>
-              <a:t>trials</a:t>
-            </a:r>
-            <a:r>
-              <a:rPr lang="de-DE" sz="2600" dirty="0"/>
-              <a:t> (RCT): </a:t>
-            </a:r>
-            <a:r>
-              <a:rPr lang="de-DE" sz="2600" dirty="0" err="1"/>
-              <a:t>set</a:t>
-            </a:r>
-            <a:r>
-              <a:rPr lang="de-DE" sz="2600" dirty="0"/>
-              <a:t> </a:t>
-            </a:r>
-            <a:r>
-              <a:rPr lang="de-DE" sz="2600" dirty="0" err="1"/>
-              <a:t>action</a:t>
-            </a:r>
-            <a:r>
-              <a:rPr lang="de-DE" sz="2600" dirty="0"/>
-              <a:t> </a:t>
-            </a:r>
-            <a:r>
-              <a:rPr lang="de-DE" sz="2600" dirty="0" err="1"/>
-              <a:t>randomly</a:t>
-            </a:r>
-            <a:r>
-              <a:rPr lang="de-DE" sz="2600" dirty="0"/>
-              <a:t> and check </a:t>
-            </a:r>
-            <a:r>
-              <a:rPr lang="de-DE" sz="2600" dirty="0" err="1"/>
-              <a:t>effect</a:t>
-            </a:r>
-            <a:r>
-              <a:rPr lang="de-DE" sz="2600" dirty="0"/>
-              <a:t> </a:t>
-            </a:r>
-            <a:r>
-              <a:rPr lang="de-DE" sz="2600" dirty="0">
-                <a:sym typeface="Wingdings" pitchFamily="2" charset="2"/>
-              </a:rPr>
-              <a:t> </a:t>
-            </a:r>
-            <a:r>
-              <a:rPr lang="de-DE" sz="2600" dirty="0" err="1">
-                <a:sym typeface="Wingdings" pitchFamily="2" charset="2"/>
-              </a:rPr>
-              <a:t>physically</a:t>
-            </a:r>
-            <a:r>
-              <a:rPr lang="de-DE" sz="2600" dirty="0">
-                <a:sym typeface="Wingdings" pitchFamily="2" charset="2"/>
-              </a:rPr>
-              <a:t> </a:t>
-            </a:r>
-            <a:r>
-              <a:rPr lang="de-DE" sz="2600" dirty="0" err="1">
-                <a:sym typeface="Wingdings" pitchFamily="2" charset="2"/>
-              </a:rPr>
-              <a:t>disassociate</a:t>
-            </a:r>
-            <a:r>
-              <a:rPr lang="de-DE" sz="2600" dirty="0">
-                <a:sym typeface="Wingdings" pitchFamily="2" charset="2"/>
-              </a:rPr>
-              <a:t> </a:t>
-            </a:r>
-            <a:r>
-              <a:rPr lang="de-DE" sz="2600" dirty="0" err="1">
-                <a:sym typeface="Wingdings" pitchFamily="2" charset="2"/>
-              </a:rPr>
-              <a:t>cause</a:t>
-            </a:r>
-            <a:r>
-              <a:rPr lang="de-DE" sz="2600" dirty="0">
-                <a:sym typeface="Wingdings" pitchFamily="2" charset="2"/>
-              </a:rPr>
-              <a:t> </a:t>
-            </a:r>
-            <a:r>
-              <a:rPr lang="de-DE" sz="2600" dirty="0" err="1">
-                <a:sym typeface="Wingdings" pitchFamily="2" charset="2"/>
-              </a:rPr>
-              <a:t>from</a:t>
-            </a:r>
-            <a:r>
-              <a:rPr lang="de-DE" sz="2600" dirty="0">
-                <a:sym typeface="Wingdings" pitchFamily="2" charset="2"/>
-              </a:rPr>
-              <a:t> </a:t>
-            </a:r>
-            <a:r>
-              <a:rPr lang="de-DE" sz="2600" dirty="0" err="1">
-                <a:sym typeface="Wingdings" pitchFamily="2" charset="2"/>
-              </a:rPr>
-              <a:t>confounders</a:t>
-            </a:r>
-            <a:endParaRPr lang="de-DE" sz="2600" dirty="0">
-              <a:sym typeface="Wingdings" pitchFamily="2" charset="2"/>
-            </a:endParaRPr>
-          </a:p>
-          <a:p>
-            <a:r>
-              <a:rPr lang="de-DE" sz="2600" dirty="0" err="1">
-                <a:sym typeface="Wingdings" pitchFamily="2" charset="2"/>
-              </a:rPr>
-              <a:t>causal</a:t>
-            </a:r>
-            <a:r>
-              <a:rPr lang="de-DE" sz="2600" dirty="0">
-                <a:sym typeface="Wingdings" pitchFamily="2" charset="2"/>
-              </a:rPr>
-              <a:t> </a:t>
-            </a:r>
-            <a:r>
-              <a:rPr lang="de-DE" sz="2600" dirty="0" err="1">
-                <a:sym typeface="Wingdings" pitchFamily="2" charset="2"/>
-              </a:rPr>
-              <a:t>model</a:t>
-            </a:r>
-            <a:r>
-              <a:rPr lang="de-DE" sz="2600" dirty="0">
-                <a:sym typeface="Wingdings" pitchFamily="2" charset="2"/>
-              </a:rPr>
-              <a:t>: </a:t>
-            </a:r>
-            <a:r>
-              <a:rPr lang="de-DE" sz="2600" dirty="0" err="1">
-                <a:sym typeface="Wingdings" pitchFamily="2" charset="2"/>
-              </a:rPr>
-              <a:t>emulating</a:t>
-            </a:r>
-            <a:r>
-              <a:rPr lang="de-DE" sz="2600" dirty="0">
-                <a:sym typeface="Wingdings" pitchFamily="2" charset="2"/>
-              </a:rPr>
-              <a:t> </a:t>
-            </a:r>
-            <a:r>
-              <a:rPr lang="de-DE" sz="2600" dirty="0" err="1">
-                <a:sym typeface="Wingdings" pitchFamily="2" charset="2"/>
-              </a:rPr>
-              <a:t>interventions</a:t>
-            </a:r>
-            <a:r>
-              <a:rPr lang="de-DE" sz="2600" dirty="0">
-                <a:sym typeface="Wingdings" pitchFamily="2" charset="2"/>
-              </a:rPr>
-              <a:t> </a:t>
-            </a:r>
-            <a:r>
-              <a:rPr lang="de-DE" sz="2600" dirty="0" err="1">
-                <a:sym typeface="Wingdings" pitchFamily="2" charset="2"/>
-              </a:rPr>
-              <a:t>by</a:t>
-            </a:r>
-            <a:r>
-              <a:rPr lang="de-DE" sz="2600" dirty="0">
-                <a:sym typeface="Wingdings" pitchFamily="2" charset="2"/>
-              </a:rPr>
-              <a:t> smart </a:t>
-            </a:r>
-            <a:r>
-              <a:rPr lang="de-DE" sz="2600" dirty="0" err="1">
-                <a:sym typeface="Wingdings" pitchFamily="2" charset="2"/>
-              </a:rPr>
-              <a:t>calculations</a:t>
-            </a:r>
-            <a:r>
-              <a:rPr lang="de-DE" sz="2600" dirty="0">
-                <a:sym typeface="Wingdings" pitchFamily="2" charset="2"/>
-              </a:rPr>
-              <a:t>  </a:t>
-            </a:r>
-            <a:r>
-              <a:rPr lang="de-DE" sz="2600" dirty="0" err="1">
-                <a:sym typeface="Wingdings" pitchFamily="2" charset="2"/>
-              </a:rPr>
-              <a:t>predict</a:t>
-            </a:r>
-            <a:r>
-              <a:rPr lang="de-DE" sz="2600" dirty="0">
-                <a:sym typeface="Wingdings" pitchFamily="2" charset="2"/>
-              </a:rPr>
-              <a:t> </a:t>
-            </a:r>
-            <a:r>
-              <a:rPr lang="de-DE" sz="2600" dirty="0" err="1">
-                <a:sym typeface="Wingdings" pitchFamily="2" charset="2"/>
-              </a:rPr>
-              <a:t>effects</a:t>
-            </a:r>
-            <a:r>
-              <a:rPr lang="de-DE" sz="2600" dirty="0">
-                <a:sym typeface="Wingdings" pitchFamily="2" charset="2"/>
-              </a:rPr>
-              <a:t> </a:t>
-            </a:r>
-            <a:r>
-              <a:rPr lang="de-DE" sz="2600" dirty="0" err="1">
-                <a:sym typeface="Wingdings" pitchFamily="2" charset="2"/>
-              </a:rPr>
-              <a:t>of</a:t>
-            </a:r>
-            <a:r>
-              <a:rPr lang="de-DE" sz="2600" dirty="0">
-                <a:sym typeface="Wingdings" pitchFamily="2" charset="2"/>
-              </a:rPr>
-              <a:t> potential </a:t>
-            </a:r>
-            <a:r>
-              <a:rPr lang="de-DE" sz="2600" dirty="0" err="1">
-                <a:sym typeface="Wingdings" pitchFamily="2" charset="2"/>
-              </a:rPr>
-              <a:t>interventions</a:t>
-            </a:r>
-            <a:r>
-              <a:rPr lang="de-DE" sz="2600" dirty="0">
-                <a:sym typeface="Wingdings" pitchFamily="2" charset="2"/>
-              </a:rPr>
-              <a:t> </a:t>
-            </a:r>
-            <a:r>
-              <a:rPr lang="de-DE" sz="2600" dirty="0" err="1">
-                <a:sym typeface="Wingdings" pitchFamily="2" charset="2"/>
-              </a:rPr>
-              <a:t>from</a:t>
-            </a:r>
-            <a:r>
-              <a:rPr lang="de-DE" sz="2600" dirty="0">
-                <a:sym typeface="Wingdings" pitchFamily="2" charset="2"/>
-              </a:rPr>
-              <a:t> </a:t>
-            </a:r>
-            <a:r>
-              <a:rPr lang="de-DE" sz="2600" dirty="0" err="1">
-                <a:sym typeface="Wingdings" pitchFamily="2" charset="2"/>
-              </a:rPr>
-              <a:t>observational</a:t>
-            </a:r>
-            <a:r>
-              <a:rPr lang="de-DE" sz="2600" dirty="0">
-                <a:sym typeface="Wingdings" pitchFamily="2" charset="2"/>
-              </a:rPr>
-              <a:t> </a:t>
-            </a:r>
-            <a:r>
-              <a:rPr lang="de-DE" sz="2600" dirty="0" err="1">
-                <a:sym typeface="Wingdings" pitchFamily="2" charset="2"/>
-              </a:rPr>
-              <a:t>studies</a:t>
-            </a:r>
-            <a:r>
-              <a:rPr lang="de-DE" sz="2600" dirty="0">
-                <a:sym typeface="Wingdings" pitchFamily="2" charset="2"/>
-              </a:rPr>
-              <a:t> </a:t>
-            </a:r>
-            <a:r>
-              <a:rPr lang="de-DE" sz="2600" dirty="0" err="1">
-                <a:sym typeface="Wingdings" pitchFamily="2" charset="2"/>
-              </a:rPr>
-              <a:t>only</a:t>
-            </a:r>
-            <a:r>
-              <a:rPr lang="de-DE" sz="2600" dirty="0">
-                <a:sym typeface="Wingdings" pitchFamily="2" charset="2"/>
-              </a:rPr>
-              <a:t>, i.e., </a:t>
-            </a:r>
-            <a:r>
-              <a:rPr lang="de-DE" sz="2600" dirty="0" err="1">
-                <a:sym typeface="Wingdings" pitchFamily="2" charset="2"/>
-              </a:rPr>
-              <a:t>without</a:t>
-            </a:r>
-            <a:r>
-              <a:rPr lang="de-DE" sz="2600" dirty="0">
-                <a:sym typeface="Wingdings" pitchFamily="2" charset="2"/>
-              </a:rPr>
-              <a:t> </a:t>
-            </a:r>
-            <a:r>
-              <a:rPr lang="de-DE" sz="2600" dirty="0" err="1">
-                <a:sym typeface="Wingdings" pitchFamily="2" charset="2"/>
-              </a:rPr>
-              <a:t>experiment</a:t>
-            </a:r>
-            <a:endParaRPr lang="de-DE" sz="2600" dirty="0">
-              <a:sym typeface="Wingdings" pitchFamily="2" charset="2"/>
-            </a:endParaRPr>
-          </a:p>
-        </p:txBody>
-      </p:sp>
-      <p:sp>
-        <p:nvSpPr>
-          <p:cNvPr id="4" name="Slide Number Placeholder 3">
-            <a:extLst>
-              <a:ext uri="{FF2B5EF4-FFF2-40B4-BE49-F238E27FC236}">
-                <a16:creationId xmlns:a16="http://schemas.microsoft.com/office/drawing/2014/main" id="{F0886F0E-A415-6FBF-76A1-BEF5897F841D}"/>
-              </a:ext>
-            </a:extLst>
-          </p:cNvPr>
-          <p:cNvSpPr>
-            <a:spLocks noGrp="1"/>
-          </p:cNvSpPr>
-          <p:nvPr>
-            <p:ph type="sldNum" sz="quarter" idx="12"/>
-          </p:nvPr>
-        </p:nvSpPr>
-        <p:spPr/>
-        <p:txBody>
-          <a:bodyPr/>
-          <a:lstStyle/>
-          <a:p>
-            <a:fld id="{60A26886-2117-0949-B8A5-D47461AC229C}" type="slidenum">
-              <a:rPr lang="en-DE" smtClean="0"/>
-              <a:t>21</a:t>
             </a:fld>
             <a:endParaRPr lang="en-DE"/>
           </a:p>
@@ -13514,7 +12950,7 @@
 </p:sld>
 </file>
 
-<file path=ppt/slides/slide22.xml><?xml version="1.0" encoding="utf-8"?>
+<file path=ppt/slides/slide21.xml><?xml version="1.0" encoding="utf-8"?>
 <p:sld xmlns:a="http://schemas.openxmlformats.org/drawingml/2006/main" xmlns:r="http://schemas.openxmlformats.org/officeDocument/2006/relationships" xmlns:p="http://schemas.openxmlformats.org/presentationml/2006/main">
   <p:cSld>
     <p:spTree>
@@ -14127,7 +13563,7 @@
           <a:p>
             <a:fld id="{60A26886-2117-0949-B8A5-D47461AC229C}" type="slidenum">
               <a:rPr lang="en-DE" smtClean="0"/>
-              <a:t>22</a:t>
+              <a:t>21</a:t>
             </a:fld>
             <a:endParaRPr lang="en-DE"/>
           </a:p>
@@ -14771,7 +14207,7 @@
 </p:sld>
 </file>
 
-<file path=ppt/slides/slide23.xml><?xml version="1.0" encoding="utf-8"?>
+<file path=ppt/slides/slide22.xml><?xml version="1.0" encoding="utf-8"?>
 <p:sld xmlns:a="http://schemas.openxmlformats.org/drawingml/2006/main" xmlns:r="http://schemas.openxmlformats.org/officeDocument/2006/relationships" xmlns:p="http://schemas.openxmlformats.org/presentationml/2006/main">
   <p:cSld>
     <p:spTree>
@@ -15894,7 +15330,7 @@
           <a:p>
             <a:fld id="{60A26886-2117-0949-B8A5-D47461AC229C}" type="slidenum">
               <a:rPr lang="en-DE" smtClean="0"/>
-              <a:t>23</a:t>
+              <a:t>22</a:t>
             </a:fld>
             <a:endParaRPr lang="en-DE"/>
           </a:p>
@@ -16567,7 +16003,7 @@
 </p:sld>
 </file>
 
-<file path=ppt/slides/slide24.xml><?xml version="1.0" encoding="utf-8"?>
+<file path=ppt/slides/slide23.xml><?xml version="1.0" encoding="utf-8"?>
 <p:sld xmlns:a="http://schemas.openxmlformats.org/drawingml/2006/main" xmlns:r="http://schemas.openxmlformats.org/officeDocument/2006/relationships" xmlns:p="http://schemas.openxmlformats.org/presentationml/2006/main">
   <p:cSld>
     <p:spTree>
@@ -17015,7 +16451,7 @@
           <a:p>
             <a:fld id="{60A26886-2117-0949-B8A5-D47461AC229C}" type="slidenum">
               <a:rPr lang="en-DE" smtClean="0"/>
-              <a:t>24</a:t>
+              <a:t>23</a:t>
             </a:fld>
             <a:endParaRPr lang="en-DE"/>
           </a:p>
@@ -17034,7 +16470,7 @@
 </p:sld>
 </file>
 
-<file path=ppt/slides/slide25.xml><?xml version="1.0" encoding="utf-8"?>
+<file path=ppt/slides/slide24.xml><?xml version="1.0" encoding="utf-8"?>
 <p:sld xmlns:a="http://schemas.openxmlformats.org/drawingml/2006/main" xmlns:r="http://schemas.openxmlformats.org/officeDocument/2006/relationships" xmlns:p="http://schemas.openxmlformats.org/presentationml/2006/main">
   <p:cSld>
     <p:spTree>
@@ -18026,7 +17462,7 @@
           <a:p>
             <a:fld id="{60A26886-2117-0949-B8A5-D47461AC229C}" type="slidenum">
               <a:rPr lang="en-DE" smtClean="0"/>
-              <a:t>25</a:t>
+              <a:t>24</a:t>
             </a:fld>
             <a:endParaRPr lang="en-DE"/>
           </a:p>
@@ -18045,7 +17481,7 @@
 </p:sld>
 </file>
 
-<file path=ppt/slides/slide26.xml><?xml version="1.0" encoding="utf-8"?>
+<file path=ppt/slides/slide25.xml><?xml version="1.0" encoding="utf-8"?>
 <p:sld xmlns:a="http://schemas.openxmlformats.org/drawingml/2006/main" xmlns:r="http://schemas.openxmlformats.org/officeDocument/2006/relationships" xmlns:p="http://schemas.openxmlformats.org/presentationml/2006/main">
   <p:cSld>
     <p:spTree>
@@ -19419,7 +18855,7 @@
           <a:p>
             <a:fld id="{60A26886-2117-0949-B8A5-D47461AC229C}" type="slidenum">
               <a:rPr lang="en-DE" smtClean="0"/>
-              <a:t>26</a:t>
+              <a:t>25</a:t>
             </a:fld>
             <a:endParaRPr lang="en-DE"/>
           </a:p>
@@ -20012,7 +19448,7 @@
 </p:sld>
 </file>
 
-<file path=ppt/slides/slide27.xml><?xml version="1.0" encoding="utf-8"?>
+<file path=ppt/slides/slide26.xml><?xml version="1.0" encoding="utf-8"?>
 <p:sld xmlns:a="http://schemas.openxmlformats.org/drawingml/2006/main" xmlns:r="http://schemas.openxmlformats.org/officeDocument/2006/relationships" xmlns:p="http://schemas.openxmlformats.org/presentationml/2006/main">
   <p:cSld>
     <p:spTree>
@@ -20400,7 +19836,7 @@
           <a:p>
             <a:fld id="{60A26886-2117-0949-B8A5-D47461AC229C}" type="slidenum">
               <a:rPr lang="en-DE" smtClean="0"/>
-              <a:t>27</a:t>
+              <a:t>26</a:t>
             </a:fld>
             <a:endParaRPr lang="en-DE"/>
           </a:p>
@@ -20419,7 +19855,7 @@
 </p:sld>
 </file>
 
-<file path=ppt/slides/slide28.xml><?xml version="1.0" encoding="utf-8"?>
+<file path=ppt/slides/slide27.xml><?xml version="1.0" encoding="utf-8"?>
 <p:sld xmlns:a="http://schemas.openxmlformats.org/drawingml/2006/main" xmlns:r="http://schemas.openxmlformats.org/officeDocument/2006/relationships" xmlns:p="http://schemas.openxmlformats.org/presentationml/2006/main">
   <p:cSld>
     <p:spTree>
@@ -20492,7 +19928,7 @@
           <a:p>
             <a:fld id="{523A240F-EAFE-E84F-B44C-6D7A08E0E409}" type="slidenum">
               <a:rPr lang="en-US" smtClean="0"/>
-              <a:t>28</a:t>
+              <a:t>27</a:t>
             </a:fld>
             <a:endParaRPr lang="en-US" dirty="0"/>
           </a:p>
@@ -21053,7 +20489,7 @@
 </p:sld>
 </file>
 
-<file path=ppt/slides/slide29.xml><?xml version="1.0" encoding="utf-8"?>
+<file path=ppt/slides/slide28.xml><?xml version="1.0" encoding="utf-8"?>
 <p:sld xmlns:a="http://schemas.openxmlformats.org/drawingml/2006/main" xmlns:r="http://schemas.openxmlformats.org/officeDocument/2006/relationships" xmlns:p="http://schemas.openxmlformats.org/presentationml/2006/main">
   <p:cSld>
     <p:spTree>
@@ -21223,7 +20659,7 @@
           <a:p>
             <a:fld id="{60A26886-2117-0949-B8A5-D47461AC229C}" type="slidenum">
               <a:rPr lang="en-DE" smtClean="0"/>
-              <a:t>29</a:t>
+              <a:t>28</a:t>
             </a:fld>
             <a:endParaRPr lang="en-DE"/>
           </a:p>
@@ -21242,193 +20678,7 @@
 </p:sld>
 </file>
 
-<file path=ppt/slides/slide3.xml><?xml version="1.0" encoding="utf-8"?>
-<p:sld xmlns:a="http://schemas.openxmlformats.org/drawingml/2006/main" xmlns:r="http://schemas.openxmlformats.org/officeDocument/2006/relationships" xmlns:p="http://schemas.openxmlformats.org/presentationml/2006/main">
-  <p:cSld>
-    <p:spTree>
-      <p:nvGrpSpPr>
-        <p:cNvPr id="1" name=""/>
-        <p:cNvGrpSpPr/>
-        <p:nvPr/>
-      </p:nvGrpSpPr>
-      <p:grpSpPr>
-        <a:xfrm>
-          <a:off x="0" y="0"/>
-          <a:ext cx="0" cy="0"/>
-          <a:chOff x="0" y="0"/>
-          <a:chExt cx="0" cy="0"/>
-        </a:xfrm>
-      </p:grpSpPr>
-      <p:sp>
-        <p:nvSpPr>
-          <p:cNvPr id="6" name="Titel 5">
-            <a:extLst>
-              <a:ext uri="{FF2B5EF4-FFF2-40B4-BE49-F238E27FC236}">
-                <a16:creationId xmlns:a16="http://schemas.microsoft.com/office/drawing/2014/main" id="{C3897D96-EE3F-5B83-BF99-D21AC76D1DDC}"/>
-              </a:ext>
-            </a:extLst>
-          </p:cNvPr>
-          <p:cNvSpPr>
-            <a:spLocks noGrp="1"/>
-          </p:cNvSpPr>
-          <p:nvPr>
-            <p:ph type="title"/>
-          </p:nvPr>
-        </p:nvSpPr>
-        <p:spPr/>
-        <p:txBody>
-          <a:bodyPr/>
-          <a:lstStyle/>
-          <a:p>
-            <a:r>
-              <a:rPr lang="de-DE" dirty="0" err="1"/>
-              <a:t>Causality</a:t>
-            </a:r>
-            <a:endParaRPr lang="de-DE" dirty="0"/>
-          </a:p>
-        </p:txBody>
-      </p:sp>
-      <p:sp>
-        <p:nvSpPr>
-          <p:cNvPr id="7" name="Inhaltsplatzhalter 6">
-            <a:extLst>
-              <a:ext uri="{FF2B5EF4-FFF2-40B4-BE49-F238E27FC236}">
-                <a16:creationId xmlns:a16="http://schemas.microsoft.com/office/drawing/2014/main" id="{17DFFDE4-8332-E672-8CEA-495A8A1F1DBF}"/>
-              </a:ext>
-            </a:extLst>
-          </p:cNvPr>
-          <p:cNvSpPr>
-            <a:spLocks noGrp="1"/>
-          </p:cNvSpPr>
-          <p:nvPr>
-            <p:ph idx="1"/>
-          </p:nvPr>
-        </p:nvSpPr>
-        <p:spPr/>
-        <p:txBody>
-          <a:bodyPr/>
-          <a:lstStyle/>
-          <a:p>
-            <a:r>
-              <a:rPr lang="de-DE" dirty="0" err="1"/>
-              <a:t>causal</a:t>
-            </a:r>
-            <a:r>
-              <a:rPr lang="de-DE" dirty="0"/>
-              <a:t> </a:t>
-            </a:r>
-            <a:r>
-              <a:rPr lang="de-DE" dirty="0" err="1"/>
-              <a:t>inference</a:t>
-            </a:r>
-            <a:endParaRPr lang="de-DE" dirty="0"/>
-          </a:p>
-          <a:p>
-            <a:r>
-              <a:rPr lang="de-DE" dirty="0" err="1"/>
-              <a:t>confounding</a:t>
-            </a:r>
-            <a:endParaRPr lang="de-DE" dirty="0"/>
-          </a:p>
-          <a:p>
-            <a:r>
-              <a:rPr lang="de-DE" dirty="0"/>
-              <a:t>DAG</a:t>
-            </a:r>
-          </a:p>
-          <a:p>
-            <a:r>
-              <a:rPr lang="de-DE" dirty="0"/>
-              <a:t>do-</a:t>
-            </a:r>
-            <a:r>
-              <a:rPr lang="de-DE" dirty="0" err="1"/>
-              <a:t>formalism</a:t>
-            </a:r>
-            <a:endParaRPr lang="de-DE" dirty="0"/>
-          </a:p>
-          <a:p>
-            <a:r>
-              <a:rPr lang="de-DE" dirty="0" err="1"/>
-              <a:t>counterfactuals</a:t>
-            </a:r>
-            <a:endParaRPr lang="de-DE" dirty="0"/>
-          </a:p>
-          <a:p>
-            <a:r>
-              <a:rPr lang="de-DE" dirty="0"/>
-              <a:t>inverse </a:t>
-            </a:r>
-            <a:r>
-              <a:rPr lang="de-DE" dirty="0" err="1"/>
-              <a:t>propensity</a:t>
-            </a:r>
-            <a:r>
-              <a:rPr lang="de-DE" dirty="0"/>
-              <a:t> score </a:t>
-            </a:r>
-            <a:r>
-              <a:rPr lang="de-DE" dirty="0" err="1"/>
-              <a:t>weighting</a:t>
-            </a:r>
-            <a:r>
-              <a:rPr lang="de-DE" dirty="0"/>
-              <a:t> </a:t>
-            </a:r>
-            <a:r>
-              <a:rPr lang="de-DE" dirty="0" err="1"/>
-              <a:t>for</a:t>
-            </a:r>
-            <a:r>
-              <a:rPr lang="de-DE" dirty="0"/>
-              <a:t> ML</a:t>
-            </a:r>
-          </a:p>
-        </p:txBody>
-      </p:sp>
-      <p:sp>
-        <p:nvSpPr>
-          <p:cNvPr id="5" name="Foliennummernplatzhalter 4">
-            <a:extLst>
-              <a:ext uri="{FF2B5EF4-FFF2-40B4-BE49-F238E27FC236}">
-                <a16:creationId xmlns:a16="http://schemas.microsoft.com/office/drawing/2014/main" id="{63B78F69-38CB-DF06-CD98-6D4C89B207C3}"/>
-              </a:ext>
-            </a:extLst>
-          </p:cNvPr>
-          <p:cNvSpPr>
-            <a:spLocks noGrp="1"/>
-          </p:cNvSpPr>
-          <p:nvPr>
-            <p:ph type="sldNum" sz="quarter" idx="12"/>
-          </p:nvPr>
-        </p:nvSpPr>
-        <p:spPr/>
-        <p:txBody>
-          <a:bodyPr/>
-          <a:lstStyle/>
-          <a:p>
-            <a:fld id="{3D4C94FE-FF23-4504-88E9-14D481113291}" type="slidenum">
-              <a:rPr lang="en-GB" smtClean="0"/>
-              <a:t>3</a:t>
-            </a:fld>
-            <a:endParaRPr lang="en-GB"/>
-          </a:p>
-        </p:txBody>
-      </p:sp>
-    </p:spTree>
-    <p:extLst>
-      <p:ext uri="{BB962C8B-B14F-4D97-AF65-F5344CB8AC3E}">
-        <p14:creationId xmlns:p14="http://schemas.microsoft.com/office/powerpoint/2010/main" val="4177832565"/>
-      </p:ext>
-    </p:extLst>
-  </p:cSld>
-  <p:clrMapOvr>
-    <a:masterClrMapping/>
-  </p:clrMapOvr>
-</p:sld>
-</file>
-
-<file path=ppt/slides/slide30.xml><?xml version="1.0" encoding="utf-8"?>
+<file path=ppt/slides/slide29.xml><?xml version="1.0" encoding="utf-8"?>
 <p:sld xmlns:a="http://schemas.openxmlformats.org/drawingml/2006/main" xmlns:r="http://schemas.openxmlformats.org/officeDocument/2006/relationships" xmlns:p="http://schemas.openxmlformats.org/presentationml/2006/main">
   <p:cSld>
     <p:spTree>
@@ -22143,7 +21393,7 @@
           <a:p>
             <a:fld id="{60A26886-2117-0949-B8A5-D47461AC229C}" type="slidenum">
               <a:rPr lang="en-DE" smtClean="0"/>
-              <a:t>30</a:t>
+              <a:t>29</a:t>
             </a:fld>
             <a:endParaRPr lang="en-DE"/>
           </a:p>
@@ -22890,7 +22140,240 @@
 </p:sld>
 </file>
 
-<file path=ppt/slides/slide31.xml><?xml version="1.0" encoding="utf-8"?>
+<file path=ppt/slides/slide3.xml><?xml version="1.0" encoding="utf-8"?>
+<p:sld xmlns:a="http://schemas.openxmlformats.org/drawingml/2006/main" xmlns:r="http://schemas.openxmlformats.org/officeDocument/2006/relationships" xmlns:p="http://schemas.openxmlformats.org/presentationml/2006/main">
+  <p:cSld>
+    <p:spTree>
+      <p:nvGrpSpPr>
+        <p:cNvPr id="1" name=""/>
+        <p:cNvGrpSpPr/>
+        <p:nvPr/>
+      </p:nvGrpSpPr>
+      <p:grpSpPr>
+        <a:xfrm>
+          <a:off x="0" y="0"/>
+          <a:ext cx="0" cy="0"/>
+          <a:chOff x="0" y="0"/>
+          <a:chExt cx="0" cy="0"/>
+        </a:xfrm>
+      </p:grpSpPr>
+      <p:sp>
+        <p:nvSpPr>
+          <p:cNvPr id="2" name="Titel 1">
+            <a:extLst>
+              <a:ext uri="{FF2B5EF4-FFF2-40B4-BE49-F238E27FC236}">
+                <a16:creationId xmlns:a16="http://schemas.microsoft.com/office/drawing/2014/main" id="{CDA11EC4-AB88-8790-06D5-8494E3B2EA07}"/>
+              </a:ext>
+            </a:extLst>
+          </p:cNvPr>
+          <p:cNvSpPr>
+            <a:spLocks noGrp="1"/>
+          </p:cNvSpPr>
+          <p:nvPr>
+            <p:ph type="title"/>
+          </p:nvPr>
+        </p:nvSpPr>
+        <p:spPr/>
+        <p:txBody>
+          <a:bodyPr/>
+          <a:lstStyle/>
+          <a:p>
+            <a:r>
+              <a:rPr lang="de-DE" dirty="0" err="1"/>
+              <a:t>Why</a:t>
+            </a:r>
+            <a:r>
+              <a:rPr lang="de-DE" dirty="0"/>
+              <a:t> </a:t>
+            </a:r>
+            <a:r>
+              <a:rPr lang="de-DE" dirty="0" err="1"/>
+              <a:t>Causality</a:t>
+            </a:r>
+            <a:r>
+              <a:rPr lang="de-DE" dirty="0"/>
+              <a:t> Matters</a:t>
+            </a:r>
+          </a:p>
+        </p:txBody>
+      </p:sp>
+      <p:sp>
+        <p:nvSpPr>
+          <p:cNvPr id="3" name="Inhaltsplatzhalter 2">
+            <a:extLst>
+              <a:ext uri="{FF2B5EF4-FFF2-40B4-BE49-F238E27FC236}">
+                <a16:creationId xmlns:a16="http://schemas.microsoft.com/office/drawing/2014/main" id="{79694769-D61A-3B98-A4E4-E81FF5303DC7}"/>
+              </a:ext>
+            </a:extLst>
+          </p:cNvPr>
+          <p:cNvSpPr>
+            <a:spLocks noGrp="1"/>
+          </p:cNvSpPr>
+          <p:nvPr>
+            <p:ph idx="1"/>
+          </p:nvPr>
+        </p:nvSpPr>
+        <p:spPr/>
+        <p:txBody>
+          <a:bodyPr>
+            <a:normAutofit lnSpcReduction="10000"/>
+          </a:bodyPr>
+          <a:lstStyle/>
+          <a:p>
+            <a:pPr marL="0" indent="0">
+              <a:buNone/>
+            </a:pPr>
+            <a:r>
+              <a:rPr lang="en-DE"/>
+              <a:t>story behind the data as important as the data itself</a:t>
+            </a:r>
+          </a:p>
+          <a:p>
+            <a:pPr marL="0" indent="0">
+              <a:buNone/>
+            </a:pPr>
+            <a:endParaRPr lang="en-DE"/>
+          </a:p>
+          <a:p>
+            <a:pPr marL="0" indent="0">
+              <a:buNone/>
+            </a:pPr>
+            <a:r>
+              <a:rPr lang="en-GB" dirty="0"/>
+              <a:t>W</a:t>
+            </a:r>
+            <a:r>
+              <a:rPr lang="en-DE"/>
+              <a:t>hy are the statistical dependencies as observed?</a:t>
+            </a:r>
+          </a:p>
+          <a:p>
+            <a:pPr>
+              <a:buFont typeface="Wingdings" pitchFamily="2" charset="2"/>
+              <a:buChar char="à"/>
+            </a:pPr>
+            <a:r>
+              <a:rPr lang="en-GB" dirty="0"/>
+              <a:t> d</a:t>
+            </a:r>
+            <a:r>
+              <a:rPr lang="en-DE"/>
+              <a:t>ata-generating process mostly governed by causal dependencies</a:t>
+            </a:r>
+          </a:p>
+          <a:p>
+            <a:pPr marL="0" indent="0">
+              <a:buNone/>
+            </a:pPr>
+            <a:endParaRPr lang="en-DE"/>
+          </a:p>
+          <a:p>
+            <a:pPr marL="0" indent="0">
+              <a:buNone/>
+            </a:pPr>
+            <a:r>
+              <a:rPr lang="en-GB" dirty="0"/>
+              <a:t>but l</a:t>
+            </a:r>
+            <a:r>
+              <a:rPr lang="en-DE"/>
+              <a:t>anguage of algebra symmetric</a:t>
+            </a:r>
+          </a:p>
+          <a:p>
+            <a:pPr marL="0" indent="0">
+              <a:buNone/>
+            </a:pPr>
+            <a:r>
+              <a:rPr lang="en-GB" dirty="0"/>
+              <a:t>n</a:t>
+            </a:r>
+            <a:r>
+              <a:rPr lang="en-DE"/>
+              <a:t>o way to tell that a storm causes barometer to go down and not the other way around </a:t>
+            </a:r>
+            <a:r>
+              <a:rPr lang="en-DE">
+                <a:sym typeface="Wingdings" pitchFamily="2" charset="2"/>
+              </a:rPr>
+              <a:t> need for asymmetric mathematical language</a:t>
+            </a:r>
+          </a:p>
+        </p:txBody>
+      </p:sp>
+      <p:sp>
+        <p:nvSpPr>
+          <p:cNvPr id="4" name="Foliennummernplatzhalter 3">
+            <a:extLst>
+              <a:ext uri="{FF2B5EF4-FFF2-40B4-BE49-F238E27FC236}">
+                <a16:creationId xmlns:a16="http://schemas.microsoft.com/office/drawing/2014/main" id="{73E3D9A5-259C-7CEA-9207-FDF51DD9530C}"/>
+              </a:ext>
+            </a:extLst>
+          </p:cNvPr>
+          <p:cNvSpPr>
+            <a:spLocks noGrp="1"/>
+          </p:cNvSpPr>
+          <p:nvPr>
+            <p:ph type="sldNum" sz="quarter" idx="12"/>
+          </p:nvPr>
+        </p:nvSpPr>
+        <p:spPr/>
+        <p:txBody>
+          <a:bodyPr/>
+          <a:lstStyle/>
+          <a:p>
+            <a:fld id="{3D4C94FE-FF23-4504-88E9-14D481113291}" type="slidenum">
+              <a:rPr lang="en-GB" smtClean="0"/>
+              <a:t>3</a:t>
+            </a:fld>
+            <a:endParaRPr lang="en-GB"/>
+          </a:p>
+        </p:txBody>
+      </p:sp>
+      <p:pic>
+        <p:nvPicPr>
+          <p:cNvPr id="5" name="Picture 7" descr="Text&#10;&#10;Description automatically generated">
+            <a:extLst>
+              <a:ext uri="{FF2B5EF4-FFF2-40B4-BE49-F238E27FC236}">
+                <a16:creationId xmlns:a16="http://schemas.microsoft.com/office/drawing/2014/main" id="{C6AB4372-AAD3-E8A0-D361-52910D16936C}"/>
+              </a:ext>
+            </a:extLst>
+          </p:cNvPr>
+          <p:cNvPicPr>
+            <a:picLocks noChangeAspect="1"/>
+          </p:cNvPicPr>
+          <p:nvPr/>
+        </p:nvPicPr>
+        <p:blipFill>
+          <a:blip r:embed="rId2"/>
+          <a:stretch>
+            <a:fillRect/>
+          </a:stretch>
+        </p:blipFill>
+        <p:spPr>
+          <a:xfrm>
+            <a:off x="9982200" y="495990"/>
+            <a:ext cx="1695467" cy="2659269"/>
+          </a:xfrm>
+          <a:prstGeom prst="rect">
+            <a:avLst/>
+          </a:prstGeom>
+        </p:spPr>
+      </p:pic>
+    </p:spTree>
+    <p:extLst>
+      <p:ext uri="{BB962C8B-B14F-4D97-AF65-F5344CB8AC3E}">
+        <p14:creationId xmlns:p14="http://schemas.microsoft.com/office/powerpoint/2010/main" val="2882678504"/>
+      </p:ext>
+    </p:extLst>
+  </p:cSld>
+  <p:clrMapOvr>
+    <a:masterClrMapping/>
+  </p:clrMapOvr>
+</p:sld>
+</file>
+
+<file path=ppt/slides/slide30.xml><?xml version="1.0" encoding="utf-8"?>
 <p:sld xmlns:a="http://schemas.openxmlformats.org/drawingml/2006/main" xmlns:r="http://schemas.openxmlformats.org/officeDocument/2006/relationships" xmlns:p="http://schemas.openxmlformats.org/presentationml/2006/main">
   <p:cSld>
     <p:spTree>
@@ -23454,7 +22937,7 @@
           <a:p>
             <a:fld id="{60A26886-2117-0949-B8A5-D47461AC229C}" type="slidenum">
               <a:rPr lang="en-DE" smtClean="0"/>
-              <a:t>31</a:t>
+              <a:t>30</a:t>
             </a:fld>
             <a:endParaRPr lang="en-DE"/>
           </a:p>
@@ -23464,6 +22947,118 @@
     <p:extLst>
       <p:ext uri="{BB962C8B-B14F-4D97-AF65-F5344CB8AC3E}">
         <p14:creationId xmlns:p14="http://schemas.microsoft.com/office/powerpoint/2010/main" val="1710918919"/>
+      </p:ext>
+    </p:extLst>
+  </p:cSld>
+  <p:clrMapOvr>
+    <a:masterClrMapping/>
+  </p:clrMapOvr>
+</p:sld>
+</file>
+
+<file path=ppt/slides/slide31.xml><?xml version="1.0" encoding="utf-8"?>
+<p:sld xmlns:a="http://schemas.openxmlformats.org/drawingml/2006/main" xmlns:r="http://schemas.openxmlformats.org/officeDocument/2006/relationships" xmlns:p="http://schemas.openxmlformats.org/presentationml/2006/main">
+  <p:cSld>
+    <p:spTree>
+      <p:nvGrpSpPr>
+        <p:cNvPr id="1" name=""/>
+        <p:cNvGrpSpPr/>
+        <p:nvPr/>
+      </p:nvGrpSpPr>
+      <p:grpSpPr>
+        <a:xfrm>
+          <a:off x="0" y="0"/>
+          <a:ext cx="0" cy="0"/>
+          <a:chOff x="0" y="0"/>
+          <a:chExt cx="0" cy="0"/>
+        </a:xfrm>
+      </p:grpSpPr>
+      <p:sp>
+        <p:nvSpPr>
+          <p:cNvPr id="2" name="Titel 1">
+            <a:extLst>
+              <a:ext uri="{FF2B5EF4-FFF2-40B4-BE49-F238E27FC236}">
+                <a16:creationId xmlns:a16="http://schemas.microsoft.com/office/drawing/2014/main" id="{47814C2C-545A-C1AC-2E11-EBD69B672F61}"/>
+              </a:ext>
+            </a:extLst>
+          </p:cNvPr>
+          <p:cNvSpPr>
+            <a:spLocks noGrp="1"/>
+          </p:cNvSpPr>
+          <p:nvPr>
+            <p:ph type="title"/>
+          </p:nvPr>
+        </p:nvSpPr>
+        <p:spPr/>
+        <p:txBody>
+          <a:bodyPr/>
+          <a:lstStyle/>
+          <a:p>
+            <a:r>
+              <a:rPr lang="de-DE" dirty="0"/>
+              <a:t>Potential Outcomes Framework</a:t>
+            </a:r>
+          </a:p>
+        </p:txBody>
+      </p:sp>
+      <p:sp>
+        <p:nvSpPr>
+          <p:cNvPr id="3" name="Inhaltsplatzhalter 2">
+            <a:extLst>
+              <a:ext uri="{FF2B5EF4-FFF2-40B4-BE49-F238E27FC236}">
+                <a16:creationId xmlns:a16="http://schemas.microsoft.com/office/drawing/2014/main" id="{CDA7B7FB-D2B2-B3F7-DD47-8586559F2113}"/>
+              </a:ext>
+            </a:extLst>
+          </p:cNvPr>
+          <p:cNvSpPr>
+            <a:spLocks noGrp="1"/>
+          </p:cNvSpPr>
+          <p:nvPr>
+            <p:ph idx="1"/>
+          </p:nvPr>
+        </p:nvSpPr>
+        <p:spPr/>
+        <p:txBody>
+          <a:bodyPr/>
+          <a:lstStyle/>
+          <a:p>
+            <a:endParaRPr lang="de-DE"/>
+          </a:p>
+        </p:txBody>
+      </p:sp>
+      <p:sp>
+        <p:nvSpPr>
+          <p:cNvPr id="4" name="Foliennummernplatzhalter 3">
+            <a:extLst>
+              <a:ext uri="{FF2B5EF4-FFF2-40B4-BE49-F238E27FC236}">
+                <a16:creationId xmlns:a16="http://schemas.microsoft.com/office/drawing/2014/main" id="{3CC28BD3-6D0C-05BE-3E22-255A29F804A6}"/>
+              </a:ext>
+            </a:extLst>
+          </p:cNvPr>
+          <p:cNvSpPr>
+            <a:spLocks noGrp="1"/>
+          </p:cNvSpPr>
+          <p:nvPr>
+            <p:ph type="sldNum" sz="quarter" idx="12"/>
+          </p:nvPr>
+        </p:nvSpPr>
+        <p:spPr/>
+        <p:txBody>
+          <a:bodyPr/>
+          <a:lstStyle/>
+          <a:p>
+            <a:fld id="{3D4C94FE-FF23-4504-88E9-14D481113291}" type="slidenum">
+              <a:rPr lang="en-GB" smtClean="0"/>
+              <a:t>31</a:t>
+            </a:fld>
+            <a:endParaRPr lang="en-GB"/>
+          </a:p>
+        </p:txBody>
+      </p:sp>
+    </p:spTree>
+    <p:extLst>
+      <p:ext uri="{BB962C8B-B14F-4D97-AF65-F5344CB8AC3E}">
+        <p14:creationId xmlns:p14="http://schemas.microsoft.com/office/powerpoint/2010/main" val="2922871143"/>
       </p:ext>
     </p:extLst>
   </p:cSld>
@@ -23495,7 +23090,7 @@
           <p:cNvPr id="2" name="Titel 1">
             <a:extLst>
               <a:ext uri="{FF2B5EF4-FFF2-40B4-BE49-F238E27FC236}">
-                <a16:creationId xmlns:a16="http://schemas.microsoft.com/office/drawing/2014/main" id="{47814C2C-545A-C1AC-2E11-EBD69B672F61}"/>
+                <a16:creationId xmlns:a16="http://schemas.microsoft.com/office/drawing/2014/main" id="{2549D14E-4466-C9A2-D9D5-A83FA7E6D4B1}"/>
               </a:ext>
             </a:extLst>
           </p:cNvPr>
@@ -23513,7 +23108,15 @@
           <a:p>
             <a:r>
               <a:rPr lang="de-DE" dirty="0"/>
-              <a:t>Potential Outcomes Framework</a:t>
+              <a:t>Average Treatment </a:t>
+            </a:r>
+            <a:r>
+              <a:rPr lang="de-DE" dirty="0" err="1"/>
+              <a:t>Effect</a:t>
+            </a:r>
+            <a:r>
+              <a:rPr lang="de-DE" dirty="0"/>
+              <a:t> (ATE)</a:t>
             </a:r>
           </a:p>
         </p:txBody>
@@ -23523,7 +23126,7 @@
           <p:cNvPr id="3" name="Inhaltsplatzhalter 2">
             <a:extLst>
               <a:ext uri="{FF2B5EF4-FFF2-40B4-BE49-F238E27FC236}">
-                <a16:creationId xmlns:a16="http://schemas.microsoft.com/office/drawing/2014/main" id="{CDA7B7FB-D2B2-B3F7-DD47-8586559F2113}"/>
+                <a16:creationId xmlns:a16="http://schemas.microsoft.com/office/drawing/2014/main" id="{EED9D697-9F81-8C2A-F7D2-B66BFC6A8B49}"/>
               </a:ext>
             </a:extLst>
           </p:cNvPr>
@@ -23548,7 +23151,7 @@
           <p:cNvPr id="4" name="Foliennummernplatzhalter 3">
             <a:extLst>
               <a:ext uri="{FF2B5EF4-FFF2-40B4-BE49-F238E27FC236}">
-                <a16:creationId xmlns:a16="http://schemas.microsoft.com/office/drawing/2014/main" id="{3CC28BD3-6D0C-05BE-3E22-255A29F804A6}"/>
+                <a16:creationId xmlns:a16="http://schemas.microsoft.com/office/drawing/2014/main" id="{0E0128C5-DAFE-F7E5-5D08-2924F31A8D9A}"/>
               </a:ext>
             </a:extLst>
           </p:cNvPr>
@@ -23575,7 +23178,7 @@
     </p:spTree>
     <p:extLst>
       <p:ext uri="{BB962C8B-B14F-4D97-AF65-F5344CB8AC3E}">
-        <p14:creationId xmlns:p14="http://schemas.microsoft.com/office/powerpoint/2010/main" val="2922871143"/>
+        <p14:creationId xmlns:p14="http://schemas.microsoft.com/office/powerpoint/2010/main" val="554849604"/>
       </p:ext>
     </p:extLst>
   </p:cSld>
@@ -23607,7 +23210,7 @@
           <p:cNvPr id="2" name="Titel 1">
             <a:extLst>
               <a:ext uri="{FF2B5EF4-FFF2-40B4-BE49-F238E27FC236}">
-                <a16:creationId xmlns:a16="http://schemas.microsoft.com/office/drawing/2014/main" id="{2549D14E-4466-C9A2-D9D5-A83FA7E6D4B1}"/>
+                <a16:creationId xmlns:a16="http://schemas.microsoft.com/office/drawing/2014/main" id="{A3A2C89F-6072-7DBA-9EEE-D02546DA7D2C}"/>
               </a:ext>
             </a:extLst>
           </p:cNvPr>
@@ -23624,16 +23227,12 @@
           <a:lstStyle/>
           <a:p>
             <a:r>
+              <a:rPr lang="de-DE" dirty="0" err="1"/>
+              <a:t>Propensity</a:t>
+            </a:r>
+            <a:r>
               <a:rPr lang="de-DE" dirty="0"/>
-              <a:t>Average Treatment </a:t>
-            </a:r>
-            <a:r>
-              <a:rPr lang="de-DE" dirty="0" err="1"/>
-              <a:t>Effect</a:t>
-            </a:r>
-            <a:r>
-              <a:rPr lang="de-DE" dirty="0"/>
-              <a:t> (ATE)</a:t>
+              <a:t> Scores</a:t>
             </a:r>
           </a:p>
         </p:txBody>
@@ -23643,7 +23242,7 @@
           <p:cNvPr id="3" name="Inhaltsplatzhalter 2">
             <a:extLst>
               <a:ext uri="{FF2B5EF4-FFF2-40B4-BE49-F238E27FC236}">
-                <a16:creationId xmlns:a16="http://schemas.microsoft.com/office/drawing/2014/main" id="{EED9D697-9F81-8C2A-F7D2-B66BFC6A8B49}"/>
+                <a16:creationId xmlns:a16="http://schemas.microsoft.com/office/drawing/2014/main" id="{99E5E73C-DBA7-D454-EABA-FDC0822C48CB}"/>
               </a:ext>
             </a:extLst>
           </p:cNvPr>
@@ -23668,7 +23267,7 @@
           <p:cNvPr id="4" name="Foliennummernplatzhalter 3">
             <a:extLst>
               <a:ext uri="{FF2B5EF4-FFF2-40B4-BE49-F238E27FC236}">
-                <a16:creationId xmlns:a16="http://schemas.microsoft.com/office/drawing/2014/main" id="{0E0128C5-DAFE-F7E5-5D08-2924F31A8D9A}"/>
+                <a16:creationId xmlns:a16="http://schemas.microsoft.com/office/drawing/2014/main" id="{3C7133A9-83E7-A3A6-15A2-B68484C42A9A}"/>
               </a:ext>
             </a:extLst>
           </p:cNvPr>
@@ -23695,7 +23294,7 @@
     </p:spTree>
     <p:extLst>
       <p:ext uri="{BB962C8B-B14F-4D97-AF65-F5344CB8AC3E}">
-        <p14:creationId xmlns:p14="http://schemas.microsoft.com/office/powerpoint/2010/main" val="554849604"/>
+        <p14:creationId xmlns:p14="http://schemas.microsoft.com/office/powerpoint/2010/main" val="852600554"/>
       </p:ext>
     </p:extLst>
   </p:cSld>
@@ -23727,7 +23326,7 @@
           <p:cNvPr id="2" name="Titel 1">
             <a:extLst>
               <a:ext uri="{FF2B5EF4-FFF2-40B4-BE49-F238E27FC236}">
-                <a16:creationId xmlns:a16="http://schemas.microsoft.com/office/drawing/2014/main" id="{A3A2C89F-6072-7DBA-9EEE-D02546DA7D2C}"/>
+                <a16:creationId xmlns:a16="http://schemas.microsoft.com/office/drawing/2014/main" id="{EE31B11E-5137-69ED-4FF3-3C600292D36F}"/>
               </a:ext>
             </a:extLst>
           </p:cNvPr>
@@ -23744,13 +23343,22 @@
           <a:lstStyle/>
           <a:p>
             <a:r>
+              <a:rPr lang="de-DE" dirty="0"/>
+              <a:t>Inverse </a:t>
+            </a:r>
+            <a:r>
               <a:rPr lang="de-DE" dirty="0" err="1"/>
               <a:t>Propensity</a:t>
             </a:r>
             <a:r>
               <a:rPr lang="de-DE" dirty="0"/>
-              <a:t> Scores</a:t>
-            </a:r>
+              <a:t> Score </a:t>
+            </a:r>
+            <a:r>
+              <a:rPr lang="de-DE" dirty="0" err="1"/>
+              <a:t>Weighting</a:t>
+            </a:r>
+            <a:endParaRPr lang="de-DE" dirty="0"/>
           </a:p>
         </p:txBody>
       </p:sp>
@@ -23759,7 +23367,7 @@
           <p:cNvPr id="3" name="Inhaltsplatzhalter 2">
             <a:extLst>
               <a:ext uri="{FF2B5EF4-FFF2-40B4-BE49-F238E27FC236}">
-                <a16:creationId xmlns:a16="http://schemas.microsoft.com/office/drawing/2014/main" id="{99E5E73C-DBA7-D454-EABA-FDC0822C48CB}"/>
+                <a16:creationId xmlns:a16="http://schemas.microsoft.com/office/drawing/2014/main" id="{575AFA9C-1EF5-34B4-33CC-9874FAC18BF6}"/>
               </a:ext>
             </a:extLst>
           </p:cNvPr>
@@ -23784,7 +23392,7 @@
           <p:cNvPr id="4" name="Foliennummernplatzhalter 3">
             <a:extLst>
               <a:ext uri="{FF2B5EF4-FFF2-40B4-BE49-F238E27FC236}">
-                <a16:creationId xmlns:a16="http://schemas.microsoft.com/office/drawing/2014/main" id="{3C7133A9-83E7-A3A6-15A2-B68484C42A9A}"/>
+                <a16:creationId xmlns:a16="http://schemas.microsoft.com/office/drawing/2014/main" id="{9BB1FD29-7D60-DCD5-C8C0-0658E2D98D52}"/>
               </a:ext>
             </a:extLst>
           </p:cNvPr>
@@ -23811,7 +23419,7 @@
     </p:spTree>
     <p:extLst>
       <p:ext uri="{BB962C8B-B14F-4D97-AF65-F5344CB8AC3E}">
-        <p14:creationId xmlns:p14="http://schemas.microsoft.com/office/powerpoint/2010/main" val="852600554"/>
+        <p14:creationId xmlns:p14="http://schemas.microsoft.com/office/powerpoint/2010/main" val="1682934392"/>
       </p:ext>
     </p:extLst>
   </p:cSld>
@@ -23840,131 +23448,6 @@
       </p:grpSpPr>
       <p:sp>
         <p:nvSpPr>
-          <p:cNvPr id="2" name="Titel 1">
-            <a:extLst>
-              <a:ext uri="{FF2B5EF4-FFF2-40B4-BE49-F238E27FC236}">
-                <a16:creationId xmlns:a16="http://schemas.microsoft.com/office/drawing/2014/main" id="{EE31B11E-5137-69ED-4FF3-3C600292D36F}"/>
-              </a:ext>
-            </a:extLst>
-          </p:cNvPr>
-          <p:cNvSpPr>
-            <a:spLocks noGrp="1"/>
-          </p:cNvSpPr>
-          <p:nvPr>
-            <p:ph type="title"/>
-          </p:nvPr>
-        </p:nvSpPr>
-        <p:spPr/>
-        <p:txBody>
-          <a:bodyPr/>
-          <a:lstStyle/>
-          <a:p>
-            <a:r>
-              <a:rPr lang="de-DE" dirty="0"/>
-              <a:t>Inverse </a:t>
-            </a:r>
-            <a:r>
-              <a:rPr lang="de-DE" dirty="0" err="1"/>
-              <a:t>Propensity</a:t>
-            </a:r>
-            <a:r>
-              <a:rPr lang="de-DE" dirty="0"/>
-              <a:t> Score </a:t>
-            </a:r>
-            <a:r>
-              <a:rPr lang="de-DE" dirty="0" err="1"/>
-              <a:t>Weighting</a:t>
-            </a:r>
-            <a:endParaRPr lang="de-DE" dirty="0"/>
-          </a:p>
-        </p:txBody>
-      </p:sp>
-      <p:sp>
-        <p:nvSpPr>
-          <p:cNvPr id="3" name="Inhaltsplatzhalter 2">
-            <a:extLst>
-              <a:ext uri="{FF2B5EF4-FFF2-40B4-BE49-F238E27FC236}">
-                <a16:creationId xmlns:a16="http://schemas.microsoft.com/office/drawing/2014/main" id="{575AFA9C-1EF5-34B4-33CC-9874FAC18BF6}"/>
-              </a:ext>
-            </a:extLst>
-          </p:cNvPr>
-          <p:cNvSpPr>
-            <a:spLocks noGrp="1"/>
-          </p:cNvSpPr>
-          <p:nvPr>
-            <p:ph idx="1"/>
-          </p:nvPr>
-        </p:nvSpPr>
-        <p:spPr/>
-        <p:txBody>
-          <a:bodyPr/>
-          <a:lstStyle/>
-          <a:p>
-            <a:endParaRPr lang="de-DE"/>
-          </a:p>
-        </p:txBody>
-      </p:sp>
-      <p:sp>
-        <p:nvSpPr>
-          <p:cNvPr id="4" name="Foliennummernplatzhalter 3">
-            <a:extLst>
-              <a:ext uri="{FF2B5EF4-FFF2-40B4-BE49-F238E27FC236}">
-                <a16:creationId xmlns:a16="http://schemas.microsoft.com/office/drawing/2014/main" id="{9BB1FD29-7D60-DCD5-C8C0-0658E2D98D52}"/>
-              </a:ext>
-            </a:extLst>
-          </p:cNvPr>
-          <p:cNvSpPr>
-            <a:spLocks noGrp="1"/>
-          </p:cNvSpPr>
-          <p:nvPr>
-            <p:ph type="sldNum" sz="quarter" idx="12"/>
-          </p:nvPr>
-        </p:nvSpPr>
-        <p:spPr/>
-        <p:txBody>
-          <a:bodyPr/>
-          <a:lstStyle/>
-          <a:p>
-            <a:fld id="{3D4C94FE-FF23-4504-88E9-14D481113291}" type="slidenum">
-              <a:rPr lang="en-GB" smtClean="0"/>
-              <a:t>35</a:t>
-            </a:fld>
-            <a:endParaRPr lang="en-GB"/>
-          </a:p>
-        </p:txBody>
-      </p:sp>
-    </p:spTree>
-    <p:extLst>
-      <p:ext uri="{BB962C8B-B14F-4D97-AF65-F5344CB8AC3E}">
-        <p14:creationId xmlns:p14="http://schemas.microsoft.com/office/powerpoint/2010/main" val="1682934392"/>
-      </p:ext>
-    </p:extLst>
-  </p:cSld>
-  <p:clrMapOvr>
-    <a:masterClrMapping/>
-  </p:clrMapOvr>
-</p:sld>
-</file>
-
-<file path=ppt/slides/slide36.xml><?xml version="1.0" encoding="utf-8"?>
-<p:sld xmlns:a="http://schemas.openxmlformats.org/drawingml/2006/main" xmlns:r="http://schemas.openxmlformats.org/officeDocument/2006/relationships" xmlns:p="http://schemas.openxmlformats.org/presentationml/2006/main">
-  <p:cSld>
-    <p:spTree>
-      <p:nvGrpSpPr>
-        <p:cNvPr id="1" name=""/>
-        <p:cNvGrpSpPr/>
-        <p:nvPr/>
-      </p:nvGrpSpPr>
-      <p:grpSpPr>
-        <a:xfrm>
-          <a:off x="0" y="0"/>
-          <a:ext cx="0" cy="0"/>
-          <a:chOff x="0" y="0"/>
-          <a:chExt cx="0" cy="0"/>
-        </a:xfrm>
-      </p:grpSpPr>
-      <p:sp>
-        <p:nvSpPr>
           <p:cNvPr id="2" name="Title 1">
             <a:extLst>
               <a:ext uri="{FF2B5EF4-FFF2-40B4-BE49-F238E27FC236}">
@@ -24153,7 +23636,7 @@
           <a:p>
             <a:fld id="{60A26886-2117-0949-B8A5-D47461AC229C}" type="slidenum">
               <a:rPr lang="en-DE" smtClean="0"/>
-              <a:t>36</a:t>
+              <a:t>35</a:t>
             </a:fld>
             <a:endParaRPr lang="en-DE"/>
           </a:p>
@@ -24229,7 +23712,7 @@
 </p:sld>
 </file>
 
-<file path=ppt/slides/slide37.xml><?xml version="1.0" encoding="utf-8"?>
+<file path=ppt/slides/slide36.xml><?xml version="1.0" encoding="utf-8"?>
 <p:sld xmlns:a="http://schemas.openxmlformats.org/drawingml/2006/main" xmlns:r="http://schemas.openxmlformats.org/officeDocument/2006/relationships" xmlns:p="http://schemas.openxmlformats.org/presentationml/2006/main">
   <p:cSld>
     <p:spTree>
@@ -25451,7 +24934,7 @@
           <a:p>
             <a:fld id="{60A26886-2117-0949-B8A5-D47461AC229C}" type="slidenum">
               <a:rPr lang="en-DE" smtClean="0"/>
-              <a:t>37</a:t>
+              <a:t>36</a:t>
             </a:fld>
             <a:endParaRPr lang="en-DE"/>
           </a:p>
@@ -26095,6 +25578,127 @@
 </p:sld>
 </file>
 
+<file path=ppt/slides/slide37.xml><?xml version="1.0" encoding="utf-8"?>
+<p:sld xmlns:a="http://schemas.openxmlformats.org/drawingml/2006/main" xmlns:r="http://schemas.openxmlformats.org/officeDocument/2006/relationships" xmlns:p="http://schemas.openxmlformats.org/presentationml/2006/main">
+  <p:cSld>
+    <p:spTree>
+      <p:nvGrpSpPr>
+        <p:cNvPr id="1" name=""/>
+        <p:cNvGrpSpPr/>
+        <p:nvPr/>
+      </p:nvGrpSpPr>
+      <p:grpSpPr>
+        <a:xfrm>
+          <a:off x="0" y="0"/>
+          <a:ext cx="0" cy="0"/>
+          <a:chOff x="0" y="0"/>
+          <a:chExt cx="0" cy="0"/>
+        </a:xfrm>
+      </p:grpSpPr>
+      <p:sp>
+        <p:nvSpPr>
+          <p:cNvPr id="2" name="Titel 1">
+            <a:extLst>
+              <a:ext uri="{FF2B5EF4-FFF2-40B4-BE49-F238E27FC236}">
+                <a16:creationId xmlns:a16="http://schemas.microsoft.com/office/drawing/2014/main" id="{924A5525-78F3-2B65-6CB4-8887FABB582D}"/>
+              </a:ext>
+            </a:extLst>
+          </p:cNvPr>
+          <p:cNvSpPr>
+            <a:spLocks noGrp="1"/>
+          </p:cNvSpPr>
+          <p:nvPr>
+            <p:ph type="title"/>
+          </p:nvPr>
+        </p:nvSpPr>
+        <p:spPr/>
+        <p:txBody>
+          <a:bodyPr/>
+          <a:lstStyle/>
+          <a:p>
+            <a:r>
+              <a:rPr lang="de-DE" dirty="0" err="1"/>
+              <a:t>Limitations</a:t>
+            </a:r>
+            <a:r>
+              <a:rPr lang="de-DE" dirty="0"/>
+              <a:t> and </a:t>
+            </a:r>
+            <a:r>
+              <a:rPr lang="de-DE" dirty="0" err="1"/>
+              <a:t>Assumptions</a:t>
+            </a:r>
+            <a:endParaRPr lang="de-DE" dirty="0"/>
+          </a:p>
+        </p:txBody>
+      </p:sp>
+      <p:sp>
+        <p:nvSpPr>
+          <p:cNvPr id="3" name="Inhaltsplatzhalter 2">
+            <a:extLst>
+              <a:ext uri="{FF2B5EF4-FFF2-40B4-BE49-F238E27FC236}">
+                <a16:creationId xmlns:a16="http://schemas.microsoft.com/office/drawing/2014/main" id="{D633A1D1-05D5-7B40-A19B-F45E8C3692DB}"/>
+              </a:ext>
+            </a:extLst>
+          </p:cNvPr>
+          <p:cNvSpPr>
+            <a:spLocks noGrp="1"/>
+          </p:cNvSpPr>
+          <p:nvPr>
+            <p:ph idx="1"/>
+          </p:nvPr>
+        </p:nvSpPr>
+        <p:spPr/>
+        <p:txBody>
+          <a:bodyPr/>
+          <a:lstStyle/>
+          <a:p>
+            <a:endParaRPr lang="de-DE"/>
+          </a:p>
+        </p:txBody>
+      </p:sp>
+      <p:sp>
+        <p:nvSpPr>
+          <p:cNvPr id="4" name="Foliennummernplatzhalter 3">
+            <a:extLst>
+              <a:ext uri="{FF2B5EF4-FFF2-40B4-BE49-F238E27FC236}">
+                <a16:creationId xmlns:a16="http://schemas.microsoft.com/office/drawing/2014/main" id="{A3815B34-1F38-A9F7-4F2E-57D89A31016D}"/>
+              </a:ext>
+            </a:extLst>
+          </p:cNvPr>
+          <p:cNvSpPr>
+            <a:spLocks noGrp="1"/>
+          </p:cNvSpPr>
+          <p:nvPr>
+            <p:ph type="sldNum" sz="quarter" idx="12"/>
+          </p:nvPr>
+        </p:nvSpPr>
+        <p:spPr/>
+        <p:txBody>
+          <a:bodyPr/>
+          <a:lstStyle/>
+          <a:p>
+            <a:fld id="{3D4C94FE-FF23-4504-88E9-14D481113291}" type="slidenum">
+              <a:rPr lang="en-GB" smtClean="0"/>
+              <a:t>37</a:t>
+            </a:fld>
+            <a:endParaRPr lang="en-GB"/>
+          </a:p>
+        </p:txBody>
+      </p:sp>
+    </p:spTree>
+    <p:extLst>
+      <p:ext uri="{BB962C8B-B14F-4D97-AF65-F5344CB8AC3E}">
+        <p14:creationId xmlns:p14="http://schemas.microsoft.com/office/powerpoint/2010/main" val="3435692992"/>
+      </p:ext>
+    </p:extLst>
+  </p:cSld>
+  <p:clrMapOvr>
+    <a:masterClrMapping/>
+  </p:clrMapOvr>
+</p:sld>
+</file>
+
 <file path=ppt/slides/slide38.xml><?xml version="1.0" encoding="utf-8"?>
 <p:sld xmlns:a="http://schemas.openxmlformats.org/drawingml/2006/main" xmlns:r="http://schemas.openxmlformats.org/officeDocument/2006/relationships" xmlns:p="http://schemas.openxmlformats.org/presentationml/2006/main">
   <p:cSld>
@@ -26117,7 +25721,7 @@
           <p:cNvPr id="2" name="Titel 1">
             <a:extLst>
               <a:ext uri="{FF2B5EF4-FFF2-40B4-BE49-F238E27FC236}">
-                <a16:creationId xmlns:a16="http://schemas.microsoft.com/office/drawing/2014/main" id="{924A5525-78F3-2B65-6CB4-8887FABB582D}"/>
+                <a16:creationId xmlns:a16="http://schemas.microsoft.com/office/drawing/2014/main" id="{9BCF6B4E-2D4F-C6C0-ECF9-D098FA6BC7B1}"/>
               </a:ext>
             </a:extLst>
           </p:cNvPr>
@@ -26135,17 +25739,36 @@
           <a:p>
             <a:r>
               <a:rPr lang="de-DE" dirty="0" err="1"/>
-              <a:t>Limitations</a:t>
+              <a:t>From</a:t>
             </a:r>
             <a:r>
               <a:rPr lang="de-DE" dirty="0"/>
-              <a:t> and </a:t>
+              <a:t> </a:t>
             </a:r>
             <a:r>
               <a:rPr lang="de-DE" dirty="0" err="1"/>
-              <a:t>Assumptions</a:t>
-            </a:r>
-            <a:endParaRPr lang="de-DE" dirty="0"/>
+              <a:t>Causality</a:t>
+            </a:r>
+            <a:r>
+              <a:rPr lang="de-DE" dirty="0"/>
+              <a:t> </a:t>
+            </a:r>
+            <a:r>
+              <a:rPr lang="de-DE" dirty="0" err="1"/>
+              <a:t>to</a:t>
+            </a:r>
+            <a:r>
+              <a:rPr lang="de-DE" dirty="0"/>
+              <a:t> </a:t>
+            </a:r>
+            <a:r>
+              <a:rPr lang="de-DE" dirty="0" err="1"/>
+              <a:t>Decision</a:t>
+            </a:r>
+            <a:r>
+              <a:rPr lang="de-DE" dirty="0"/>
+              <a:t> Making</a:t>
+            </a:r>
           </a:p>
         </p:txBody>
       </p:sp>
@@ -26154,7 +25777,7 @@
           <p:cNvPr id="3" name="Inhaltsplatzhalter 2">
             <a:extLst>
               <a:ext uri="{FF2B5EF4-FFF2-40B4-BE49-F238E27FC236}">
-                <a16:creationId xmlns:a16="http://schemas.microsoft.com/office/drawing/2014/main" id="{D633A1D1-05D5-7B40-A19B-F45E8C3692DB}"/>
+                <a16:creationId xmlns:a16="http://schemas.microsoft.com/office/drawing/2014/main" id="{B2986DE1-D0D4-D438-958A-ECECA1A64FD1}"/>
               </a:ext>
             </a:extLst>
           </p:cNvPr>
@@ -26179,7 +25802,7 @@
           <p:cNvPr id="4" name="Foliennummernplatzhalter 3">
             <a:extLst>
               <a:ext uri="{FF2B5EF4-FFF2-40B4-BE49-F238E27FC236}">
-                <a16:creationId xmlns:a16="http://schemas.microsoft.com/office/drawing/2014/main" id="{A3815B34-1F38-A9F7-4F2E-57D89A31016D}"/>
+                <a16:creationId xmlns:a16="http://schemas.microsoft.com/office/drawing/2014/main" id="{D12E7268-5898-B17D-3754-02976D9BEE3C}"/>
               </a:ext>
             </a:extLst>
           </p:cNvPr>
@@ -26206,7 +25829,7 @@
     </p:spTree>
     <p:extLst>
       <p:ext uri="{BB962C8B-B14F-4D97-AF65-F5344CB8AC3E}">
-        <p14:creationId xmlns:p14="http://schemas.microsoft.com/office/powerpoint/2010/main" val="3435692992"/>
+        <p14:creationId xmlns:p14="http://schemas.microsoft.com/office/powerpoint/2010/main" val="4173707291"/>
       </p:ext>
     </p:extLst>
   </p:cSld>
@@ -26235,10 +25858,10 @@
       </p:grpSpPr>
       <p:sp>
         <p:nvSpPr>
-          <p:cNvPr id="2" name="Titel 1">
-            <a:extLst>
-              <a:ext uri="{FF2B5EF4-FFF2-40B4-BE49-F238E27FC236}">
-                <a16:creationId xmlns:a16="http://schemas.microsoft.com/office/drawing/2014/main" id="{9BCF6B4E-2D4F-C6C0-ECF9-D098FA6BC7B1}"/>
+          <p:cNvPr id="2" name="Title 1">
+            <a:extLst>
+              <a:ext uri="{FF2B5EF4-FFF2-40B4-BE49-F238E27FC236}">
+                <a16:creationId xmlns:a16="http://schemas.microsoft.com/office/drawing/2014/main" id="{EECB9D83-64A4-3C53-97D5-7979A3620543}"/>
               </a:ext>
             </a:extLst>
           </p:cNvPr>
@@ -26255,46 +25878,22 @@
           <a:lstStyle/>
           <a:p>
             <a:r>
-              <a:rPr lang="de-DE" dirty="0" err="1"/>
-              <a:t>From</a:t>
-            </a:r>
-            <a:r>
-              <a:rPr lang="de-DE" dirty="0"/>
-              <a:t> </a:t>
-            </a:r>
-            <a:r>
-              <a:rPr lang="de-DE" dirty="0" err="1"/>
-              <a:t>Causality</a:t>
-            </a:r>
-            <a:r>
-              <a:rPr lang="de-DE" dirty="0"/>
-              <a:t> </a:t>
-            </a:r>
-            <a:r>
-              <a:rPr lang="de-DE" dirty="0" err="1"/>
-              <a:t>to</a:t>
-            </a:r>
-            <a:r>
-              <a:rPr lang="de-DE" dirty="0"/>
-              <a:t> </a:t>
-            </a:r>
-            <a:r>
-              <a:rPr lang="de-DE" dirty="0" err="1"/>
-              <a:t>Decision</a:t>
-            </a:r>
-            <a:r>
-              <a:rPr lang="de-DE" dirty="0"/>
-              <a:t> Making</a:t>
+              <a:rPr lang="en-GB" dirty="0"/>
+              <a:t>Demand Shaping: Confounders for </a:t>
+            </a:r>
+            <a:r>
+              <a:rPr lang="en-DE" dirty="0"/>
+              <a:t>Pricing</a:t>
             </a:r>
           </a:p>
         </p:txBody>
       </p:sp>
       <p:sp>
         <p:nvSpPr>
-          <p:cNvPr id="3" name="Inhaltsplatzhalter 2">
-            <a:extLst>
-              <a:ext uri="{FF2B5EF4-FFF2-40B4-BE49-F238E27FC236}">
-                <a16:creationId xmlns:a16="http://schemas.microsoft.com/office/drawing/2014/main" id="{B2986DE1-D0D4-D438-958A-ECECA1A64FD1}"/>
+          <p:cNvPr id="3" name="Content Placeholder 2">
+            <a:extLst>
+              <a:ext uri="{FF2B5EF4-FFF2-40B4-BE49-F238E27FC236}">
+                <a16:creationId xmlns:a16="http://schemas.microsoft.com/office/drawing/2014/main" id="{08E87C38-FD5C-F468-4679-B3544B286ACF}"/>
               </a:ext>
             </a:extLst>
           </p:cNvPr>
@@ -26307,19 +25906,77 @@
         </p:nvSpPr>
         <p:spPr/>
         <p:txBody>
-          <a:bodyPr/>
+          <a:bodyPr>
+            <a:normAutofit/>
+          </a:bodyPr>
           <a:lstStyle/>
           <a:p>
-            <a:endParaRPr lang="de-DE"/>
+            <a:pPr marL="0" indent="0">
+              <a:buNone/>
+            </a:pPr>
+            <a:r>
+              <a:rPr lang="en-GB" sz="2600" dirty="0"/>
+              <a:t>price setting for a product can be considered a d</a:t>
+            </a:r>
+            <a:r>
+              <a:rPr lang="en-DE" sz="2600" dirty="0"/>
+              <a:t>emand shaping method</a:t>
+            </a:r>
+          </a:p>
+          <a:p>
+            <a:pPr marL="0" indent="0">
+              <a:buNone/>
+            </a:pPr>
+            <a:r>
+              <a:rPr lang="en-GB" sz="2600" dirty="0"/>
+              <a:t>the idea is a causal effect: lower price leads to higher demand</a:t>
+            </a:r>
+          </a:p>
+          <a:p>
+            <a:pPr marL="0" indent="0">
+              <a:buNone/>
+            </a:pPr>
+            <a:r>
+              <a:rPr lang="en-GB" sz="2600" dirty="0">
+                <a:sym typeface="Wingdings" pitchFamily="2" charset="2"/>
+              </a:rPr>
+              <a:t> by estimating this causal effect one can find an optimal price according to a given policy (like maximizing profit)</a:t>
+            </a:r>
+            <a:endParaRPr lang="en-GB" sz="2600" dirty="0"/>
+          </a:p>
+          <a:p>
+            <a:pPr marL="0" indent="0">
+              <a:buNone/>
+            </a:pPr>
+            <a:endParaRPr lang="en-DE" sz="2600" dirty="0"/>
+          </a:p>
+          <a:p>
+            <a:pPr marL="0" indent="0">
+              <a:buNone/>
+            </a:pPr>
+            <a:r>
+              <a:rPr lang="en-GB" sz="2600" dirty="0"/>
+              <a:t>p</a:t>
+            </a:r>
+            <a:r>
+              <a:rPr lang="en-DE" sz="2600" dirty="0"/>
+              <a:t>roblem: confounders influencing both pricing in past (obverved) data and demand, e.g., lowering prices on weekends only for grocery or lowering prices toward end of a season for fashion (most sales at beginning of season)</a:t>
+            </a:r>
+          </a:p>
+          <a:p>
+            <a:pPr marL="0" indent="0">
+              <a:buNone/>
+            </a:pPr>
+            <a:endParaRPr lang="en-DE" sz="2600" dirty="0"/>
           </a:p>
         </p:txBody>
       </p:sp>
       <p:sp>
         <p:nvSpPr>
-          <p:cNvPr id="4" name="Foliennummernplatzhalter 3">
-            <a:extLst>
-              <a:ext uri="{FF2B5EF4-FFF2-40B4-BE49-F238E27FC236}">
-                <a16:creationId xmlns:a16="http://schemas.microsoft.com/office/drawing/2014/main" id="{D12E7268-5898-B17D-3754-02976D9BEE3C}"/>
+          <p:cNvPr id="4" name="Slide Number Placeholder 3">
+            <a:extLst>
+              <a:ext uri="{FF2B5EF4-FFF2-40B4-BE49-F238E27FC236}">
+                <a16:creationId xmlns:a16="http://schemas.microsoft.com/office/drawing/2014/main" id="{68047069-74C6-E8C0-167D-0751091BD02F}"/>
               </a:ext>
             </a:extLst>
           </p:cNvPr>
@@ -26335,18 +25992,18 @@
           <a:bodyPr/>
           <a:lstStyle/>
           <a:p>
-            <a:fld id="{3D4C94FE-FF23-4504-88E9-14D481113291}" type="slidenum">
-              <a:rPr lang="en-GB" smtClean="0"/>
+            <a:fld id="{60A26886-2117-0949-B8A5-D47461AC229C}" type="slidenum">
+              <a:rPr lang="en-DE" smtClean="0"/>
               <a:t>39</a:t>
             </a:fld>
-            <a:endParaRPr lang="en-GB"/>
+            <a:endParaRPr lang="en-DE"/>
           </a:p>
         </p:txBody>
       </p:sp>
     </p:spTree>
     <p:extLst>
       <p:ext uri="{BB962C8B-B14F-4D97-AF65-F5344CB8AC3E}">
-        <p14:creationId xmlns:p14="http://schemas.microsoft.com/office/powerpoint/2010/main" val="4173707291"/>
+        <p14:creationId xmlns:p14="http://schemas.microsoft.com/office/powerpoint/2010/main" val="2809433777"/>
       </p:ext>
     </p:extLst>
   </p:cSld>
@@ -26378,7 +26035,7 @@
           <p:cNvPr id="2" name="Titel 1">
             <a:extLst>
               <a:ext uri="{FF2B5EF4-FFF2-40B4-BE49-F238E27FC236}">
-                <a16:creationId xmlns:a16="http://schemas.microsoft.com/office/drawing/2014/main" id="{CDA11EC4-AB88-8790-06D5-8494E3B2EA07}"/>
+                <a16:creationId xmlns:a16="http://schemas.microsoft.com/office/drawing/2014/main" id="{937B849C-21FC-D2C5-4A4E-6EF8D8FDEBFE}"/>
               </a:ext>
             </a:extLst>
           </p:cNvPr>
@@ -26396,7 +26053,7 @@
           <a:p>
             <a:r>
               <a:rPr lang="de-DE" dirty="0" err="1"/>
-              <a:t>Why</a:t>
+              <a:t>Prediction</a:t>
             </a:r>
             <a:r>
               <a:rPr lang="de-DE" dirty="0"/>
@@ -26404,12 +26061,25 @@
             </a:r>
             <a:r>
               <a:rPr lang="de-DE" dirty="0" err="1"/>
-              <a:t>Causality</a:t>
+              <a:t>vs</a:t>
             </a:r>
             <a:r>
               <a:rPr lang="de-DE" dirty="0"/>
-              <a:t> Matters</a:t>
-            </a:r>
+              <a:t> </a:t>
+            </a:r>
+            <a:r>
+              <a:rPr lang="de-DE" dirty="0" err="1"/>
+              <a:t>Causal</a:t>
+            </a:r>
+            <a:r>
+              <a:rPr lang="de-DE" dirty="0"/>
+              <a:t> </a:t>
+            </a:r>
+            <a:r>
+              <a:rPr lang="de-DE" dirty="0" err="1"/>
+              <a:t>Inference</a:t>
+            </a:r>
+            <a:endParaRPr lang="de-DE" dirty="0"/>
           </a:p>
         </p:txBody>
       </p:sp>
@@ -26418,7 +26088,7 @@
           <p:cNvPr id="3" name="Inhaltsplatzhalter 2">
             <a:extLst>
               <a:ext uri="{FF2B5EF4-FFF2-40B4-BE49-F238E27FC236}">
-                <a16:creationId xmlns:a16="http://schemas.microsoft.com/office/drawing/2014/main" id="{79694769-D61A-3B98-A4E4-E81FF5303DC7}"/>
+                <a16:creationId xmlns:a16="http://schemas.microsoft.com/office/drawing/2014/main" id="{C3FA29EC-AE42-B22F-5180-A08F3F912005}"/>
               </a:ext>
             </a:extLst>
           </p:cNvPr>
@@ -26431,89 +26101,10 @@
         </p:nvSpPr>
         <p:spPr/>
         <p:txBody>
-          <a:bodyPr>
-            <a:normAutofit lnSpcReduction="10000"/>
-          </a:bodyPr>
+          <a:bodyPr/>
           <a:lstStyle/>
           <a:p>
-            <a:pPr marL="0" indent="0">
-              <a:buNone/>
-            </a:pPr>
-            <a:r>
-              <a:rPr lang="en-DE"/>
-              <a:t>story behind the data as important as the data itself</a:t>
-            </a:r>
-          </a:p>
-          <a:p>
-            <a:pPr marL="0" indent="0">
-              <a:buNone/>
-            </a:pPr>
-            <a:endParaRPr lang="en-DE"/>
-          </a:p>
-          <a:p>
-            <a:pPr marL="0" indent="0">
-              <a:buNone/>
-            </a:pPr>
-            <a:r>
-              <a:rPr lang="en-GB" dirty="0"/>
-              <a:t>W</a:t>
-            </a:r>
-            <a:r>
-              <a:rPr lang="en-DE"/>
-              <a:t>hy are the statistical dependencies as observed?</a:t>
-            </a:r>
-          </a:p>
-          <a:p>
-            <a:pPr>
-              <a:buFont typeface="Wingdings" pitchFamily="2" charset="2"/>
-              <a:buChar char="à"/>
-            </a:pPr>
-            <a:r>
-              <a:rPr lang="en-GB" dirty="0"/>
-              <a:t> d</a:t>
-            </a:r>
-            <a:r>
-              <a:rPr lang="en-DE"/>
-              <a:t>ata-generating process mostly governed by causal dependencies</a:t>
-            </a:r>
-          </a:p>
-          <a:p>
-            <a:pPr marL="0" indent="0">
-              <a:buNone/>
-            </a:pPr>
-            <a:endParaRPr lang="en-DE"/>
-          </a:p>
-          <a:p>
-            <a:pPr marL="0" indent="0">
-              <a:buNone/>
-            </a:pPr>
-            <a:r>
-              <a:rPr lang="en-GB" dirty="0"/>
-              <a:t>but l</a:t>
-            </a:r>
-            <a:r>
-              <a:rPr lang="en-DE"/>
-              <a:t>anguage of algebra symmetric</a:t>
-            </a:r>
-          </a:p>
-          <a:p>
-            <a:pPr marL="0" indent="0">
-              <a:buNone/>
-            </a:pPr>
-            <a:r>
-              <a:rPr lang="en-GB" dirty="0"/>
-              <a:t>n</a:t>
-            </a:r>
-            <a:r>
-              <a:rPr lang="en-DE"/>
-              <a:t>o way to tell that a storm causes barometer to go down and not the other way around </a:t>
-            </a:r>
-            <a:r>
-              <a:rPr lang="en-DE">
-                <a:sym typeface="Wingdings" pitchFamily="2" charset="2"/>
-              </a:rPr>
-              <a:t> need for asymmetric mathematical language</a:t>
-            </a:r>
+            <a:endParaRPr lang="de-DE"/>
           </a:p>
         </p:txBody>
       </p:sp>
@@ -26522,7 +26113,7 @@
           <p:cNvPr id="4" name="Foliennummernplatzhalter 3">
             <a:extLst>
               <a:ext uri="{FF2B5EF4-FFF2-40B4-BE49-F238E27FC236}">
-                <a16:creationId xmlns:a16="http://schemas.microsoft.com/office/drawing/2014/main" id="{73E3D9A5-259C-7CEA-9207-FDF51DD9530C}"/>
+                <a16:creationId xmlns:a16="http://schemas.microsoft.com/office/drawing/2014/main" id="{768765CE-96C2-949F-9907-EB1D51B11F18}"/>
               </a:ext>
             </a:extLst>
           </p:cNvPr>
@@ -26546,40 +26137,10 @@
           </a:p>
         </p:txBody>
       </p:sp>
-      <p:pic>
-        <p:nvPicPr>
-          <p:cNvPr id="5" name="Picture 7" descr="Text&#10;&#10;Description automatically generated">
-            <a:extLst>
-              <a:ext uri="{FF2B5EF4-FFF2-40B4-BE49-F238E27FC236}">
-                <a16:creationId xmlns:a16="http://schemas.microsoft.com/office/drawing/2014/main" id="{C6AB4372-AAD3-E8A0-D361-52910D16936C}"/>
-              </a:ext>
-            </a:extLst>
-          </p:cNvPr>
-          <p:cNvPicPr>
-            <a:picLocks noChangeAspect="1"/>
-          </p:cNvPicPr>
-          <p:nvPr/>
-        </p:nvPicPr>
-        <p:blipFill>
-          <a:blip r:embed="rId2"/>
-          <a:stretch>
-            <a:fillRect/>
-          </a:stretch>
-        </p:blipFill>
-        <p:spPr>
-          <a:xfrm>
-            <a:off x="9982200" y="495990"/>
-            <a:ext cx="1695467" cy="2659269"/>
-          </a:xfrm>
-          <a:prstGeom prst="rect">
-            <a:avLst/>
-          </a:prstGeom>
-        </p:spPr>
-      </p:pic>
     </p:spTree>
     <p:extLst>
       <p:ext uri="{BB962C8B-B14F-4D97-AF65-F5344CB8AC3E}">
-        <p14:creationId xmlns:p14="http://schemas.microsoft.com/office/powerpoint/2010/main" val="2882678504"/>
+        <p14:creationId xmlns:p14="http://schemas.microsoft.com/office/powerpoint/2010/main" val="395640134"/>
       </p:ext>
     </p:extLst>
   </p:cSld>
@@ -26611,180 +26172,6 @@
           <p:cNvPr id="2" name="Title 1">
             <a:extLst>
               <a:ext uri="{FF2B5EF4-FFF2-40B4-BE49-F238E27FC236}">
-                <a16:creationId xmlns:a16="http://schemas.microsoft.com/office/drawing/2014/main" id="{EECB9D83-64A4-3C53-97D5-7979A3620543}"/>
-              </a:ext>
-            </a:extLst>
-          </p:cNvPr>
-          <p:cNvSpPr>
-            <a:spLocks noGrp="1"/>
-          </p:cNvSpPr>
-          <p:nvPr>
-            <p:ph type="title"/>
-          </p:nvPr>
-        </p:nvSpPr>
-        <p:spPr/>
-        <p:txBody>
-          <a:bodyPr/>
-          <a:lstStyle/>
-          <a:p>
-            <a:r>
-              <a:rPr lang="en-GB" dirty="0"/>
-              <a:t>Demand Shaping: Confounders for </a:t>
-            </a:r>
-            <a:r>
-              <a:rPr lang="en-DE" dirty="0"/>
-              <a:t>Pricing</a:t>
-            </a:r>
-          </a:p>
-        </p:txBody>
-      </p:sp>
-      <p:sp>
-        <p:nvSpPr>
-          <p:cNvPr id="3" name="Content Placeholder 2">
-            <a:extLst>
-              <a:ext uri="{FF2B5EF4-FFF2-40B4-BE49-F238E27FC236}">
-                <a16:creationId xmlns:a16="http://schemas.microsoft.com/office/drawing/2014/main" id="{08E87C38-FD5C-F468-4679-B3544B286ACF}"/>
-              </a:ext>
-            </a:extLst>
-          </p:cNvPr>
-          <p:cNvSpPr>
-            <a:spLocks noGrp="1"/>
-          </p:cNvSpPr>
-          <p:nvPr>
-            <p:ph idx="1"/>
-          </p:nvPr>
-        </p:nvSpPr>
-        <p:spPr/>
-        <p:txBody>
-          <a:bodyPr>
-            <a:normAutofit/>
-          </a:bodyPr>
-          <a:lstStyle/>
-          <a:p>
-            <a:pPr marL="0" indent="0">
-              <a:buNone/>
-            </a:pPr>
-            <a:r>
-              <a:rPr lang="en-GB" sz="2600" dirty="0"/>
-              <a:t>price setting for a product can be considered a d</a:t>
-            </a:r>
-            <a:r>
-              <a:rPr lang="en-DE" sz="2600" dirty="0"/>
-              <a:t>emand shaping method</a:t>
-            </a:r>
-          </a:p>
-          <a:p>
-            <a:pPr marL="0" indent="0">
-              <a:buNone/>
-            </a:pPr>
-            <a:r>
-              <a:rPr lang="en-GB" sz="2600" dirty="0"/>
-              <a:t>the idea is a causal effect: lower price leads to higher demand</a:t>
-            </a:r>
-          </a:p>
-          <a:p>
-            <a:pPr marL="0" indent="0">
-              <a:buNone/>
-            </a:pPr>
-            <a:r>
-              <a:rPr lang="en-GB" sz="2600" dirty="0">
-                <a:sym typeface="Wingdings" pitchFamily="2" charset="2"/>
-              </a:rPr>
-              <a:t> by estimating this causal effect one can find an optimal price according to a given policy (like maximizing profit)</a:t>
-            </a:r>
-            <a:endParaRPr lang="en-GB" sz="2600" dirty="0"/>
-          </a:p>
-          <a:p>
-            <a:pPr marL="0" indent="0">
-              <a:buNone/>
-            </a:pPr>
-            <a:endParaRPr lang="en-DE" sz="2600" dirty="0"/>
-          </a:p>
-          <a:p>
-            <a:pPr marL="0" indent="0">
-              <a:buNone/>
-            </a:pPr>
-            <a:r>
-              <a:rPr lang="en-GB" sz="2600" dirty="0"/>
-              <a:t>p</a:t>
-            </a:r>
-            <a:r>
-              <a:rPr lang="en-DE" sz="2600" dirty="0"/>
-              <a:t>roblem: confounders influencing both pricing in past (obverved) data and demand, e.g., lowering prices on weekends only for grocery or lowering prices toward end of a season for fashion (most sales at beginning of season)</a:t>
-            </a:r>
-          </a:p>
-          <a:p>
-            <a:pPr marL="0" indent="0">
-              <a:buNone/>
-            </a:pPr>
-            <a:endParaRPr lang="en-DE" sz="2600" dirty="0"/>
-          </a:p>
-        </p:txBody>
-      </p:sp>
-      <p:sp>
-        <p:nvSpPr>
-          <p:cNvPr id="4" name="Slide Number Placeholder 3">
-            <a:extLst>
-              <a:ext uri="{FF2B5EF4-FFF2-40B4-BE49-F238E27FC236}">
-                <a16:creationId xmlns:a16="http://schemas.microsoft.com/office/drawing/2014/main" id="{68047069-74C6-E8C0-167D-0751091BD02F}"/>
-              </a:ext>
-            </a:extLst>
-          </p:cNvPr>
-          <p:cNvSpPr>
-            <a:spLocks noGrp="1"/>
-          </p:cNvSpPr>
-          <p:nvPr>
-            <p:ph type="sldNum" sz="quarter" idx="12"/>
-          </p:nvPr>
-        </p:nvSpPr>
-        <p:spPr/>
-        <p:txBody>
-          <a:bodyPr/>
-          <a:lstStyle/>
-          <a:p>
-            <a:fld id="{60A26886-2117-0949-B8A5-D47461AC229C}" type="slidenum">
-              <a:rPr lang="en-DE" smtClean="0"/>
-              <a:t>40</a:t>
-            </a:fld>
-            <a:endParaRPr lang="en-DE"/>
-          </a:p>
-        </p:txBody>
-      </p:sp>
-    </p:spTree>
-    <p:extLst>
-      <p:ext uri="{BB962C8B-B14F-4D97-AF65-F5344CB8AC3E}">
-        <p14:creationId xmlns:p14="http://schemas.microsoft.com/office/powerpoint/2010/main" val="2809433777"/>
-      </p:ext>
-    </p:extLst>
-  </p:cSld>
-  <p:clrMapOvr>
-    <a:masterClrMapping/>
-  </p:clrMapOvr>
-</p:sld>
-</file>
-
-<file path=ppt/slides/slide41.xml><?xml version="1.0" encoding="utf-8"?>
-<p:sld xmlns:a="http://schemas.openxmlformats.org/drawingml/2006/main" xmlns:r="http://schemas.openxmlformats.org/officeDocument/2006/relationships" xmlns:p="http://schemas.openxmlformats.org/presentationml/2006/main">
-  <p:cSld>
-    <p:spTree>
-      <p:nvGrpSpPr>
-        <p:cNvPr id="1" name=""/>
-        <p:cNvGrpSpPr/>
-        <p:nvPr/>
-      </p:nvGrpSpPr>
-      <p:grpSpPr>
-        <a:xfrm>
-          <a:off x="0" y="0"/>
-          <a:ext cx="0" cy="0"/>
-          <a:chOff x="0" y="0"/>
-          <a:chExt cx="0" cy="0"/>
-        </a:xfrm>
-      </p:grpSpPr>
-      <p:sp>
-        <p:nvSpPr>
-          <p:cNvPr id="2" name="Title 1">
-            <a:extLst>
-              <a:ext uri="{FF2B5EF4-FFF2-40B4-BE49-F238E27FC236}">
                 <a16:creationId xmlns:a16="http://schemas.microsoft.com/office/drawing/2014/main" id="{6B41B455-ADD2-7B13-55D5-B7A83EDB5F55}"/>
               </a:ext>
             </a:extLst>
@@ -26940,7 +26327,7 @@
           <a:p>
             <a:fld id="{4640CEBA-4671-DC49-AB8F-1FDE9C89258E}" type="slidenum">
               <a:rPr lang="en-DE" smtClean="0"/>
-              <a:t>41</a:t>
+              <a:t>40</a:t>
             </a:fld>
             <a:endParaRPr lang="en-DE"/>
           </a:p>
@@ -27270,143 +26657,6 @@
       </p:grpSpPr>
       <p:sp>
         <p:nvSpPr>
-          <p:cNvPr id="2" name="Titel 1">
-            <a:extLst>
-              <a:ext uri="{FF2B5EF4-FFF2-40B4-BE49-F238E27FC236}">
-                <a16:creationId xmlns:a16="http://schemas.microsoft.com/office/drawing/2014/main" id="{937B849C-21FC-D2C5-4A4E-6EF8D8FDEBFE}"/>
-              </a:ext>
-            </a:extLst>
-          </p:cNvPr>
-          <p:cNvSpPr>
-            <a:spLocks noGrp="1"/>
-          </p:cNvSpPr>
-          <p:nvPr>
-            <p:ph type="title"/>
-          </p:nvPr>
-        </p:nvSpPr>
-        <p:spPr/>
-        <p:txBody>
-          <a:bodyPr/>
-          <a:lstStyle/>
-          <a:p>
-            <a:r>
-              <a:rPr lang="de-DE" dirty="0" err="1"/>
-              <a:t>Prediction</a:t>
-            </a:r>
-            <a:r>
-              <a:rPr lang="de-DE" dirty="0"/>
-              <a:t> </a:t>
-            </a:r>
-            <a:r>
-              <a:rPr lang="de-DE" dirty="0" err="1"/>
-              <a:t>vs</a:t>
-            </a:r>
-            <a:r>
-              <a:rPr lang="de-DE" dirty="0"/>
-              <a:t> </a:t>
-            </a:r>
-            <a:r>
-              <a:rPr lang="de-DE" dirty="0" err="1"/>
-              <a:t>Causal</a:t>
-            </a:r>
-            <a:r>
-              <a:rPr lang="de-DE" dirty="0"/>
-              <a:t> </a:t>
-            </a:r>
-            <a:r>
-              <a:rPr lang="de-DE" dirty="0" err="1"/>
-              <a:t>Inference</a:t>
-            </a:r>
-            <a:endParaRPr lang="de-DE" dirty="0"/>
-          </a:p>
-        </p:txBody>
-      </p:sp>
-      <p:sp>
-        <p:nvSpPr>
-          <p:cNvPr id="3" name="Inhaltsplatzhalter 2">
-            <a:extLst>
-              <a:ext uri="{FF2B5EF4-FFF2-40B4-BE49-F238E27FC236}">
-                <a16:creationId xmlns:a16="http://schemas.microsoft.com/office/drawing/2014/main" id="{C3FA29EC-AE42-B22F-5180-A08F3F912005}"/>
-              </a:ext>
-            </a:extLst>
-          </p:cNvPr>
-          <p:cNvSpPr>
-            <a:spLocks noGrp="1"/>
-          </p:cNvSpPr>
-          <p:nvPr>
-            <p:ph idx="1"/>
-          </p:nvPr>
-        </p:nvSpPr>
-        <p:spPr/>
-        <p:txBody>
-          <a:bodyPr/>
-          <a:lstStyle/>
-          <a:p>
-            <a:endParaRPr lang="de-DE"/>
-          </a:p>
-        </p:txBody>
-      </p:sp>
-      <p:sp>
-        <p:nvSpPr>
-          <p:cNvPr id="4" name="Foliennummernplatzhalter 3">
-            <a:extLst>
-              <a:ext uri="{FF2B5EF4-FFF2-40B4-BE49-F238E27FC236}">
-                <a16:creationId xmlns:a16="http://schemas.microsoft.com/office/drawing/2014/main" id="{768765CE-96C2-949F-9907-EB1D51B11F18}"/>
-              </a:ext>
-            </a:extLst>
-          </p:cNvPr>
-          <p:cNvSpPr>
-            <a:spLocks noGrp="1"/>
-          </p:cNvSpPr>
-          <p:nvPr>
-            <p:ph type="sldNum" sz="quarter" idx="12"/>
-          </p:nvPr>
-        </p:nvSpPr>
-        <p:spPr/>
-        <p:txBody>
-          <a:bodyPr/>
-          <a:lstStyle/>
-          <a:p>
-            <a:fld id="{3D4C94FE-FF23-4504-88E9-14D481113291}" type="slidenum">
-              <a:rPr lang="en-GB" smtClean="0"/>
-              <a:t>5</a:t>
-            </a:fld>
-            <a:endParaRPr lang="en-GB"/>
-          </a:p>
-        </p:txBody>
-      </p:sp>
-    </p:spTree>
-    <p:extLst>
-      <p:ext uri="{BB962C8B-B14F-4D97-AF65-F5344CB8AC3E}">
-        <p14:creationId xmlns:p14="http://schemas.microsoft.com/office/powerpoint/2010/main" val="395640134"/>
-      </p:ext>
-    </p:extLst>
-  </p:cSld>
-  <p:clrMapOvr>
-    <a:masterClrMapping/>
-  </p:clrMapOvr>
-</p:sld>
-</file>
-
-<file path=ppt/slides/slide6.xml><?xml version="1.0" encoding="utf-8"?>
-<p:sld xmlns:a="http://schemas.openxmlformats.org/drawingml/2006/main" xmlns:r="http://schemas.openxmlformats.org/officeDocument/2006/relationships" xmlns:p="http://schemas.openxmlformats.org/presentationml/2006/main">
-  <p:cSld>
-    <p:spTree>
-      <p:nvGrpSpPr>
-        <p:cNvPr id="1" name=""/>
-        <p:cNvGrpSpPr/>
-        <p:nvPr/>
-      </p:nvGrpSpPr>
-      <p:grpSpPr>
-        <a:xfrm>
-          <a:off x="0" y="0"/>
-          <a:ext cx="0" cy="0"/>
-          <a:chOff x="0" y="0"/>
-          <a:chExt cx="0" cy="0"/>
-        </a:xfrm>
-      </p:grpSpPr>
-      <p:sp>
-        <p:nvSpPr>
           <p:cNvPr id="2" name="Title 1">
             <a:extLst>
               <a:ext uri="{FF2B5EF4-FFF2-40B4-BE49-F238E27FC236}">
@@ -27605,7 +26855,7 @@
           <a:p>
             <a:fld id="{60A26886-2117-0949-B8A5-D47461AC229C}" type="slidenum">
               <a:rPr lang="en-DE" smtClean="0"/>
-              <a:t>6</a:t>
+              <a:t>5</a:t>
             </a:fld>
             <a:endParaRPr lang="en-DE"/>
           </a:p>
@@ -27624,7 +26874,7 @@
 </p:sld>
 </file>
 
-<file path=ppt/slides/slide7.xml><?xml version="1.0" encoding="utf-8"?>
+<file path=ppt/slides/slide6.xml><?xml version="1.0" encoding="utf-8"?>
 <p:sld xmlns:a="http://schemas.openxmlformats.org/drawingml/2006/main" xmlns:r="http://schemas.openxmlformats.org/officeDocument/2006/relationships" xmlns:p="http://schemas.openxmlformats.org/presentationml/2006/main">
   <p:cSld>
     <p:spTree>
@@ -28510,7 +27760,7 @@
           <a:p>
             <a:fld id="{60A26886-2117-0949-B8A5-D47461AC229C}" type="slidenum">
               <a:rPr lang="en-DE" smtClean="0"/>
-              <a:t>7</a:t>
+              <a:t>6</a:t>
             </a:fld>
             <a:endParaRPr lang="en-DE"/>
           </a:p>
@@ -28520,6 +27770,628 @@
     <p:extLst>
       <p:ext uri="{BB962C8B-B14F-4D97-AF65-F5344CB8AC3E}">
         <p14:creationId xmlns:p14="http://schemas.microsoft.com/office/powerpoint/2010/main" val="1496394822"/>
+      </p:ext>
+    </p:extLst>
+  </p:cSld>
+  <p:clrMapOvr>
+    <a:masterClrMapping/>
+  </p:clrMapOvr>
+</p:sld>
+</file>
+
+<file path=ppt/slides/slide7.xml><?xml version="1.0" encoding="utf-8"?>
+<p:sld xmlns:a="http://schemas.openxmlformats.org/drawingml/2006/main" xmlns:r="http://schemas.openxmlformats.org/officeDocument/2006/relationships" xmlns:p="http://schemas.openxmlformats.org/presentationml/2006/main">
+  <p:cSld>
+    <p:spTree>
+      <p:nvGrpSpPr>
+        <p:cNvPr id="1" name=""/>
+        <p:cNvGrpSpPr/>
+        <p:nvPr/>
+      </p:nvGrpSpPr>
+      <p:grpSpPr>
+        <a:xfrm>
+          <a:off x="0" y="0"/>
+          <a:ext cx="0" cy="0"/>
+          <a:chOff x="0" y="0"/>
+          <a:chExt cx="0" cy="0"/>
+        </a:xfrm>
+      </p:grpSpPr>
+      <p:sp>
+        <p:nvSpPr>
+          <p:cNvPr id="2" name="Title 1">
+            <a:extLst>
+              <a:ext uri="{FF2B5EF4-FFF2-40B4-BE49-F238E27FC236}">
+                <a16:creationId xmlns:a16="http://schemas.microsoft.com/office/drawing/2014/main" id="{44F538E2-08DB-DFF2-CD1B-D0B792963BC6}"/>
+              </a:ext>
+            </a:extLst>
+          </p:cNvPr>
+          <p:cNvSpPr>
+            <a:spLocks noGrp="1"/>
+          </p:cNvSpPr>
+          <p:nvPr>
+            <p:ph type="title"/>
+          </p:nvPr>
+        </p:nvSpPr>
+        <p:spPr/>
+        <p:txBody>
+          <a:bodyPr/>
+          <a:lstStyle/>
+          <a:p>
+            <a:r>
+              <a:rPr lang="en-DE" dirty="0"/>
+              <a:t>Causality and ML</a:t>
+            </a:r>
+          </a:p>
+        </p:txBody>
+      </p:sp>
+      <p:sp>
+        <p:nvSpPr>
+          <p:cNvPr id="3" name="Content Placeholder 2">
+            <a:extLst>
+              <a:ext uri="{FF2B5EF4-FFF2-40B4-BE49-F238E27FC236}">
+                <a16:creationId xmlns:a16="http://schemas.microsoft.com/office/drawing/2014/main" id="{55062C9D-80EF-C5B4-D5CF-0A5485929211}"/>
+              </a:ext>
+            </a:extLst>
+          </p:cNvPr>
+          <p:cNvSpPr>
+            <a:spLocks noGrp="1"/>
+          </p:cNvSpPr>
+          <p:nvPr>
+            <p:ph idx="1"/>
+          </p:nvPr>
+        </p:nvSpPr>
+        <p:spPr/>
+        <p:txBody>
+          <a:bodyPr>
+            <a:normAutofit lnSpcReduction="10000"/>
+          </a:bodyPr>
+          <a:lstStyle/>
+          <a:p>
+            <a:pPr marL="0" indent="0">
+              <a:buNone/>
+            </a:pPr>
+            <a:r>
+              <a:rPr lang="de-DE" sz="2600" dirty="0" err="1"/>
+              <a:t>causation</a:t>
+            </a:r>
+            <a:r>
+              <a:rPr lang="de-DE" sz="2600" dirty="0"/>
+              <a:t> </a:t>
+            </a:r>
+            <a:r>
+              <a:rPr lang="de-DE" sz="2600" dirty="0" err="1"/>
+              <a:t>as</a:t>
+            </a:r>
+            <a:r>
+              <a:rPr lang="de-DE" sz="2600" dirty="0"/>
+              <a:t> </a:t>
+            </a:r>
+            <a:r>
+              <a:rPr lang="de-DE" sz="2600" dirty="0" err="1"/>
+              <a:t>addition</a:t>
+            </a:r>
+            <a:r>
+              <a:rPr lang="de-DE" sz="2600" dirty="0"/>
+              <a:t> </a:t>
+            </a:r>
+            <a:r>
+              <a:rPr lang="de-DE" sz="2600" dirty="0" err="1"/>
+              <a:t>to</a:t>
+            </a:r>
+            <a:r>
+              <a:rPr lang="de-DE" sz="2600" dirty="0"/>
+              <a:t> ML: synonym </a:t>
+            </a:r>
+            <a:r>
+              <a:rPr lang="de-DE" sz="2600" dirty="0" err="1"/>
+              <a:t>for</a:t>
+            </a:r>
+            <a:r>
+              <a:rPr lang="de-DE" sz="2600" dirty="0"/>
+              <a:t> </a:t>
+            </a:r>
+            <a:r>
+              <a:rPr lang="de-DE" sz="2600" dirty="0" err="1"/>
+              <a:t>understanding</a:t>
+            </a:r>
+            <a:endParaRPr lang="de-DE" sz="2600" dirty="0"/>
+          </a:p>
+          <a:p>
+            <a:r>
+              <a:rPr lang="de-DE" sz="2600" dirty="0" err="1"/>
+              <a:t>no</a:t>
+            </a:r>
+            <a:r>
+              <a:rPr lang="de-DE" sz="2600" dirty="0"/>
+              <a:t> ML </a:t>
+            </a:r>
+            <a:r>
+              <a:rPr lang="de-DE" sz="2600" dirty="0" err="1"/>
+              <a:t>method</a:t>
+            </a:r>
+            <a:r>
+              <a:rPr lang="de-DE" sz="2600" dirty="0"/>
+              <a:t> </a:t>
+            </a:r>
+            <a:r>
+              <a:rPr lang="de-DE" sz="2600" dirty="0" err="1"/>
+              <a:t>can</a:t>
+            </a:r>
+            <a:r>
+              <a:rPr lang="de-DE" sz="2600" dirty="0"/>
+              <a:t> </a:t>
+            </a:r>
+            <a:r>
+              <a:rPr lang="de-DE" sz="2600" dirty="0" err="1"/>
+              <a:t>understand</a:t>
+            </a:r>
+            <a:r>
+              <a:rPr lang="de-DE" sz="2600" dirty="0"/>
+              <a:t> </a:t>
+            </a:r>
+            <a:r>
+              <a:rPr lang="de-DE" sz="2600" dirty="0" err="1"/>
+              <a:t>causes</a:t>
+            </a:r>
+            <a:r>
+              <a:rPr lang="de-DE" sz="2600" dirty="0"/>
+              <a:t> and </a:t>
+            </a:r>
+            <a:r>
+              <a:rPr lang="de-DE" sz="2600" dirty="0" err="1"/>
+              <a:t>effects</a:t>
+            </a:r>
+            <a:r>
+              <a:rPr lang="de-DE" sz="2600" dirty="0"/>
+              <a:t> </a:t>
+            </a:r>
+            <a:r>
+              <a:rPr lang="de-DE" sz="2600" dirty="0" err="1"/>
+              <a:t>from</a:t>
+            </a:r>
+            <a:r>
+              <a:rPr lang="de-DE" sz="2600" dirty="0"/>
+              <a:t> </a:t>
+            </a:r>
+            <a:r>
+              <a:rPr lang="de-DE" sz="2600" dirty="0" err="1"/>
+              <a:t>data</a:t>
+            </a:r>
+            <a:r>
+              <a:rPr lang="de-DE" sz="2600" dirty="0"/>
+              <a:t> (</a:t>
+            </a:r>
+            <a:r>
+              <a:rPr lang="de-DE" sz="2600" dirty="0" err="1"/>
+              <a:t>statistical</a:t>
+            </a:r>
+            <a:r>
+              <a:rPr lang="de-DE" sz="2600" dirty="0"/>
+              <a:t> </a:t>
+            </a:r>
+            <a:r>
+              <a:rPr lang="de-DE" sz="2600" dirty="0" err="1"/>
+              <a:t>dependencies</a:t>
+            </a:r>
+            <a:r>
+              <a:rPr lang="de-DE" sz="2600" dirty="0"/>
+              <a:t>) </a:t>
+            </a:r>
+            <a:r>
+              <a:rPr lang="de-DE" sz="2600" dirty="0" err="1"/>
+              <a:t>alone</a:t>
+            </a:r>
+            <a:r>
+              <a:rPr lang="de-DE" sz="2600" dirty="0"/>
+              <a:t> </a:t>
+            </a:r>
+            <a:r>
+              <a:rPr lang="de-DE" sz="2600" dirty="0">
+                <a:sym typeface="Wingdings" pitchFamily="2" charset="2"/>
+              </a:rPr>
+              <a:t> </a:t>
+            </a:r>
+            <a:r>
+              <a:rPr lang="de-DE" sz="2600" dirty="0" err="1"/>
+              <a:t>need</a:t>
+            </a:r>
+            <a:r>
+              <a:rPr lang="de-DE" sz="2600" dirty="0"/>
+              <a:t> </a:t>
+            </a:r>
+            <a:r>
+              <a:rPr lang="de-DE" sz="2600" dirty="0" err="1"/>
+              <a:t>for</a:t>
+            </a:r>
+            <a:r>
+              <a:rPr lang="de-DE" sz="2600" dirty="0"/>
+              <a:t> </a:t>
+            </a:r>
+            <a:r>
+              <a:rPr lang="de-DE" sz="2600" dirty="0" err="1"/>
+              <a:t>causal</a:t>
+            </a:r>
+            <a:r>
+              <a:rPr lang="de-DE" sz="2600" dirty="0"/>
+              <a:t> </a:t>
+            </a:r>
+            <a:r>
+              <a:rPr lang="de-DE" sz="2600" dirty="0" err="1"/>
+              <a:t>assumptions</a:t>
+            </a:r>
+            <a:r>
+              <a:rPr lang="de-DE" sz="2600" dirty="0"/>
+              <a:t> (</a:t>
+            </a:r>
+            <a:r>
+              <a:rPr lang="de-DE" sz="2600" dirty="0" err="1"/>
+              <a:t>causal</a:t>
+            </a:r>
+            <a:r>
+              <a:rPr lang="de-DE" sz="2600" dirty="0"/>
+              <a:t> </a:t>
+            </a:r>
+            <a:r>
+              <a:rPr lang="de-DE" sz="2600" dirty="0" err="1"/>
+              <a:t>model</a:t>
+            </a:r>
+            <a:r>
+              <a:rPr lang="de-DE" sz="2600" dirty="0"/>
+              <a:t>)</a:t>
+            </a:r>
+          </a:p>
+          <a:p>
+            <a:r>
+              <a:rPr lang="de-DE" sz="2600" dirty="0" err="1"/>
+              <a:t>examples</a:t>
+            </a:r>
+            <a:r>
+              <a:rPr lang="de-DE" sz="2600" dirty="0"/>
+              <a:t>: </a:t>
+            </a:r>
+            <a:r>
+              <a:rPr lang="de-DE" sz="2600" dirty="0" err="1"/>
+              <a:t>transportability</a:t>
+            </a:r>
+            <a:r>
+              <a:rPr lang="de-DE" sz="2600" dirty="0"/>
+              <a:t> and </a:t>
+            </a:r>
+            <a:r>
+              <a:rPr lang="de-DE" sz="2600" dirty="0" err="1"/>
+              <a:t>robustness</a:t>
+            </a:r>
+            <a:r>
+              <a:rPr lang="de-DE" sz="2600" dirty="0"/>
+              <a:t> </a:t>
+            </a:r>
+            <a:r>
+              <a:rPr lang="de-DE" sz="2600" dirty="0" err="1"/>
+              <a:t>of</a:t>
+            </a:r>
+            <a:r>
+              <a:rPr lang="de-DE" sz="2600" dirty="0"/>
+              <a:t> </a:t>
+            </a:r>
+            <a:r>
+              <a:rPr lang="de-DE" sz="2600" dirty="0" err="1"/>
+              <a:t>models</a:t>
+            </a:r>
+            <a:r>
+              <a:rPr lang="de-DE" sz="2600" dirty="0"/>
+              <a:t> (</a:t>
+            </a:r>
+            <a:r>
+              <a:rPr lang="de-DE" sz="2600" dirty="0" err="1"/>
+              <a:t>generalization</a:t>
+            </a:r>
+            <a:r>
+              <a:rPr lang="de-DE" sz="2600" dirty="0"/>
+              <a:t>), </a:t>
+            </a:r>
+            <a:r>
+              <a:rPr lang="de-DE" sz="2600" dirty="0" err="1"/>
+              <a:t>handling</a:t>
+            </a:r>
+            <a:r>
+              <a:rPr lang="de-DE" sz="2600" dirty="0"/>
+              <a:t> </a:t>
+            </a:r>
+            <a:r>
+              <a:rPr lang="de-DE" sz="2600" dirty="0" err="1"/>
+              <a:t>of</a:t>
+            </a:r>
+            <a:r>
+              <a:rPr lang="de-DE" sz="2600" dirty="0"/>
+              <a:t> </a:t>
+            </a:r>
+            <a:r>
+              <a:rPr lang="de-DE" sz="2600" dirty="0" err="1"/>
+              <a:t>missing</a:t>
+            </a:r>
+            <a:r>
+              <a:rPr lang="de-DE" sz="2600" dirty="0"/>
+              <a:t> </a:t>
+            </a:r>
+            <a:r>
+              <a:rPr lang="de-DE" sz="2600" dirty="0" err="1"/>
+              <a:t>data</a:t>
+            </a:r>
+            <a:r>
+              <a:rPr lang="de-DE" sz="2600" dirty="0"/>
+              <a:t>, </a:t>
+            </a:r>
+            <a:r>
+              <a:rPr lang="de-DE" sz="2600" dirty="0" err="1"/>
+              <a:t>causal</a:t>
+            </a:r>
+            <a:r>
+              <a:rPr lang="de-DE" sz="2600" dirty="0"/>
+              <a:t> </a:t>
+            </a:r>
+            <a:r>
+              <a:rPr lang="de-DE" sz="2600" dirty="0" err="1"/>
+              <a:t>explainability</a:t>
+            </a:r>
+            <a:endParaRPr lang="de-DE" sz="2600" dirty="0"/>
+          </a:p>
+          <a:p>
+            <a:pPr marL="0" indent="0">
+              <a:buNone/>
+            </a:pPr>
+            <a:r>
+              <a:rPr lang="de-DE" sz="2600" dirty="0"/>
+              <a:t>(</a:t>
+            </a:r>
+            <a:r>
+              <a:rPr lang="de-DE" sz="2600" dirty="0" err="1"/>
+              <a:t>see</a:t>
+            </a:r>
+            <a:r>
+              <a:rPr lang="de-DE" sz="2600" dirty="0"/>
+              <a:t> </a:t>
+            </a:r>
+            <a:r>
+              <a:rPr lang="de-DE" sz="2600" dirty="0">
+                <a:hlinkClick r:id="rId2"/>
+              </a:rPr>
+              <a:t>Pearl</a:t>
+            </a:r>
+            <a:r>
+              <a:rPr lang="de-DE" sz="2600" dirty="0"/>
+              <a:t> and </a:t>
+            </a:r>
+            <a:r>
+              <a:rPr lang="de-DE" sz="2600" dirty="0" err="1"/>
+              <a:t>Schölkopf</a:t>
+            </a:r>
+            <a:r>
+              <a:rPr lang="de-DE" sz="2600" dirty="0"/>
+              <a:t> </a:t>
+            </a:r>
+            <a:r>
+              <a:rPr lang="de-DE" sz="2600" dirty="0">
+                <a:hlinkClick r:id="rId3"/>
+              </a:rPr>
+              <a:t>1</a:t>
+            </a:r>
+            <a:r>
+              <a:rPr lang="de-DE" sz="2600" dirty="0"/>
+              <a:t> </a:t>
+            </a:r>
+            <a:r>
+              <a:rPr lang="de-DE" sz="2600" dirty="0">
+                <a:hlinkClick r:id="rId4"/>
+              </a:rPr>
+              <a:t>2</a:t>
+            </a:r>
+            <a:r>
+              <a:rPr lang="de-DE" sz="2600" dirty="0"/>
+              <a:t> </a:t>
+            </a:r>
+            <a:r>
+              <a:rPr lang="de-DE" sz="2600" dirty="0">
+                <a:hlinkClick r:id="rId5"/>
+              </a:rPr>
+              <a:t>3</a:t>
+            </a:r>
+            <a:r>
+              <a:rPr lang="de-DE" sz="2600" dirty="0"/>
+              <a:t>)</a:t>
+            </a:r>
+          </a:p>
+          <a:p>
+            <a:pPr marL="0" indent="0">
+              <a:buNone/>
+            </a:pPr>
+            <a:endParaRPr lang="de-DE" sz="2600" dirty="0"/>
+          </a:p>
+          <a:p>
+            <a:pPr marL="0" indent="0">
+              <a:buNone/>
+            </a:pPr>
+            <a:r>
+              <a:rPr lang="de-DE" sz="2600" dirty="0"/>
+              <a:t>but also: ML </a:t>
+            </a:r>
+            <a:r>
+              <a:rPr lang="de-DE" sz="2600" dirty="0" err="1"/>
+              <a:t>as</a:t>
+            </a:r>
+            <a:r>
+              <a:rPr lang="de-DE" sz="2600" dirty="0"/>
+              <a:t> </a:t>
+            </a:r>
+            <a:r>
+              <a:rPr lang="de-DE" sz="2600" dirty="0" err="1"/>
+              <a:t>help</a:t>
+            </a:r>
+            <a:r>
+              <a:rPr lang="de-DE" sz="2600" dirty="0"/>
+              <a:t> </a:t>
+            </a:r>
+            <a:r>
+              <a:rPr lang="de-DE" sz="2600" dirty="0" err="1"/>
+              <a:t>for</a:t>
+            </a:r>
+            <a:r>
+              <a:rPr lang="de-DE" sz="2600" dirty="0"/>
+              <a:t> </a:t>
+            </a:r>
+            <a:r>
+              <a:rPr lang="de-DE" sz="2600" dirty="0" err="1"/>
+              <a:t>causal</a:t>
+            </a:r>
+            <a:r>
+              <a:rPr lang="de-DE" sz="2600" dirty="0"/>
+              <a:t> </a:t>
+            </a:r>
+            <a:r>
+              <a:rPr lang="de-DE" sz="2600" dirty="0" err="1"/>
+              <a:t>discovery</a:t>
+            </a:r>
+            <a:r>
+              <a:rPr lang="de-DE" sz="2600" dirty="0"/>
+              <a:t> and </a:t>
+            </a:r>
+            <a:r>
+              <a:rPr lang="de-DE" sz="2600" dirty="0" err="1"/>
+              <a:t>inference</a:t>
+            </a:r>
+            <a:endParaRPr lang="de-DE" sz="2600" dirty="0"/>
+          </a:p>
+          <a:p>
+            <a:r>
+              <a:rPr lang="de-DE" sz="2600" dirty="0" err="1"/>
+              <a:t>counterfactuls</a:t>
+            </a:r>
+            <a:r>
+              <a:rPr lang="de-DE" sz="2600" dirty="0"/>
+              <a:t> (potential </a:t>
+            </a:r>
+            <a:r>
+              <a:rPr lang="de-DE" sz="2600" dirty="0" err="1"/>
+              <a:t>outcomes</a:t>
+            </a:r>
+            <a:r>
+              <a:rPr lang="de-DE" sz="2600" dirty="0"/>
+              <a:t>) </a:t>
+            </a:r>
+            <a:r>
+              <a:rPr lang="de-DE" sz="2600" dirty="0" err="1"/>
+              <a:t>need</a:t>
+            </a:r>
+            <a:r>
+              <a:rPr lang="de-DE" sz="2600" dirty="0"/>
+              <a:t> </a:t>
+            </a:r>
+            <a:r>
+              <a:rPr lang="de-DE" sz="2600" dirty="0" err="1"/>
+              <a:t>matching</a:t>
+            </a:r>
+            <a:r>
+              <a:rPr lang="de-DE" sz="2600" dirty="0"/>
+              <a:t> </a:t>
+            </a:r>
+            <a:r>
+              <a:rPr lang="de-DE" sz="2600" dirty="0" err="1"/>
+              <a:t>of</a:t>
+            </a:r>
+            <a:r>
+              <a:rPr lang="de-DE" sz="2600" dirty="0"/>
+              <a:t> individual </a:t>
+            </a:r>
+            <a:r>
+              <a:rPr lang="de-DE" sz="2600" dirty="0" err="1"/>
+              <a:t>cases</a:t>
+            </a:r>
+            <a:endParaRPr lang="de-DE" sz="2600" dirty="0"/>
+          </a:p>
+          <a:p>
+            <a:r>
+              <a:rPr lang="de-DE" sz="2600" dirty="0" err="1"/>
+              <a:t>adjusting</a:t>
+            </a:r>
+            <a:r>
+              <a:rPr lang="de-DE" sz="2600" dirty="0"/>
+              <a:t> </a:t>
+            </a:r>
+            <a:r>
+              <a:rPr lang="de-DE" sz="2600" dirty="0" err="1"/>
+              <a:t>for</a:t>
+            </a:r>
+            <a:r>
+              <a:rPr lang="de-DE" sz="2600" dirty="0"/>
+              <a:t> </a:t>
+            </a:r>
+            <a:r>
+              <a:rPr lang="de-DE" sz="2600" dirty="0" err="1"/>
+              <a:t>many</a:t>
+            </a:r>
+            <a:r>
+              <a:rPr lang="de-DE" sz="2600" dirty="0"/>
+              <a:t> </a:t>
+            </a:r>
+            <a:r>
+              <a:rPr lang="de-DE" sz="2600" dirty="0" err="1"/>
+              <a:t>confounders</a:t>
+            </a:r>
+            <a:r>
+              <a:rPr lang="de-DE" sz="2600" dirty="0"/>
+              <a:t> (e.g., </a:t>
+            </a:r>
+            <a:r>
+              <a:rPr lang="de-DE" sz="2600" dirty="0" err="1"/>
+              <a:t>propensity</a:t>
+            </a:r>
+            <a:r>
+              <a:rPr lang="de-DE" sz="2600" dirty="0"/>
+              <a:t> </a:t>
+            </a:r>
+            <a:r>
+              <a:rPr lang="de-DE" sz="2600" dirty="0" err="1"/>
+              <a:t>scores</a:t>
+            </a:r>
+            <a:r>
+              <a:rPr lang="de-DE" sz="2600" dirty="0"/>
+              <a:t>)</a:t>
+            </a:r>
+          </a:p>
+        </p:txBody>
+      </p:sp>
+      <p:sp>
+        <p:nvSpPr>
+          <p:cNvPr id="4" name="Slide Number Placeholder 3">
+            <a:extLst>
+              <a:ext uri="{FF2B5EF4-FFF2-40B4-BE49-F238E27FC236}">
+                <a16:creationId xmlns:a16="http://schemas.microsoft.com/office/drawing/2014/main" id="{EF52D213-F9E5-28C2-912C-05B2E6E7CFF6}"/>
+              </a:ext>
+            </a:extLst>
+          </p:cNvPr>
+          <p:cNvSpPr>
+            <a:spLocks noGrp="1"/>
+          </p:cNvSpPr>
+          <p:nvPr>
+            <p:ph type="sldNum" sz="quarter" idx="12"/>
+          </p:nvPr>
+        </p:nvSpPr>
+        <p:spPr/>
+        <p:txBody>
+          <a:bodyPr/>
+          <a:lstStyle/>
+          <a:p>
+            <a:fld id="{60A26886-2117-0949-B8A5-D47461AC229C}" type="slidenum">
+              <a:rPr lang="en-DE" smtClean="0"/>
+              <a:t>7</a:t>
+            </a:fld>
+            <a:endParaRPr lang="en-DE"/>
+          </a:p>
+        </p:txBody>
+      </p:sp>
+    </p:spTree>
+    <p:extLst>
+      <p:ext uri="{BB962C8B-B14F-4D97-AF65-F5344CB8AC3E}">
+        <p14:creationId xmlns:p14="http://schemas.microsoft.com/office/powerpoint/2010/main" val="1234435983"/>
       </p:ext>
     </p:extLst>
   </p:cSld>
@@ -28548,10 +28420,10 @@
       </p:grpSpPr>
       <p:sp>
         <p:nvSpPr>
-          <p:cNvPr id="2" name="Title 1">
-            <a:extLst>
-              <a:ext uri="{FF2B5EF4-FFF2-40B4-BE49-F238E27FC236}">
-                <a16:creationId xmlns:a16="http://schemas.microsoft.com/office/drawing/2014/main" id="{44F538E2-08DB-DFF2-CD1B-D0B792963BC6}"/>
+          <p:cNvPr id="2" name="Titel 1">
+            <a:extLst>
+              <a:ext uri="{FF2B5EF4-FFF2-40B4-BE49-F238E27FC236}">
+                <a16:creationId xmlns:a16="http://schemas.microsoft.com/office/drawing/2014/main" id="{92812DB9-CA11-C408-B3C4-CFC54D177F3C}"/>
               </a:ext>
             </a:extLst>
           </p:cNvPr>
@@ -28568,18 +28440,22 @@
           <a:lstStyle/>
           <a:p>
             <a:r>
-              <a:rPr lang="en-DE" dirty="0"/>
-              <a:t>Causality and ML</a:t>
+              <a:rPr lang="de-DE" dirty="0" err="1"/>
+              <a:t>Causal</a:t>
+            </a:r>
+            <a:r>
+              <a:rPr lang="de-DE" dirty="0"/>
+              <a:t> Graphs and DAGs</a:t>
             </a:r>
           </a:p>
         </p:txBody>
       </p:sp>
       <p:sp>
         <p:nvSpPr>
-          <p:cNvPr id="3" name="Content Placeholder 2">
-            <a:extLst>
-              <a:ext uri="{FF2B5EF4-FFF2-40B4-BE49-F238E27FC236}">
-                <a16:creationId xmlns:a16="http://schemas.microsoft.com/office/drawing/2014/main" id="{55062C9D-80EF-C5B4-D5CF-0A5485929211}"/>
+          <p:cNvPr id="3" name="Inhaltsplatzhalter 2">
+            <a:extLst>
+              <a:ext uri="{FF2B5EF4-FFF2-40B4-BE49-F238E27FC236}">
+                <a16:creationId xmlns:a16="http://schemas.microsoft.com/office/drawing/2014/main" id="{1B002756-16F1-782E-F388-AD71B5FA4D7E}"/>
               </a:ext>
             </a:extLst>
           </p:cNvPr>
@@ -28592,529 +28468,19 @@
         </p:nvSpPr>
         <p:spPr/>
         <p:txBody>
-          <a:bodyPr>
-            <a:normAutofit lnSpcReduction="10000"/>
-          </a:bodyPr>
+          <a:bodyPr/>
           <a:lstStyle/>
           <a:p>
-            <a:pPr marL="0" indent="0">
-              <a:buNone/>
-            </a:pPr>
-            <a:r>
-              <a:rPr lang="de-DE" sz="2600" dirty="0" err="1"/>
-              <a:t>causation</a:t>
-            </a:r>
-            <a:r>
-              <a:rPr lang="de-DE" sz="2600" dirty="0"/>
-              <a:t> </a:t>
-            </a:r>
-            <a:r>
-              <a:rPr lang="de-DE" sz="2600" dirty="0" err="1"/>
-              <a:t>as</a:t>
-            </a:r>
-            <a:r>
-              <a:rPr lang="de-DE" sz="2600" dirty="0"/>
-              <a:t> </a:t>
-            </a:r>
-            <a:r>
-              <a:rPr lang="de-DE" sz="2600" dirty="0" err="1"/>
-              <a:t>addition</a:t>
-            </a:r>
-            <a:r>
-              <a:rPr lang="de-DE" sz="2600" dirty="0"/>
-              <a:t> </a:t>
-            </a:r>
-            <a:r>
-              <a:rPr lang="de-DE" sz="2600" dirty="0" err="1"/>
-              <a:t>to</a:t>
-            </a:r>
-            <a:r>
-              <a:rPr lang="de-DE" sz="2600" dirty="0"/>
-              <a:t> ML: synonym </a:t>
-            </a:r>
-            <a:r>
-              <a:rPr lang="de-DE" sz="2600" dirty="0" err="1"/>
-              <a:t>for</a:t>
-            </a:r>
-            <a:r>
-              <a:rPr lang="de-DE" sz="2600" dirty="0"/>
-              <a:t> </a:t>
-            </a:r>
-            <a:r>
-              <a:rPr lang="de-DE" sz="2600" dirty="0" err="1"/>
-              <a:t>understanding</a:t>
-            </a:r>
-            <a:endParaRPr lang="de-DE" sz="2600" dirty="0"/>
-          </a:p>
-          <a:p>
-            <a:r>
-              <a:rPr lang="de-DE" sz="2600" dirty="0" err="1"/>
-              <a:t>no</a:t>
-            </a:r>
-            <a:r>
-              <a:rPr lang="de-DE" sz="2600" dirty="0"/>
-              <a:t> ML </a:t>
-            </a:r>
-            <a:r>
-              <a:rPr lang="de-DE" sz="2600" dirty="0" err="1"/>
-              <a:t>method</a:t>
-            </a:r>
-            <a:r>
-              <a:rPr lang="de-DE" sz="2600" dirty="0"/>
-              <a:t> </a:t>
-            </a:r>
-            <a:r>
-              <a:rPr lang="de-DE" sz="2600" dirty="0" err="1"/>
-              <a:t>can</a:t>
-            </a:r>
-            <a:r>
-              <a:rPr lang="de-DE" sz="2600" dirty="0"/>
-              <a:t> </a:t>
-            </a:r>
-            <a:r>
-              <a:rPr lang="de-DE" sz="2600" dirty="0" err="1"/>
-              <a:t>understand</a:t>
-            </a:r>
-            <a:r>
-              <a:rPr lang="de-DE" sz="2600" dirty="0"/>
-              <a:t> </a:t>
-            </a:r>
-            <a:r>
-              <a:rPr lang="de-DE" sz="2600" dirty="0" err="1"/>
-              <a:t>causes</a:t>
-            </a:r>
-            <a:r>
-              <a:rPr lang="de-DE" sz="2600" dirty="0"/>
-              <a:t> and </a:t>
-            </a:r>
-            <a:r>
-              <a:rPr lang="de-DE" sz="2600" dirty="0" err="1"/>
-              <a:t>effects</a:t>
-            </a:r>
-            <a:r>
-              <a:rPr lang="de-DE" sz="2600" dirty="0"/>
-              <a:t> </a:t>
-            </a:r>
-            <a:r>
-              <a:rPr lang="de-DE" sz="2600" dirty="0" err="1"/>
-              <a:t>from</a:t>
-            </a:r>
-            <a:r>
-              <a:rPr lang="de-DE" sz="2600" dirty="0"/>
-              <a:t> </a:t>
-            </a:r>
-            <a:r>
-              <a:rPr lang="de-DE" sz="2600" dirty="0" err="1"/>
-              <a:t>data</a:t>
-            </a:r>
-            <a:r>
-              <a:rPr lang="de-DE" sz="2600" dirty="0"/>
-              <a:t> (</a:t>
-            </a:r>
-            <a:r>
-              <a:rPr lang="de-DE" sz="2600" dirty="0" err="1"/>
-              <a:t>statistical</a:t>
-            </a:r>
-            <a:r>
-              <a:rPr lang="de-DE" sz="2600" dirty="0"/>
-              <a:t> </a:t>
-            </a:r>
-            <a:r>
-              <a:rPr lang="de-DE" sz="2600" dirty="0" err="1"/>
-              <a:t>dependencies</a:t>
-            </a:r>
-            <a:r>
-              <a:rPr lang="de-DE" sz="2600" dirty="0"/>
-              <a:t>) </a:t>
-            </a:r>
-            <a:r>
-              <a:rPr lang="de-DE" sz="2600" dirty="0" err="1"/>
-              <a:t>alone</a:t>
-            </a:r>
-            <a:r>
-              <a:rPr lang="de-DE" sz="2600" dirty="0"/>
-              <a:t> </a:t>
-            </a:r>
-            <a:r>
-              <a:rPr lang="de-DE" sz="2600" dirty="0">
-                <a:sym typeface="Wingdings" pitchFamily="2" charset="2"/>
-              </a:rPr>
-              <a:t> </a:t>
-            </a:r>
-            <a:r>
-              <a:rPr lang="de-DE" sz="2600" dirty="0" err="1"/>
-              <a:t>need</a:t>
-            </a:r>
-            <a:r>
-              <a:rPr lang="de-DE" sz="2600" dirty="0"/>
-              <a:t> </a:t>
-            </a:r>
-            <a:r>
-              <a:rPr lang="de-DE" sz="2600" dirty="0" err="1"/>
-              <a:t>for</a:t>
-            </a:r>
-            <a:r>
-              <a:rPr lang="de-DE" sz="2600" dirty="0"/>
-              <a:t> </a:t>
-            </a:r>
-            <a:r>
-              <a:rPr lang="de-DE" sz="2600" dirty="0" err="1"/>
-              <a:t>causal</a:t>
-            </a:r>
-            <a:r>
-              <a:rPr lang="de-DE" sz="2600" dirty="0"/>
-              <a:t> </a:t>
-            </a:r>
-            <a:r>
-              <a:rPr lang="de-DE" sz="2600" dirty="0" err="1"/>
-              <a:t>assumptions</a:t>
-            </a:r>
-            <a:r>
-              <a:rPr lang="de-DE" sz="2600" dirty="0"/>
-              <a:t> (</a:t>
-            </a:r>
-            <a:r>
-              <a:rPr lang="de-DE" sz="2600" dirty="0" err="1"/>
-              <a:t>causal</a:t>
-            </a:r>
-            <a:r>
-              <a:rPr lang="de-DE" sz="2600" dirty="0"/>
-              <a:t> </a:t>
-            </a:r>
-            <a:r>
-              <a:rPr lang="de-DE" sz="2600" dirty="0" err="1"/>
-              <a:t>model</a:t>
-            </a:r>
-            <a:r>
-              <a:rPr lang="de-DE" sz="2600" dirty="0"/>
-              <a:t>)</a:t>
-            </a:r>
-          </a:p>
-          <a:p>
-            <a:r>
-              <a:rPr lang="de-DE" sz="2600" dirty="0" err="1"/>
-              <a:t>examples</a:t>
-            </a:r>
-            <a:r>
-              <a:rPr lang="de-DE" sz="2600" dirty="0"/>
-              <a:t>: </a:t>
-            </a:r>
-            <a:r>
-              <a:rPr lang="de-DE" sz="2600" dirty="0" err="1"/>
-              <a:t>transportability</a:t>
-            </a:r>
-            <a:r>
-              <a:rPr lang="de-DE" sz="2600" dirty="0"/>
-              <a:t> and </a:t>
-            </a:r>
-            <a:r>
-              <a:rPr lang="de-DE" sz="2600" dirty="0" err="1"/>
-              <a:t>robustness</a:t>
-            </a:r>
-            <a:r>
-              <a:rPr lang="de-DE" sz="2600" dirty="0"/>
-              <a:t> </a:t>
-            </a:r>
-            <a:r>
-              <a:rPr lang="de-DE" sz="2600" dirty="0" err="1"/>
-              <a:t>of</a:t>
-            </a:r>
-            <a:r>
-              <a:rPr lang="de-DE" sz="2600" dirty="0"/>
-              <a:t> </a:t>
-            </a:r>
-            <a:r>
-              <a:rPr lang="de-DE" sz="2600" dirty="0" err="1"/>
-              <a:t>models</a:t>
-            </a:r>
-            <a:r>
-              <a:rPr lang="de-DE" sz="2600" dirty="0"/>
-              <a:t> (</a:t>
-            </a:r>
-            <a:r>
-              <a:rPr lang="de-DE" sz="2600" dirty="0" err="1"/>
-              <a:t>generalization</a:t>
-            </a:r>
-            <a:r>
-              <a:rPr lang="de-DE" sz="2600" dirty="0"/>
-              <a:t>), </a:t>
-            </a:r>
-            <a:r>
-              <a:rPr lang="de-DE" sz="2600" dirty="0" err="1"/>
-              <a:t>handling</a:t>
-            </a:r>
-            <a:r>
-              <a:rPr lang="de-DE" sz="2600" dirty="0"/>
-              <a:t> </a:t>
-            </a:r>
-            <a:r>
-              <a:rPr lang="de-DE" sz="2600" dirty="0" err="1"/>
-              <a:t>of</a:t>
-            </a:r>
-            <a:r>
-              <a:rPr lang="de-DE" sz="2600" dirty="0"/>
-              <a:t> </a:t>
-            </a:r>
-            <a:r>
-              <a:rPr lang="de-DE" sz="2600" dirty="0" err="1"/>
-              <a:t>missing</a:t>
-            </a:r>
-            <a:r>
-              <a:rPr lang="de-DE" sz="2600" dirty="0"/>
-              <a:t> </a:t>
-            </a:r>
-            <a:r>
-              <a:rPr lang="de-DE" sz="2600" dirty="0" err="1"/>
-              <a:t>data</a:t>
-            </a:r>
-            <a:r>
-              <a:rPr lang="de-DE" sz="2600" dirty="0"/>
-              <a:t>, </a:t>
-            </a:r>
-            <a:r>
-              <a:rPr lang="de-DE" sz="2600" dirty="0" err="1"/>
-              <a:t>causal</a:t>
-            </a:r>
-            <a:r>
-              <a:rPr lang="de-DE" sz="2600" dirty="0"/>
-              <a:t> </a:t>
-            </a:r>
-            <a:r>
-              <a:rPr lang="de-DE" sz="2600" dirty="0" err="1"/>
-              <a:t>explainability</a:t>
-            </a:r>
-            <a:endParaRPr lang="de-DE" sz="2600" dirty="0"/>
-          </a:p>
-          <a:p>
-            <a:pPr marL="0" indent="0">
-              <a:buNone/>
-            </a:pPr>
-            <a:r>
-              <a:rPr lang="de-DE" sz="2600" dirty="0"/>
-              <a:t>(</a:t>
-            </a:r>
-            <a:r>
-              <a:rPr lang="de-DE" sz="2600" dirty="0" err="1"/>
-              <a:t>see</a:t>
-            </a:r>
-            <a:r>
-              <a:rPr lang="de-DE" sz="2600" dirty="0"/>
-              <a:t> </a:t>
-            </a:r>
-            <a:r>
-              <a:rPr lang="de-DE" sz="2600" dirty="0">
-                <a:hlinkClick r:id="rId2"/>
-              </a:rPr>
-              <a:t>Pearl</a:t>
-            </a:r>
-            <a:r>
-              <a:rPr lang="de-DE" sz="2600" dirty="0"/>
-              <a:t> and </a:t>
-            </a:r>
-            <a:r>
-              <a:rPr lang="de-DE" sz="2600" dirty="0" err="1"/>
-              <a:t>Schölkopf</a:t>
-            </a:r>
-            <a:r>
-              <a:rPr lang="de-DE" sz="2600" dirty="0"/>
-              <a:t> </a:t>
-            </a:r>
-            <a:r>
-              <a:rPr lang="de-DE" sz="2600" dirty="0">
-                <a:hlinkClick r:id="rId3"/>
-              </a:rPr>
-              <a:t>1</a:t>
-            </a:r>
-            <a:r>
-              <a:rPr lang="de-DE" sz="2600" dirty="0"/>
-              <a:t> </a:t>
-            </a:r>
-            <a:r>
-              <a:rPr lang="de-DE" sz="2600" dirty="0">
-                <a:hlinkClick r:id="rId4"/>
-              </a:rPr>
-              <a:t>2</a:t>
-            </a:r>
-            <a:r>
-              <a:rPr lang="de-DE" sz="2600" dirty="0"/>
-              <a:t> </a:t>
-            </a:r>
-            <a:r>
-              <a:rPr lang="de-DE" sz="2600" dirty="0">
-                <a:hlinkClick r:id="rId5"/>
-              </a:rPr>
-              <a:t>3</a:t>
-            </a:r>
-            <a:r>
-              <a:rPr lang="de-DE" sz="2600" dirty="0"/>
-              <a:t>)</a:t>
-            </a:r>
-          </a:p>
-          <a:p>
-            <a:pPr marL="0" indent="0">
-              <a:buNone/>
-            </a:pPr>
-            <a:endParaRPr lang="de-DE" sz="2600" dirty="0"/>
-          </a:p>
-          <a:p>
-            <a:pPr marL="0" indent="0">
-              <a:buNone/>
-            </a:pPr>
-            <a:r>
-              <a:rPr lang="de-DE" sz="2600" dirty="0"/>
-              <a:t>but also: ML </a:t>
-            </a:r>
-            <a:r>
-              <a:rPr lang="de-DE" sz="2600" dirty="0" err="1"/>
-              <a:t>as</a:t>
-            </a:r>
-            <a:r>
-              <a:rPr lang="de-DE" sz="2600" dirty="0"/>
-              <a:t> </a:t>
-            </a:r>
-            <a:r>
-              <a:rPr lang="de-DE" sz="2600" dirty="0" err="1"/>
-              <a:t>help</a:t>
-            </a:r>
-            <a:r>
-              <a:rPr lang="de-DE" sz="2600" dirty="0"/>
-              <a:t> </a:t>
-            </a:r>
-            <a:r>
-              <a:rPr lang="de-DE" sz="2600" dirty="0" err="1"/>
-              <a:t>for</a:t>
-            </a:r>
-            <a:r>
-              <a:rPr lang="de-DE" sz="2600" dirty="0"/>
-              <a:t> </a:t>
-            </a:r>
-            <a:r>
-              <a:rPr lang="de-DE" sz="2600" dirty="0" err="1"/>
-              <a:t>causal</a:t>
-            </a:r>
-            <a:r>
-              <a:rPr lang="de-DE" sz="2600" dirty="0"/>
-              <a:t> </a:t>
-            </a:r>
-            <a:r>
-              <a:rPr lang="de-DE" sz="2600" dirty="0" err="1"/>
-              <a:t>discovery</a:t>
-            </a:r>
-            <a:r>
-              <a:rPr lang="de-DE" sz="2600" dirty="0"/>
-              <a:t> and </a:t>
-            </a:r>
-            <a:r>
-              <a:rPr lang="de-DE" sz="2600" dirty="0" err="1"/>
-              <a:t>inference</a:t>
-            </a:r>
-            <a:endParaRPr lang="de-DE" sz="2600" dirty="0"/>
-          </a:p>
-          <a:p>
-            <a:r>
-              <a:rPr lang="de-DE" sz="2600" dirty="0" err="1"/>
-              <a:t>counterfactuls</a:t>
-            </a:r>
-            <a:r>
-              <a:rPr lang="de-DE" sz="2600" dirty="0"/>
-              <a:t> (potential </a:t>
-            </a:r>
-            <a:r>
-              <a:rPr lang="de-DE" sz="2600" dirty="0" err="1"/>
-              <a:t>outcomes</a:t>
-            </a:r>
-            <a:r>
-              <a:rPr lang="de-DE" sz="2600" dirty="0"/>
-              <a:t>) </a:t>
-            </a:r>
-            <a:r>
-              <a:rPr lang="de-DE" sz="2600" dirty="0" err="1"/>
-              <a:t>need</a:t>
-            </a:r>
-            <a:r>
-              <a:rPr lang="de-DE" sz="2600" dirty="0"/>
-              <a:t> </a:t>
-            </a:r>
-            <a:r>
-              <a:rPr lang="de-DE" sz="2600" dirty="0" err="1"/>
-              <a:t>matching</a:t>
-            </a:r>
-            <a:r>
-              <a:rPr lang="de-DE" sz="2600" dirty="0"/>
-              <a:t> </a:t>
-            </a:r>
-            <a:r>
-              <a:rPr lang="de-DE" sz="2600" dirty="0" err="1"/>
-              <a:t>of</a:t>
-            </a:r>
-            <a:r>
-              <a:rPr lang="de-DE" sz="2600" dirty="0"/>
-              <a:t> individual </a:t>
-            </a:r>
-            <a:r>
-              <a:rPr lang="de-DE" sz="2600" dirty="0" err="1"/>
-              <a:t>cases</a:t>
-            </a:r>
-            <a:endParaRPr lang="de-DE" sz="2600" dirty="0"/>
-          </a:p>
-          <a:p>
-            <a:r>
-              <a:rPr lang="de-DE" sz="2600" dirty="0" err="1"/>
-              <a:t>adjusting</a:t>
-            </a:r>
-            <a:r>
-              <a:rPr lang="de-DE" sz="2600" dirty="0"/>
-              <a:t> </a:t>
-            </a:r>
-            <a:r>
-              <a:rPr lang="de-DE" sz="2600" dirty="0" err="1"/>
-              <a:t>for</a:t>
-            </a:r>
-            <a:r>
-              <a:rPr lang="de-DE" sz="2600" dirty="0"/>
-              <a:t> </a:t>
-            </a:r>
-            <a:r>
-              <a:rPr lang="de-DE" sz="2600" dirty="0" err="1"/>
-              <a:t>many</a:t>
-            </a:r>
-            <a:r>
-              <a:rPr lang="de-DE" sz="2600" dirty="0"/>
-              <a:t> </a:t>
-            </a:r>
-            <a:r>
-              <a:rPr lang="de-DE" sz="2600" dirty="0" err="1"/>
-              <a:t>confounders</a:t>
-            </a:r>
-            <a:r>
-              <a:rPr lang="de-DE" sz="2600" dirty="0"/>
-              <a:t> (e.g., </a:t>
-            </a:r>
-            <a:r>
-              <a:rPr lang="de-DE" sz="2600" dirty="0" err="1"/>
-              <a:t>propensity</a:t>
-            </a:r>
-            <a:r>
-              <a:rPr lang="de-DE" sz="2600" dirty="0"/>
-              <a:t> </a:t>
-            </a:r>
-            <a:r>
-              <a:rPr lang="de-DE" sz="2600" dirty="0" err="1"/>
-              <a:t>scores</a:t>
-            </a:r>
-            <a:r>
-              <a:rPr lang="de-DE" sz="2600" dirty="0"/>
-              <a:t>)</a:t>
-            </a:r>
+            <a:endParaRPr lang="de-DE"/>
           </a:p>
         </p:txBody>
       </p:sp>
       <p:sp>
         <p:nvSpPr>
-          <p:cNvPr id="4" name="Slide Number Placeholder 3">
-            <a:extLst>
-              <a:ext uri="{FF2B5EF4-FFF2-40B4-BE49-F238E27FC236}">
-                <a16:creationId xmlns:a16="http://schemas.microsoft.com/office/drawing/2014/main" id="{EF52D213-F9E5-28C2-912C-05B2E6E7CFF6}"/>
+          <p:cNvPr id="4" name="Foliennummernplatzhalter 3">
+            <a:extLst>
+              <a:ext uri="{FF2B5EF4-FFF2-40B4-BE49-F238E27FC236}">
+                <a16:creationId xmlns:a16="http://schemas.microsoft.com/office/drawing/2014/main" id="{C9D141F8-25CC-DCBC-67E0-59938BF27F45}"/>
               </a:ext>
             </a:extLst>
           </p:cNvPr>
@@ -29130,18 +28496,18 @@
           <a:bodyPr/>
           <a:lstStyle/>
           <a:p>
-            <a:fld id="{60A26886-2117-0949-B8A5-D47461AC229C}" type="slidenum">
-              <a:rPr lang="en-DE" smtClean="0"/>
+            <a:fld id="{3D4C94FE-FF23-4504-88E9-14D481113291}" type="slidenum">
+              <a:rPr lang="en-GB" smtClean="0"/>
               <a:t>8</a:t>
             </a:fld>
-            <a:endParaRPr lang="en-DE"/>
+            <a:endParaRPr lang="en-GB"/>
           </a:p>
         </p:txBody>
       </p:sp>
     </p:spTree>
     <p:extLst>
       <p:ext uri="{BB962C8B-B14F-4D97-AF65-F5344CB8AC3E}">
-        <p14:creationId xmlns:p14="http://schemas.microsoft.com/office/powerpoint/2010/main" val="1234435983"/>
+        <p14:creationId xmlns:p14="http://schemas.microsoft.com/office/powerpoint/2010/main" val="3087692191"/>
       </p:ext>
     </p:extLst>
   </p:cSld>
@@ -29170,10 +28536,10 @@
       </p:grpSpPr>
       <p:sp>
         <p:nvSpPr>
-          <p:cNvPr id="2" name="Titel 1">
-            <a:extLst>
-              <a:ext uri="{FF2B5EF4-FFF2-40B4-BE49-F238E27FC236}">
-                <a16:creationId xmlns:a16="http://schemas.microsoft.com/office/drawing/2014/main" id="{92812DB9-CA11-C408-B3C4-CFC54D177F3C}"/>
+          <p:cNvPr id="2" name="Title 1">
+            <a:extLst>
+              <a:ext uri="{FF2B5EF4-FFF2-40B4-BE49-F238E27FC236}">
+                <a16:creationId xmlns:a16="http://schemas.microsoft.com/office/drawing/2014/main" id="{E4C4BC3E-08BB-EA8C-B198-8E1F4FAD5E2E}"/>
               </a:ext>
             </a:extLst>
           </p:cNvPr>
@@ -29190,22 +28556,19 @@
           <a:lstStyle/>
           <a:p>
             <a:r>
-              <a:rPr lang="de-DE" dirty="0" err="1"/>
-              <a:t>Causal</a:t>
-            </a:r>
-            <a:r>
-              <a:rPr lang="de-DE" dirty="0"/>
-              <a:t> Graphs and DAGs</a:t>
-            </a:r>
+              <a:rPr lang="en-US" dirty="0"/>
+              <a:t>Probabilistic Graphical Model</a:t>
+            </a:r>
+            <a:endParaRPr lang="en-DE" dirty="0"/>
           </a:p>
         </p:txBody>
       </p:sp>
       <p:sp>
         <p:nvSpPr>
-          <p:cNvPr id="3" name="Inhaltsplatzhalter 2">
-            <a:extLst>
-              <a:ext uri="{FF2B5EF4-FFF2-40B4-BE49-F238E27FC236}">
-                <a16:creationId xmlns:a16="http://schemas.microsoft.com/office/drawing/2014/main" id="{1B002756-16F1-782E-F388-AD71B5FA4D7E}"/>
+          <p:cNvPr id="3" name="Content Placeholder 2">
+            <a:extLst>
+              <a:ext uri="{FF2B5EF4-FFF2-40B4-BE49-F238E27FC236}">
+                <a16:creationId xmlns:a16="http://schemas.microsoft.com/office/drawing/2014/main" id="{50816CC0-643D-02AB-D8AF-ECDEA31BBDD0}"/>
               </a:ext>
             </a:extLst>
           </p:cNvPr>
@@ -29216,21 +28579,268 @@
             <p:ph idx="1"/>
           </p:nvPr>
         </p:nvSpPr>
-        <p:spPr/>
+        <p:spPr>
+          <a:xfrm>
+            <a:off x="838200" y="1825625"/>
+            <a:ext cx="5257800" cy="4351338"/>
+          </a:xfrm>
+        </p:spPr>
         <p:txBody>
-          <a:bodyPr/>
+          <a:bodyPr>
+            <a:noAutofit/>
+          </a:bodyPr>
           <a:lstStyle/>
           <a:p>
-            <a:endParaRPr lang="de-DE"/>
+            <a:pPr marL="0" indent="0">
+              <a:buNone/>
+            </a:pPr>
+            <a:r>
+              <a:rPr lang="en-US" sz="2400" dirty="0"/>
+              <a:t>Directed Acyclic Graph (DAG): random variables (nodes) and their (conditional) dependencies (edges)</a:t>
+            </a:r>
+            <a:endParaRPr lang="de-DE" sz="2400" dirty="0"/>
+          </a:p>
+          <a:p>
+            <a:pPr marL="0" indent="0">
+              <a:buNone/>
+            </a:pPr>
+            <a:endParaRPr lang="en-US" sz="2400" dirty="0"/>
+          </a:p>
+          <a:p>
+            <a:pPr marL="0" indent="0">
+              <a:buNone/>
+            </a:pPr>
+            <a:r>
+              <a:rPr lang="en-DE" sz="2400" dirty="0"/>
+              <a:t>Bayesian network: DAG</a:t>
+            </a:r>
+            <a:r>
+              <a:rPr lang="de-DE" sz="2400" dirty="0"/>
+              <a:t> </a:t>
+            </a:r>
+            <a:r>
+              <a:rPr lang="de-DE" sz="2400" dirty="0" err="1"/>
+              <a:t>with</a:t>
+            </a:r>
+            <a:r>
+              <a:rPr lang="de-DE" sz="2400" dirty="0"/>
+              <a:t> </a:t>
+            </a:r>
+            <a:r>
+              <a:rPr lang="de-DE" sz="2400" dirty="0" err="1"/>
+              <a:t>updates</a:t>
+            </a:r>
+            <a:r>
+              <a:rPr lang="de-DE" sz="2400" dirty="0"/>
+              <a:t> on </a:t>
+            </a:r>
+            <a:r>
+              <a:rPr lang="de-DE" sz="2400" dirty="0" err="1"/>
+              <a:t>new</a:t>
+            </a:r>
+            <a:r>
+              <a:rPr lang="de-DE" sz="2400" dirty="0"/>
+              <a:t> </a:t>
+            </a:r>
+            <a:r>
+              <a:rPr lang="de-DE" sz="2400" dirty="0" err="1"/>
+              <a:t>evidence</a:t>
+            </a:r>
+            <a:r>
+              <a:rPr lang="de-DE" sz="2400" dirty="0"/>
+              <a:t> </a:t>
+            </a:r>
+            <a:r>
+              <a:rPr lang="de-DE" sz="2400" dirty="0" err="1"/>
+              <a:t>according</a:t>
+            </a:r>
+            <a:r>
+              <a:rPr lang="de-DE" sz="2400" dirty="0"/>
+              <a:t> </a:t>
+            </a:r>
+            <a:r>
+              <a:rPr lang="de-DE" sz="2400" dirty="0" err="1"/>
+              <a:t>to</a:t>
+            </a:r>
+            <a:r>
+              <a:rPr lang="de-DE" sz="2400" dirty="0"/>
+              <a:t> Bayes</a:t>
+            </a:r>
+            <a:r>
+              <a:rPr lang="en-US" sz="2400" dirty="0"/>
+              <a:t>’</a:t>
+            </a:r>
+            <a:r>
+              <a:rPr lang="de-DE" sz="2400" dirty="0"/>
+              <a:t> </a:t>
+            </a:r>
+            <a:r>
+              <a:rPr lang="de-DE" sz="2400" dirty="0" err="1"/>
+              <a:t>rule</a:t>
+            </a:r>
+            <a:r>
+              <a:rPr lang="de-DE" sz="2400" dirty="0"/>
+              <a:t> (belief </a:t>
+            </a:r>
+            <a:r>
+              <a:rPr lang="de-DE" sz="2400" dirty="0" err="1"/>
+              <a:t>propagation</a:t>
+            </a:r>
+            <a:r>
+              <a:rPr lang="de-DE" sz="2400" dirty="0"/>
+              <a:t>)</a:t>
+            </a:r>
+          </a:p>
+          <a:p>
+            <a:r>
+              <a:rPr lang="de-DE" sz="2400" dirty="0" err="1"/>
+              <a:t>message</a:t>
+            </a:r>
+            <a:r>
+              <a:rPr lang="de-DE" sz="2400" dirty="0"/>
+              <a:t> </a:t>
+            </a:r>
+            <a:r>
+              <a:rPr lang="de-DE" sz="2400" dirty="0" err="1"/>
+              <a:t>from</a:t>
+            </a:r>
+            <a:r>
+              <a:rPr lang="de-DE" sz="2400" dirty="0"/>
+              <a:t> </a:t>
+            </a:r>
+            <a:r>
+              <a:rPr lang="de-DE" sz="2400" dirty="0" err="1"/>
+              <a:t>parent</a:t>
+            </a:r>
+            <a:r>
+              <a:rPr lang="de-DE" sz="2400" dirty="0"/>
+              <a:t> </a:t>
+            </a:r>
+            <a:r>
+              <a:rPr lang="de-DE" sz="2400" dirty="0" err="1"/>
+              <a:t>to</a:t>
+            </a:r>
+            <a:r>
+              <a:rPr lang="de-DE" sz="2400" dirty="0"/>
+              <a:t> </a:t>
+            </a:r>
+            <a:r>
+              <a:rPr lang="de-DE" sz="2400" dirty="0" err="1"/>
+              <a:t>child</a:t>
+            </a:r>
+            <a:r>
+              <a:rPr lang="de-DE" sz="2400" dirty="0"/>
+              <a:t>: update </a:t>
+            </a:r>
+            <a:r>
+              <a:rPr lang="de-DE" sz="2400" dirty="0" err="1"/>
+              <a:t>using</a:t>
+            </a:r>
+            <a:r>
+              <a:rPr lang="de-DE" sz="2400" dirty="0"/>
+              <a:t> </a:t>
+            </a:r>
+            <a:r>
+              <a:rPr lang="de-DE" sz="2400" dirty="0" err="1"/>
+              <a:t>conditional</a:t>
+            </a:r>
+            <a:r>
+              <a:rPr lang="de-DE" sz="2400" dirty="0"/>
+              <a:t> </a:t>
+            </a:r>
+            <a:r>
+              <a:rPr lang="de-DE" sz="2400" dirty="0" err="1"/>
+              <a:t>probabilities</a:t>
+            </a:r>
+            <a:endParaRPr lang="de-DE" sz="2400" dirty="0"/>
+          </a:p>
+          <a:p>
+            <a:r>
+              <a:rPr lang="de-DE" sz="2400" dirty="0" err="1"/>
+              <a:t>message</a:t>
+            </a:r>
+            <a:r>
+              <a:rPr lang="de-DE" sz="2400" dirty="0"/>
+              <a:t> </a:t>
+            </a:r>
+            <a:r>
+              <a:rPr lang="de-DE" sz="2400" dirty="0" err="1"/>
+              <a:t>from</a:t>
+            </a:r>
+            <a:r>
+              <a:rPr lang="de-DE" sz="2400" dirty="0"/>
+              <a:t> </a:t>
+            </a:r>
+            <a:r>
+              <a:rPr lang="de-DE" sz="2400" dirty="0" err="1"/>
+              <a:t>child</a:t>
+            </a:r>
+            <a:r>
+              <a:rPr lang="de-DE" sz="2400" dirty="0"/>
+              <a:t> </a:t>
+            </a:r>
+            <a:r>
+              <a:rPr lang="de-DE" sz="2400" dirty="0" err="1"/>
+              <a:t>to</a:t>
+            </a:r>
+            <a:r>
+              <a:rPr lang="de-DE" sz="2400" dirty="0"/>
+              <a:t> </a:t>
+            </a:r>
+            <a:r>
+              <a:rPr lang="de-DE" sz="2400" dirty="0" err="1"/>
+              <a:t>parent</a:t>
+            </a:r>
+            <a:r>
+              <a:rPr lang="de-DE" sz="2400" dirty="0"/>
+              <a:t>: update </a:t>
+            </a:r>
+            <a:r>
+              <a:rPr lang="de-DE" sz="2400" dirty="0" err="1"/>
+              <a:t>by</a:t>
+            </a:r>
+            <a:r>
+              <a:rPr lang="de-DE" sz="2400" dirty="0"/>
+              <a:t> </a:t>
+            </a:r>
+            <a:r>
+              <a:rPr lang="de-DE" sz="2400" dirty="0" err="1"/>
+              <a:t>multiplication</a:t>
+            </a:r>
+            <a:r>
+              <a:rPr lang="de-DE" sz="2400" dirty="0"/>
+              <a:t> </a:t>
+            </a:r>
+            <a:r>
+              <a:rPr lang="de-DE" sz="2400" dirty="0" err="1"/>
+              <a:t>with</a:t>
+            </a:r>
+            <a:r>
+              <a:rPr lang="de-DE" sz="2400" dirty="0"/>
+              <a:t> </a:t>
+            </a:r>
+            <a:r>
+              <a:rPr lang="de-DE" sz="2400" dirty="0" err="1"/>
+              <a:t>likelihood</a:t>
+            </a:r>
+            <a:r>
+              <a:rPr lang="de-DE" sz="2400" dirty="0"/>
+              <a:t> </a:t>
+            </a:r>
+            <a:r>
+              <a:rPr lang="de-DE" sz="2400" dirty="0" err="1"/>
+              <a:t>ratio</a:t>
+            </a:r>
+            <a:endParaRPr lang="de-DE" sz="2400" dirty="0"/>
           </a:p>
         </p:txBody>
       </p:sp>
       <p:sp>
         <p:nvSpPr>
-          <p:cNvPr id="4" name="Foliennummernplatzhalter 3">
-            <a:extLst>
-              <a:ext uri="{FF2B5EF4-FFF2-40B4-BE49-F238E27FC236}">
-                <a16:creationId xmlns:a16="http://schemas.microsoft.com/office/drawing/2014/main" id="{C9D141F8-25CC-DCBC-67E0-59938BF27F45}"/>
+          <p:cNvPr id="4" name="Slide Number Placeholder 3">
+            <a:extLst>
+              <a:ext uri="{FF2B5EF4-FFF2-40B4-BE49-F238E27FC236}">
+                <a16:creationId xmlns:a16="http://schemas.microsoft.com/office/drawing/2014/main" id="{D3F8F489-95B6-7077-31CC-1CF20431C499}"/>
               </a:ext>
             </a:extLst>
           </p:cNvPr>
@@ -29246,18 +28856,98 @@
           <a:bodyPr/>
           <a:lstStyle/>
           <a:p>
-            <a:fld id="{3D4C94FE-FF23-4504-88E9-14D481113291}" type="slidenum">
-              <a:rPr lang="en-GB" smtClean="0"/>
+            <a:fld id="{60A26886-2117-0949-B8A5-D47461AC229C}" type="slidenum">
+              <a:rPr lang="en-DE" smtClean="0"/>
               <a:t>9</a:t>
             </a:fld>
-            <a:endParaRPr lang="en-GB"/>
+            <a:endParaRPr lang="en-DE"/>
+          </a:p>
+        </p:txBody>
+      </p:sp>
+      <p:pic>
+        <p:nvPicPr>
+          <p:cNvPr id="5" name="Graphic 4">
+            <a:extLst>
+              <a:ext uri="{FF2B5EF4-FFF2-40B4-BE49-F238E27FC236}">
+                <a16:creationId xmlns:a16="http://schemas.microsoft.com/office/drawing/2014/main" id="{1B4CF1B7-04E9-B262-A1F0-17BAC445347C}"/>
+              </a:ext>
+            </a:extLst>
+          </p:cNvPr>
+          <p:cNvPicPr>
+            <a:picLocks noChangeAspect="1"/>
+          </p:cNvPicPr>
+          <p:nvPr/>
+        </p:nvPicPr>
+        <p:blipFill>
+          <a:blip>
+            <a:extLst>
+              <a:ext uri="{96DAC541-7B7A-43D3-8B79-37D633B846F1}">
+                <asvg:svgBlip xmlns:asvg="http://schemas.microsoft.com/office/drawing/2016/SVG/main" r:embed="rId2"/>
+              </a:ext>
+            </a:extLst>
+          </a:blip>
+          <a:stretch>
+            <a:fillRect/>
+          </a:stretch>
+        </p:blipFill>
+        <p:spPr>
+          <a:xfrm>
+            <a:off x="6357646" y="2350294"/>
+            <a:ext cx="5829300" cy="3302000"/>
+          </a:xfrm>
+          <a:prstGeom prst="rect">
+            <a:avLst/>
+          </a:prstGeom>
+        </p:spPr>
+      </p:pic>
+      <p:sp>
+        <p:nvSpPr>
+          <p:cNvPr id="6" name="TextBox 5">
+            <a:extLst>
+              <a:ext uri="{FF2B5EF4-FFF2-40B4-BE49-F238E27FC236}">
+                <a16:creationId xmlns:a16="http://schemas.microsoft.com/office/drawing/2014/main" id="{2E6DFD5C-A21C-4E22-8DCE-1A7A2AACE4C6}"/>
+              </a:ext>
+            </a:extLst>
+          </p:cNvPr>
+          <p:cNvSpPr txBox="1"/>
+          <p:nvPr/>
+        </p:nvSpPr>
+        <p:spPr>
+          <a:xfrm>
+            <a:off x="10577901" y="5406073"/>
+            <a:ext cx="962123" cy="246221"/>
+          </a:xfrm>
+          <a:prstGeom prst="rect">
+            <a:avLst/>
+          </a:prstGeom>
+          <a:noFill/>
+        </p:spPr>
+        <p:txBody>
+          <a:bodyPr wrap="none" rtlCol="0">
+            <a:spAutoFit/>
+          </a:bodyPr>
+          <a:lstStyle/>
+          <a:p>
+            <a:r>
+              <a:rPr lang="de-DE" sz="1000" dirty="0" err="1"/>
+              <a:t>from</a:t>
+            </a:r>
+            <a:r>
+              <a:rPr lang="de-DE" sz="1000" dirty="0"/>
+              <a:t> </a:t>
+            </a:r>
+            <a:r>
+              <a:rPr lang="de-DE" sz="1000" dirty="0" err="1"/>
+              <a:t>wikipedia</a:t>
+            </a:r>
+            <a:endParaRPr lang="de-DE" sz="1000" dirty="0"/>
           </a:p>
         </p:txBody>
       </p:sp>
     </p:spTree>
     <p:extLst>
       <p:ext uri="{BB962C8B-B14F-4D97-AF65-F5344CB8AC3E}">
-        <p14:creationId xmlns:p14="http://schemas.microsoft.com/office/powerpoint/2010/main" val="3087692191"/>
+        <p14:creationId xmlns:p14="http://schemas.microsoft.com/office/powerpoint/2010/main" val="3495227822"/>
       </p:ext>
     </p:extLst>
   </p:cSld>

--- a/slides/10_causality.pptx
+++ b/slides/10_causality.pptx
@@ -222,7 +222,7 @@
           <a:p>
             <a:fld id="{24EDAC50-00D5-3946-BE94-3A206AB4E9F5}" type="datetimeFigureOut">
               <a:rPr lang="en-DE" smtClean="0"/>
-              <a:t>5/25/26</a:t>
+              <a:t>6/12/26</a:t>
             </a:fld>
             <a:endParaRPr lang="en-DE"/>
           </a:p>
@@ -639,7 +639,7 @@
           <a:p>
             <a:fld id="{7128456D-5ACD-4673-BCE9-52505EC32CEF}" type="datetime1">
               <a:rPr lang="en-GB" smtClean="0"/>
-              <a:t>25/05/2026</a:t>
+              <a:t>12/06/2026</a:t>
             </a:fld>
             <a:endParaRPr lang="en-GB"/>
           </a:p>
@@ -839,7 +839,7 @@
           <a:p>
             <a:fld id="{D99A2639-5270-4811-807B-89D4AE95E7ED}" type="datetime1">
               <a:rPr lang="en-GB" smtClean="0"/>
-              <a:t>25/05/2026</a:t>
+              <a:t>12/06/2026</a:t>
             </a:fld>
             <a:endParaRPr lang="en-GB"/>
           </a:p>
@@ -1049,7 +1049,7 @@
           <a:p>
             <a:fld id="{B552976C-D408-4E27-8D02-D7795F6D8A01}" type="datetime1">
               <a:rPr lang="en-GB" smtClean="0"/>
-              <a:t>25/05/2026</a:t>
+              <a:t>12/06/2026</a:t>
             </a:fld>
             <a:endParaRPr lang="en-GB"/>
           </a:p>
@@ -1249,7 +1249,7 @@
           <a:p>
             <a:fld id="{0B763083-041D-491F-A9FE-D51D99E0B41E}" type="datetime1">
               <a:rPr lang="en-GB" smtClean="0"/>
-              <a:t>25/05/2026</a:t>
+              <a:t>12/06/2026</a:t>
             </a:fld>
             <a:endParaRPr lang="en-GB"/>
           </a:p>
@@ -1525,7 +1525,7 @@
           <a:p>
             <a:fld id="{409455E6-A1CA-4CB6-9964-88D5086DA5CA}" type="datetime1">
               <a:rPr lang="en-GB" smtClean="0"/>
-              <a:t>25/05/2026</a:t>
+              <a:t>12/06/2026</a:t>
             </a:fld>
             <a:endParaRPr lang="en-GB"/>
           </a:p>
@@ -1793,7 +1793,7 @@
           <a:p>
             <a:fld id="{FAD82E38-24C1-4A8F-B916-1E714FC129DD}" type="datetime1">
               <a:rPr lang="en-GB" smtClean="0"/>
-              <a:t>25/05/2026</a:t>
+              <a:t>12/06/2026</a:t>
             </a:fld>
             <a:endParaRPr lang="en-GB"/>
           </a:p>
@@ -2208,7 +2208,7 @@
           <a:p>
             <a:fld id="{BC17BCDC-BAA6-44B5-B642-6F28D623ABB1}" type="datetime1">
               <a:rPr lang="en-GB" smtClean="0"/>
-              <a:t>25/05/2026</a:t>
+              <a:t>12/06/2026</a:t>
             </a:fld>
             <a:endParaRPr lang="en-GB"/>
           </a:p>
@@ -2350,7 +2350,7 @@
           <a:p>
             <a:fld id="{01D4BEC3-2CF9-4B19-A0A5-E70A0675B677}" type="datetime1">
               <a:rPr lang="en-GB" smtClean="0"/>
-              <a:t>25/05/2026</a:t>
+              <a:t>12/06/2026</a:t>
             </a:fld>
             <a:endParaRPr lang="en-GB"/>
           </a:p>
@@ -2463,7 +2463,7 @@
           <a:p>
             <a:fld id="{98E28BFD-B06D-4A45-8453-724AC7BA29C5}" type="datetime1">
               <a:rPr lang="en-GB" smtClean="0"/>
-              <a:t>25/05/2026</a:t>
+              <a:t>12/06/2026</a:t>
             </a:fld>
             <a:endParaRPr lang="en-GB"/>
           </a:p>
@@ -2776,7 +2776,7 @@
           <a:p>
             <a:fld id="{A14D99B0-2926-4194-B668-6A0D6123824C}" type="datetime1">
               <a:rPr lang="en-GB" smtClean="0"/>
-              <a:t>25/05/2026</a:t>
+              <a:t>12/06/2026</a:t>
             </a:fld>
             <a:endParaRPr lang="en-GB"/>
           </a:p>
@@ -3065,7 +3065,7 @@
           <a:p>
             <a:fld id="{29F03426-21FD-40F4-9F0B-AD19F2317DCA}" type="datetime1">
               <a:rPr lang="en-GB" smtClean="0"/>
-              <a:t>25/05/2026</a:t>
+              <a:t>12/06/2026</a:t>
             </a:fld>
             <a:endParaRPr lang="en-GB"/>
           </a:p>
@@ -3308,7 +3308,7 @@
           <a:p>
             <a:fld id="{0369896D-5D36-4D31-A0CE-0C2BFB17B225}" type="datetime1">
               <a:rPr lang="en-GB" smtClean="0"/>
-              <a:t>25/05/2026</a:t>
+              <a:t>12/06/2026</a:t>
             </a:fld>
             <a:endParaRPr lang="en-GB"/>
           </a:p>
@@ -4108,7 +4108,7 @@
         </p:blipFill>
         <p:spPr>
           <a:xfrm>
-            <a:off x="1946909" y="2847905"/>
+            <a:off x="1269571" y="2847905"/>
             <a:ext cx="8298181" cy="3644970"/>
           </a:xfrm>
           <a:prstGeom prst="rect">
@@ -4130,7 +4130,7 @@
         </p:nvSpPr>
         <p:spPr>
           <a:xfrm>
-            <a:off x="1133614" y="6369764"/>
+            <a:off x="744146" y="6403632"/>
             <a:ext cx="2342308" cy="246221"/>
           </a:xfrm>
           <a:prstGeom prst="rect">
@@ -4197,7 +4197,7 @@
         </p:nvSpPr>
         <p:spPr>
           <a:xfrm>
-            <a:off x="3893505" y="6382767"/>
+            <a:off x="3216167" y="6382767"/>
             <a:ext cx="599844" cy="338554"/>
           </a:xfrm>
           <a:prstGeom prst="rect">
@@ -4232,7 +4232,7 @@
         </p:nvSpPr>
         <p:spPr>
           <a:xfrm>
-            <a:off x="8337966" y="6382767"/>
+            <a:off x="7660628" y="6382767"/>
             <a:ext cx="599844" cy="338554"/>
           </a:xfrm>
           <a:prstGeom prst="rect">
@@ -4267,7 +4267,7 @@
         </p:nvCxnSpPr>
         <p:spPr>
           <a:xfrm>
-            <a:off x="3818857" y="6324485"/>
+            <a:off x="3141519" y="6324485"/>
             <a:ext cx="720000" cy="0"/>
           </a:xfrm>
           <a:prstGeom prst="line">
@@ -4308,7 +4308,7 @@
         </p:nvCxnSpPr>
         <p:spPr>
           <a:xfrm>
-            <a:off x="8242077" y="6313906"/>
+            <a:off x="7564739" y="6313906"/>
             <a:ext cx="720000" cy="0"/>
           </a:xfrm>
           <a:prstGeom prst="line">
@@ -4349,7 +4349,7 @@
         </p:nvSpPr>
         <p:spPr>
           <a:xfrm>
-            <a:off x="2042538" y="5101990"/>
+            <a:off x="1365200" y="5101990"/>
             <a:ext cx="591829" cy="338554"/>
           </a:xfrm>
           <a:prstGeom prst="rect">
@@ -4384,7 +4384,7 @@
         </p:nvSpPr>
         <p:spPr>
           <a:xfrm>
-            <a:off x="6440365" y="5101990"/>
+            <a:off x="5763027" y="5101990"/>
             <a:ext cx="591829" cy="338554"/>
           </a:xfrm>
           <a:prstGeom prst="rect">
@@ -4421,7 +4421,7 @@
         </p:nvCxnSpPr>
         <p:spPr>
           <a:xfrm>
-            <a:off x="1928794" y="4993318"/>
+            <a:off x="1251456" y="4993318"/>
             <a:ext cx="917612" cy="0"/>
           </a:xfrm>
           <a:prstGeom prst="line">
@@ -4464,7 +4464,7 @@
         </p:nvCxnSpPr>
         <p:spPr>
           <a:xfrm>
-            <a:off x="6309400" y="4921784"/>
+            <a:off x="5632062" y="4921784"/>
             <a:ext cx="917612" cy="0"/>
           </a:xfrm>
           <a:prstGeom prst="line">
@@ -4507,7 +4507,7 @@
         </p:nvCxnSpPr>
         <p:spPr>
           <a:xfrm>
-            <a:off x="3275013" y="3316917"/>
+            <a:off x="2597675" y="3316917"/>
             <a:ext cx="401818" cy="0"/>
           </a:xfrm>
           <a:prstGeom prst="line">
@@ -4550,7 +4550,7 @@
         </p:nvCxnSpPr>
         <p:spPr>
           <a:xfrm>
-            <a:off x="3007785" y="4380607"/>
+            <a:off x="2330447" y="4380607"/>
             <a:ext cx="257897" cy="0"/>
           </a:xfrm>
           <a:prstGeom prst="line">
@@ -4593,7 +4593,7 @@
         </p:nvCxnSpPr>
         <p:spPr>
           <a:xfrm>
-            <a:off x="3256351" y="4113129"/>
+            <a:off x="2579013" y="4113129"/>
             <a:ext cx="257897" cy="0"/>
           </a:xfrm>
           <a:prstGeom prst="line">
@@ -4636,7 +4636,7 @@
         </p:nvCxnSpPr>
         <p:spPr>
           <a:xfrm>
-            <a:off x="3616946" y="3758259"/>
+            <a:off x="2939608" y="3758259"/>
             <a:ext cx="257897" cy="0"/>
           </a:xfrm>
           <a:prstGeom prst="line">
@@ -4679,7 +4679,7 @@
         </p:nvCxnSpPr>
         <p:spPr>
           <a:xfrm>
-            <a:off x="3944059" y="3422664"/>
+            <a:off x="3266721" y="3422664"/>
             <a:ext cx="257897" cy="0"/>
           </a:xfrm>
           <a:prstGeom prst="line">
@@ -4722,7 +4722,7 @@
         </p:nvCxnSpPr>
         <p:spPr>
           <a:xfrm>
-            <a:off x="4224518" y="3142746"/>
+            <a:off x="3547180" y="3142746"/>
             <a:ext cx="257897" cy="0"/>
           </a:xfrm>
           <a:prstGeom prst="line">
@@ -4763,7 +4763,7 @@
         </p:nvSpPr>
         <p:spPr>
           <a:xfrm>
-            <a:off x="1559142" y="2913134"/>
+            <a:off x="881804" y="2913134"/>
             <a:ext cx="2606483" cy="338554"/>
           </a:xfrm>
           <a:prstGeom prst="rect">
@@ -4802,7 +4802,7 @@
         </p:nvSpPr>
         <p:spPr>
           <a:xfrm>
-            <a:off x="4408961" y="2978363"/>
+            <a:off x="3731623" y="2978363"/>
             <a:ext cx="288862" cy="338554"/>
           </a:xfrm>
           <a:prstGeom prst="rect">
@@ -4837,7 +4837,7 @@
         </p:nvSpPr>
         <p:spPr>
           <a:xfrm>
-            <a:off x="4114599" y="3251688"/>
+            <a:off x="3437261" y="3251688"/>
             <a:ext cx="288862" cy="338554"/>
           </a:xfrm>
           <a:prstGeom prst="rect">
@@ -4872,7 +4872,7 @@
         </p:nvSpPr>
         <p:spPr>
           <a:xfrm>
-            <a:off x="3816680" y="3588372"/>
+            <a:off x="3139342" y="3588372"/>
             <a:ext cx="288862" cy="338554"/>
           </a:xfrm>
           <a:prstGeom prst="rect">
@@ -4907,7 +4907,7 @@
         </p:nvSpPr>
         <p:spPr>
           <a:xfrm>
-            <a:off x="3456365" y="3943852"/>
+            <a:off x="2779027" y="3943852"/>
             <a:ext cx="288862" cy="338554"/>
           </a:xfrm>
           <a:prstGeom prst="rect">
@@ -4942,7 +4942,7 @@
         </p:nvSpPr>
         <p:spPr>
           <a:xfrm>
-            <a:off x="3211927" y="4212640"/>
+            <a:off x="2534589" y="4212640"/>
             <a:ext cx="184731" cy="338554"/>
           </a:xfrm>
           <a:prstGeom prst="rect">
@@ -4960,6 +4960,258 @@
           </a:p>
         </p:txBody>
       </p:sp>
+      <p:sp>
+        <p:nvSpPr>
+          <p:cNvPr id="2" name="TextBox 25">
+            <a:extLst>
+              <a:ext uri="{FF2B5EF4-FFF2-40B4-BE49-F238E27FC236}">
+                <a16:creationId xmlns:a16="http://schemas.microsoft.com/office/drawing/2014/main" id="{DC79CDC7-7C79-54EF-1817-B0838BBB9C1D}"/>
+              </a:ext>
+            </a:extLst>
+          </p:cNvPr>
+          <p:cNvSpPr txBox="1"/>
+          <p:nvPr/>
+        </p:nvSpPr>
+        <p:spPr>
+          <a:xfrm>
+            <a:off x="5418661" y="2913134"/>
+            <a:ext cx="4267579" cy="338554"/>
+          </a:xfrm>
+          <a:prstGeom prst="rect">
+            <a:avLst/>
+          </a:prstGeom>
+          <a:noFill/>
+        </p:spPr>
+        <p:txBody>
+          <a:bodyPr wrap="none" rtlCol="0">
+            <a:spAutoFit/>
+          </a:bodyPr>
+          <a:lstStyle/>
+          <a:p>
+            <a:r>
+              <a:rPr lang="en-GB" sz="1600" dirty="0"/>
+              <a:t>all data together ignoring m</a:t>
+            </a:r>
+            <a:r>
+              <a:rPr lang="en-DE" sz="1600" dirty="0"/>
+              <a:t>onth</a:t>
+            </a:r>
+            <a:r>
+              <a:rPr lang="en-US" sz="1600" dirty="0" err="1"/>
+              <a:t>ly</a:t>
+            </a:r>
+            <a:r>
+              <a:rPr lang="en-DE" sz="1600" dirty="0"/>
+              <a:t> </a:t>
+            </a:r>
+            <a:r>
+              <a:rPr lang="en-US" sz="1600" dirty="0"/>
+              <a:t>information</a:t>
+            </a:r>
+            <a:r>
+              <a:rPr lang="en-DE" sz="1600" dirty="0"/>
+              <a:t> </a:t>
+            </a:r>
+          </a:p>
+        </p:txBody>
+      </p:sp>
+      <p:sp>
+        <p:nvSpPr>
+          <p:cNvPr id="28" name="Geschweifte Klammer rechts 27">
+            <a:extLst>
+              <a:ext uri="{FF2B5EF4-FFF2-40B4-BE49-F238E27FC236}">
+                <a16:creationId xmlns:a16="http://schemas.microsoft.com/office/drawing/2014/main" id="{B3C49C37-0FB3-8E5E-C080-1859480AB05A}"/>
+              </a:ext>
+            </a:extLst>
+          </p:cNvPr>
+          <p:cNvSpPr/>
+          <p:nvPr/>
+        </p:nvSpPr>
+        <p:spPr>
+          <a:xfrm>
+            <a:off x="9567752" y="2743200"/>
+            <a:ext cx="492597" cy="3906650"/>
+          </a:xfrm>
+          <a:prstGeom prst="rightBrace">
+            <a:avLst>
+              <a:gd name="adj1" fmla="val 99428"/>
+              <a:gd name="adj2" fmla="val 50000"/>
+            </a:avLst>
+          </a:prstGeom>
+        </p:spPr>
+        <p:style>
+          <a:lnRef idx="2">
+            <a:schemeClr val="accent1"/>
+          </a:lnRef>
+          <a:fillRef idx="0">
+            <a:schemeClr val="accent1"/>
+          </a:fillRef>
+          <a:effectRef idx="1">
+            <a:schemeClr val="accent1"/>
+          </a:effectRef>
+          <a:fontRef idx="minor">
+            <a:schemeClr val="tx1"/>
+          </a:fontRef>
+        </p:style>
+        <p:txBody>
+          <a:bodyPr rtlCol="0" anchor="ctr"/>
+          <a:lstStyle/>
+          <a:p>
+            <a:pPr algn="ctr"/>
+            <a:endParaRPr lang="de-DE"/>
+          </a:p>
+        </p:txBody>
+      </p:sp>
+      <p:sp>
+        <p:nvSpPr>
+          <p:cNvPr id="29" name="Textfeld 28">
+            <a:extLst>
+              <a:ext uri="{FF2B5EF4-FFF2-40B4-BE49-F238E27FC236}">
+                <a16:creationId xmlns:a16="http://schemas.microsoft.com/office/drawing/2014/main" id="{A286B290-7136-551A-B2EF-C428BDBE5DE0}"/>
+              </a:ext>
+            </a:extLst>
+          </p:cNvPr>
+          <p:cNvSpPr txBox="1"/>
+          <p:nvPr/>
+        </p:nvSpPr>
+        <p:spPr>
+          <a:xfrm>
+            <a:off x="10235593" y="3212695"/>
+            <a:ext cx="1587205" cy="3139321"/>
+          </a:xfrm>
+          <a:prstGeom prst="rect">
+            <a:avLst/>
+          </a:prstGeom>
+          <a:noFill/>
+        </p:spPr>
+        <p:txBody>
+          <a:bodyPr wrap="square" rtlCol="0">
+            <a:spAutoFit/>
+          </a:bodyPr>
+          <a:lstStyle/>
+          <a:p>
+            <a:r>
+              <a:rPr lang="en-US" dirty="0"/>
+              <a:t>month is a hidden influencing factor on both variables:</a:t>
+            </a:r>
+          </a:p>
+          <a:p>
+            <a:endParaRPr lang="en-US" dirty="0"/>
+          </a:p>
+          <a:p>
+            <a:pPr algn="ctr"/>
+            <a:r>
+              <a:rPr lang="en-US" dirty="0"/>
+              <a:t>sales</a:t>
+            </a:r>
+          </a:p>
+          <a:p>
+            <a:pPr algn="ctr"/>
+            <a:endParaRPr lang="en-US" dirty="0"/>
+          </a:p>
+          <a:p>
+            <a:pPr algn="ctr"/>
+            <a:r>
+              <a:rPr lang="en-US" dirty="0"/>
+              <a:t>month</a:t>
+            </a:r>
+          </a:p>
+          <a:p>
+            <a:pPr algn="ctr"/>
+            <a:endParaRPr lang="en-US" dirty="0"/>
+          </a:p>
+          <a:p>
+            <a:pPr algn="ctr"/>
+            <a:r>
+              <a:rPr lang="en-US" dirty="0"/>
+              <a:t>price</a:t>
+            </a:r>
+            <a:endParaRPr lang="de-DE" dirty="0"/>
+          </a:p>
+        </p:txBody>
+      </p:sp>
+      <p:cxnSp>
+        <p:nvCxnSpPr>
+          <p:cNvPr id="33" name="Gerade Verbindung mit Pfeil 32">
+            <a:extLst>
+              <a:ext uri="{FF2B5EF4-FFF2-40B4-BE49-F238E27FC236}">
+                <a16:creationId xmlns:a16="http://schemas.microsoft.com/office/drawing/2014/main" id="{187801FC-77E9-282D-75B0-A50200CAD44D}"/>
+              </a:ext>
+            </a:extLst>
+          </p:cNvPr>
+          <p:cNvCxnSpPr>
+            <a:cxnSpLocks/>
+          </p:cNvCxnSpPr>
+          <p:nvPr/>
+        </p:nvCxnSpPr>
+        <p:spPr>
+          <a:xfrm flipV="1">
+            <a:off x="11029195" y="5187592"/>
+            <a:ext cx="0" cy="296793"/>
+          </a:xfrm>
+          <a:prstGeom prst="straightConnector1">
+            <a:avLst/>
+          </a:prstGeom>
+          <a:ln>
+            <a:tailEnd type="triangle"/>
+          </a:ln>
+        </p:spPr>
+        <p:style>
+          <a:lnRef idx="2">
+            <a:schemeClr val="accent1"/>
+          </a:lnRef>
+          <a:fillRef idx="0">
+            <a:schemeClr val="accent1"/>
+          </a:fillRef>
+          <a:effectRef idx="1">
+            <a:schemeClr val="accent1"/>
+          </a:effectRef>
+          <a:fontRef idx="minor">
+            <a:schemeClr val="tx1"/>
+          </a:fontRef>
+        </p:style>
+      </p:cxnSp>
+      <p:cxnSp>
+        <p:nvCxnSpPr>
+          <p:cNvPr id="38" name="Gerade Verbindung mit Pfeil 37">
+            <a:extLst>
+              <a:ext uri="{FF2B5EF4-FFF2-40B4-BE49-F238E27FC236}">
+                <a16:creationId xmlns:a16="http://schemas.microsoft.com/office/drawing/2014/main" id="{283FE6B8-1071-6D6F-A66D-B10A0EF10C40}"/>
+              </a:ext>
+            </a:extLst>
+          </p:cNvPr>
+          <p:cNvCxnSpPr>
+            <a:cxnSpLocks/>
+          </p:cNvCxnSpPr>
+          <p:nvPr/>
+        </p:nvCxnSpPr>
+        <p:spPr>
+          <a:xfrm>
+            <a:off x="11029195" y="5696052"/>
+            <a:ext cx="0" cy="349148"/>
+          </a:xfrm>
+          <a:prstGeom prst="straightConnector1">
+            <a:avLst/>
+          </a:prstGeom>
+          <a:ln>
+            <a:tailEnd type="triangle"/>
+          </a:ln>
+        </p:spPr>
+        <p:style>
+          <a:lnRef idx="2">
+            <a:schemeClr val="accent1"/>
+          </a:lnRef>
+          <a:fillRef idx="0">
+            <a:schemeClr val="accent1"/>
+          </a:fillRef>
+          <a:effectRef idx="1">
+            <a:schemeClr val="accent1"/>
+          </a:effectRef>
+          <a:fontRef idx="minor">
+            <a:schemeClr val="tx1"/>
+          </a:fontRef>
+        </p:style>
+      </p:cxnSp>
     </p:spTree>
     <p:extLst>
       <p:ext uri="{BB962C8B-B14F-4D97-AF65-F5344CB8AC3E}">
@@ -5019,8 +5271,8 @@
           </a:p>
         </p:txBody>
       </p:sp>
-      <mc:AlternateContent xmlns:mc="http://schemas.openxmlformats.org/markup-compatibility/2006">
-        <mc:Choice xmlns:a14="http://schemas.microsoft.com/office/drawing/2010/main" Requires="a14">
+      <mc:AlternateContent xmlns:mc="http://schemas.openxmlformats.org/markup-compatibility/2006" xmlns:a14="http://schemas.microsoft.com/office/drawing/2010/main">
+        <mc:Choice Requires="a14">
           <p:sp>
             <p:nvSpPr>
               <p:cNvPr id="3" name="Inhaltsplatzhalter 2">
@@ -5039,7 +5291,9 @@
             </p:nvSpPr>
             <p:spPr/>
             <p:txBody>
-              <a:bodyPr/>
+              <a:bodyPr>
+                <a:normAutofit fontScale="77500" lnSpcReduction="20000"/>
+              </a:bodyPr>
               <a:lstStyle/>
               <a:p>
                 <a:pPr marL="0" indent="0">
@@ -5384,12 +5638,88 @@
                   </a:rPr>
                   <a:t>every correlation either due to a direct causal effect linking the correlated entities or brought about by a third factor (confounder)</a:t>
                 </a:r>
-                <a:endParaRPr lang="de-DE" dirty="0"/>
+              </a:p>
+              <a:p>
+                <a:pPr marL="0" indent="0">
+                  <a:buNone/>
+                </a:pPr>
+                <a:endParaRPr lang="en-GB" dirty="0">
+                  <a:solidFill>
+                    <a:srgbClr val="202124"/>
+                  </a:solidFill>
+                </a:endParaRPr>
+              </a:p>
+              <a:p>
+                <a:pPr marL="0" indent="0">
+                  <a:buNone/>
+                </a:pPr>
+                <a:r>
+                  <a:rPr lang="en-US" i="1" dirty="0"/>
+                  <a:t>An observed correlation can be completely misleading if key influencing factors are not taken into account. </a:t>
+                </a:r>
+                <a:r>
+                  <a:rPr lang="en-US" i="1" dirty="0">
+                    <a:sym typeface="Wingdings" panose="05000000000000000000" pitchFamily="2" charset="2"/>
+                  </a:rPr>
+                  <a:t> Is there a variable </a:t>
+                </a:r>
+                <a14:m>
+                  <m:oMath xmlns:m="http://schemas.openxmlformats.org/officeDocument/2006/math">
+                    <m:r>
+                      <a:rPr lang="en-US" b="0" i="1" smtClean="0">
+                        <a:latin typeface="Cambria Math" panose="02040503050406030204" pitchFamily="18" charset="0"/>
+                        <a:sym typeface="Wingdings" panose="05000000000000000000" pitchFamily="2" charset="2"/>
+                      </a:rPr>
+                      <m:t>𝐶</m:t>
+                    </m:r>
+                  </m:oMath>
+                </a14:m>
+                <a:r>
+                  <a:rPr lang="en-US" i="1" dirty="0">
+                    <a:sym typeface="Wingdings" panose="05000000000000000000" pitchFamily="2" charset="2"/>
+                  </a:rPr>
+                  <a:t> that influences both </a:t>
+                </a:r>
+                <a14:m>
+                  <m:oMath xmlns:m="http://schemas.openxmlformats.org/officeDocument/2006/math">
+                    <m:r>
+                      <a:rPr lang="en-US" i="1" dirty="0" smtClean="0">
+                        <a:latin typeface="Cambria Math" panose="02040503050406030204" pitchFamily="18" charset="0"/>
+                        <a:sym typeface="Wingdings" panose="05000000000000000000" pitchFamily="2" charset="2"/>
+                      </a:rPr>
+                      <m:t>𝑋</m:t>
+                    </m:r>
+                  </m:oMath>
+                </a14:m>
+                <a:r>
+                  <a:rPr lang="en-US" i="1" dirty="0">
+                    <a:sym typeface="Wingdings" panose="05000000000000000000" pitchFamily="2" charset="2"/>
+                  </a:rPr>
+                  <a:t> and </a:t>
+                </a:r>
+                <a14:m>
+                  <m:oMath xmlns:m="http://schemas.openxmlformats.org/officeDocument/2006/math">
+                    <m:r>
+                      <a:rPr lang="en-US" i="1" dirty="0" smtClean="0">
+                        <a:latin typeface="Cambria Math" panose="02040503050406030204" pitchFamily="18" charset="0"/>
+                        <a:sym typeface="Wingdings" panose="05000000000000000000" pitchFamily="2" charset="2"/>
+                      </a:rPr>
+                      <m:t>𝑌</m:t>
+                    </m:r>
+                  </m:oMath>
+                </a14:m>
+                <a:r>
+                  <a:rPr lang="en-US" i="1" dirty="0">
+                    <a:sym typeface="Wingdings" panose="05000000000000000000" pitchFamily="2" charset="2"/>
+                  </a:rPr>
+                  <a:t>?</a:t>
+                </a:r>
+                <a:endParaRPr lang="de-DE" i="1" dirty="0"/>
               </a:p>
             </p:txBody>
           </p:sp>
         </mc:Choice>
-        <mc:Fallback>
+        <mc:Fallback xmlns="">
           <p:sp>
             <p:nvSpPr>
               <p:cNvPr id="3" name="Inhaltsplatzhalter 2">
@@ -5410,7 +5740,7 @@
               <a:blipFill>
                 <a:blip r:embed="rId2"/>
                 <a:stretch>
-                  <a:fillRect l="-1206" t="-2326" b="-3198"/>
+                  <a:fillRect l="-754" t="-2661"/>
                 </a:stretch>
               </a:blipFill>
             </p:spPr>
@@ -5472,7 +5802,7 @@
         </p:nvGrpSpPr>
         <p:grpSpPr>
           <a:xfrm>
-            <a:off x="8806200" y="2123402"/>
+            <a:off x="8806200" y="1429131"/>
             <a:ext cx="3041041" cy="2579884"/>
             <a:chOff x="8594740" y="3240973"/>
             <a:chExt cx="3041041" cy="2579884"/>
@@ -7363,8 +7693,8 @@
           </a:p>
         </p:txBody>
       </p:sp>
-      <mc:AlternateContent xmlns:mc="http://schemas.openxmlformats.org/markup-compatibility/2006">
-        <mc:Choice xmlns:a14="http://schemas.microsoft.com/office/drawing/2010/main" Requires="a14">
+      <mc:AlternateContent xmlns:mc="http://schemas.openxmlformats.org/markup-compatibility/2006" xmlns:a14="http://schemas.microsoft.com/office/drawing/2010/main">
+        <mc:Choice Requires="a14">
           <p:sp>
             <p:nvSpPr>
               <p:cNvPr id="3" name="Inhaltsplatzhalter 2">
@@ -7863,7 +8193,7 @@
             </p:txBody>
           </p:sp>
         </mc:Choice>
-        <mc:Fallback>
+        <mc:Fallback xmlns="">
           <p:sp>
             <p:nvSpPr>
               <p:cNvPr id="3" name="Inhaltsplatzhalter 2">
@@ -8620,8 +8950,8 @@
           </a:p>
         </p:txBody>
       </p:sp>
-      <mc:AlternateContent xmlns:mc="http://schemas.openxmlformats.org/markup-compatibility/2006">
-        <mc:Choice xmlns:a14="http://schemas.microsoft.com/office/drawing/2010/main" Requires="a14">
+      <mc:AlternateContent xmlns:mc="http://schemas.openxmlformats.org/markup-compatibility/2006" xmlns:a14="http://schemas.microsoft.com/office/drawing/2010/main">
+        <mc:Choice Requires="a14">
           <p:sp>
             <p:nvSpPr>
               <p:cNvPr id="3" name="Inhaltsplatzhalter 2">
@@ -8961,7 +9291,7 @@
             </p:txBody>
           </p:sp>
         </mc:Choice>
-        <mc:Fallback>
+        <mc:Fallback xmlns="">
           <p:sp>
             <p:nvSpPr>
               <p:cNvPr id="3" name="Inhaltsplatzhalter 2">
@@ -9699,8 +10029,8 @@
           </p:style>
         </p:cxnSp>
       </p:grpSp>
-      <mc:AlternateContent xmlns:mc="http://schemas.openxmlformats.org/markup-compatibility/2006">
-        <mc:Choice xmlns:a14="http://schemas.microsoft.com/office/drawing/2010/main" Requires="a14">
+      <mc:AlternateContent xmlns:mc="http://schemas.openxmlformats.org/markup-compatibility/2006" xmlns:a14="http://schemas.microsoft.com/office/drawing/2010/main">
+        <mc:Choice Requires="a14">
           <p:sp>
             <p:nvSpPr>
               <p:cNvPr id="19" name="TextBox 34">
@@ -9750,7 +10080,7 @@
             </p:txBody>
           </p:sp>
         </mc:Choice>
-        <mc:Fallback>
+        <mc:Fallback xmlns="">
           <p:sp>
             <p:nvSpPr>
               <p:cNvPr id="19" name="TextBox 34">
@@ -9795,8 +10125,8 @@
           </p:sp>
         </mc:Fallback>
       </mc:AlternateContent>
-      <mc:AlternateContent xmlns:mc="http://schemas.openxmlformats.org/markup-compatibility/2006">
-        <mc:Choice xmlns:a14="http://schemas.microsoft.com/office/drawing/2010/main" Requires="a14">
+      <mc:AlternateContent xmlns:mc="http://schemas.openxmlformats.org/markup-compatibility/2006" xmlns:a14="http://schemas.microsoft.com/office/drawing/2010/main">
+        <mc:Choice Requires="a14">
           <p:sp>
             <p:nvSpPr>
               <p:cNvPr id="20" name="TextBox 35">
@@ -9846,7 +10176,7 @@
             </p:txBody>
           </p:sp>
         </mc:Choice>
-        <mc:Fallback>
+        <mc:Fallback xmlns="">
           <p:sp>
             <p:nvSpPr>
               <p:cNvPr id="20" name="TextBox 35">
@@ -9891,8 +10221,8 @@
           </p:sp>
         </mc:Fallback>
       </mc:AlternateContent>
-      <mc:AlternateContent xmlns:mc="http://schemas.openxmlformats.org/markup-compatibility/2006">
-        <mc:Choice xmlns:a14="http://schemas.microsoft.com/office/drawing/2010/main" Requires="a14">
+      <mc:AlternateContent xmlns:mc="http://schemas.openxmlformats.org/markup-compatibility/2006" xmlns:a14="http://schemas.microsoft.com/office/drawing/2010/main">
+        <mc:Choice Requires="a14">
           <p:sp>
             <p:nvSpPr>
               <p:cNvPr id="21" name="TextBox 36">
@@ -9942,7 +10272,7 @@
             </p:txBody>
           </p:sp>
         </mc:Choice>
-        <mc:Fallback>
+        <mc:Fallback xmlns="">
           <p:sp>
             <p:nvSpPr>
               <p:cNvPr id="21" name="TextBox 36">
@@ -9987,8 +10317,8 @@
           </p:sp>
         </mc:Fallback>
       </mc:AlternateContent>
-      <mc:AlternateContent xmlns:mc="http://schemas.openxmlformats.org/markup-compatibility/2006">
-        <mc:Choice xmlns:a14="http://schemas.microsoft.com/office/drawing/2010/main" Requires="a14">
+      <mc:AlternateContent xmlns:mc="http://schemas.openxmlformats.org/markup-compatibility/2006" xmlns:a14="http://schemas.microsoft.com/office/drawing/2010/main">
+        <mc:Choice Requires="a14">
           <p:sp>
             <p:nvSpPr>
               <p:cNvPr id="22" name="TextBox 37">
@@ -10038,7 +10368,7 @@
             </p:txBody>
           </p:sp>
         </mc:Choice>
-        <mc:Fallback>
+        <mc:Fallback xmlns="">
           <p:sp>
             <p:nvSpPr>
               <p:cNvPr id="22" name="TextBox 37">
@@ -10083,8 +10413,8 @@
           </p:sp>
         </mc:Fallback>
       </mc:AlternateContent>
-      <mc:AlternateContent xmlns:mc="http://schemas.openxmlformats.org/markup-compatibility/2006">
-        <mc:Choice xmlns:a14="http://schemas.microsoft.com/office/drawing/2010/main" Requires="a14">
+      <mc:AlternateContent xmlns:mc="http://schemas.openxmlformats.org/markup-compatibility/2006" xmlns:a14="http://schemas.microsoft.com/office/drawing/2010/main">
+        <mc:Choice Requires="a14">
           <p:sp>
             <p:nvSpPr>
               <p:cNvPr id="23" name="TextBox 38">
@@ -10134,7 +10464,7 @@
             </p:txBody>
           </p:sp>
         </mc:Choice>
-        <mc:Fallback>
+        <mc:Fallback xmlns="">
           <p:sp>
             <p:nvSpPr>
               <p:cNvPr id="23" name="TextBox 38">
@@ -10179,8 +10509,8 @@
           </p:sp>
         </mc:Fallback>
       </mc:AlternateContent>
-      <mc:AlternateContent xmlns:mc="http://schemas.openxmlformats.org/markup-compatibility/2006">
-        <mc:Choice xmlns:a14="http://schemas.microsoft.com/office/drawing/2010/main" Requires="a14">
+      <mc:AlternateContent xmlns:mc="http://schemas.openxmlformats.org/markup-compatibility/2006" xmlns:a14="http://schemas.microsoft.com/office/drawing/2010/main">
+        <mc:Choice Requires="a14">
           <p:sp>
             <p:nvSpPr>
               <p:cNvPr id="24" name="TextBox 39">
@@ -10230,7 +10560,7 @@
             </p:txBody>
           </p:sp>
         </mc:Choice>
-        <mc:Fallback>
+        <mc:Fallback xmlns="">
           <p:sp>
             <p:nvSpPr>
               <p:cNvPr id="24" name="TextBox 39">
@@ -10412,8 +10742,8 @@
           </a:p>
         </p:txBody>
       </p:sp>
-      <mc:AlternateContent xmlns:mc="http://schemas.openxmlformats.org/markup-compatibility/2006">
-        <mc:Choice xmlns:a14="http://schemas.microsoft.com/office/drawing/2010/main" Requires="a14">
+      <mc:AlternateContent xmlns:mc="http://schemas.openxmlformats.org/markup-compatibility/2006" xmlns:a14="http://schemas.microsoft.com/office/drawing/2010/main">
+        <mc:Choice Requires="a14">
           <p:sp>
             <p:nvSpPr>
               <p:cNvPr id="3" name="Inhaltsplatzhalter 2">
@@ -10756,7 +11086,7 @@
             </p:txBody>
           </p:sp>
         </mc:Choice>
-        <mc:Fallback>
+        <mc:Fallback xmlns="">
           <p:sp>
             <p:nvSpPr>
               <p:cNvPr id="3" name="Inhaltsplatzhalter 2">
@@ -10859,8 +11189,8 @@
           <a:chExt cx="0" cy="0"/>
         </a:xfrm>
       </p:grpSpPr>
-      <mc:AlternateContent xmlns:mc="http://schemas.openxmlformats.org/markup-compatibility/2006">
-        <mc:Choice xmlns:a14="http://schemas.microsoft.com/office/drawing/2010/main" Requires="a14">
+      <mc:AlternateContent xmlns:mc="http://schemas.openxmlformats.org/markup-compatibility/2006" xmlns:a14="http://schemas.microsoft.com/office/drawing/2010/main">
+        <mc:Choice Requires="a14">
           <p:sp>
             <p:nvSpPr>
               <p:cNvPr id="2" name="Titel 1">
@@ -10905,7 +11235,7 @@
             </p:txBody>
           </p:sp>
         </mc:Choice>
-        <mc:Fallback>
+        <mc:Fallback xmlns="">
           <p:sp>
             <p:nvSpPr>
               <p:cNvPr id="2" name="Titel 1">
@@ -10945,8 +11275,8 @@
           </p:sp>
         </mc:Fallback>
       </mc:AlternateContent>
-      <mc:AlternateContent xmlns:mc="http://schemas.openxmlformats.org/markup-compatibility/2006">
-        <mc:Choice xmlns:a14="http://schemas.microsoft.com/office/drawing/2010/main" Requires="a14">
+      <mc:AlternateContent xmlns:mc="http://schemas.openxmlformats.org/markup-compatibility/2006" xmlns:a14="http://schemas.microsoft.com/office/drawing/2010/main">
+        <mc:Choice Requires="a14">
           <p:sp>
             <p:nvSpPr>
               <p:cNvPr id="3" name="Inhaltsplatzhalter 2">
@@ -11771,7 +12101,7 @@
             </p:txBody>
           </p:sp>
         </mc:Choice>
-        <mc:Fallback>
+        <mc:Fallback xmlns="">
           <p:sp>
             <p:nvSpPr>
               <p:cNvPr id="3" name="Inhaltsplatzhalter 2">
@@ -11903,8 +12233,8 @@
           </a:p>
         </p:txBody>
       </p:sp>
-      <mc:AlternateContent xmlns:mc="http://schemas.openxmlformats.org/markup-compatibility/2006">
-        <mc:Choice xmlns:a14="http://schemas.microsoft.com/office/drawing/2010/main" Requires="a14">
+      <mc:AlternateContent xmlns:mc="http://schemas.openxmlformats.org/markup-compatibility/2006" xmlns:a14="http://schemas.microsoft.com/office/drawing/2010/main">
+        <mc:Choice Requires="a14">
           <p:sp>
             <p:nvSpPr>
               <p:cNvPr id="3" name="Inhaltsplatzhalter 2">
@@ -12703,7 +13033,7 @@
             </p:txBody>
           </p:sp>
         </mc:Choice>
-        <mc:Fallback>
+        <mc:Fallback xmlns="">
           <p:sp>
             <p:nvSpPr>
               <p:cNvPr id="3" name="Inhaltsplatzhalter 2">
@@ -13214,8 +13544,8 @@
           </p:style>
         </p:cxnSp>
       </p:grpSp>
-      <mc:AlternateContent xmlns:mc="http://schemas.openxmlformats.org/markup-compatibility/2006">
-        <mc:Choice xmlns:a14="http://schemas.microsoft.com/office/drawing/2010/main" Requires="a14">
+      <mc:AlternateContent xmlns:mc="http://schemas.openxmlformats.org/markup-compatibility/2006" xmlns:a14="http://schemas.microsoft.com/office/drawing/2010/main">
+        <mc:Choice Requires="a14">
           <p:sp>
             <p:nvSpPr>
               <p:cNvPr id="14" name="TextBox 23">
@@ -13265,7 +13595,7 @@
             </p:txBody>
           </p:sp>
         </mc:Choice>
-        <mc:Fallback>
+        <mc:Fallback xmlns="">
           <p:sp>
             <p:nvSpPr>
               <p:cNvPr id="14" name="TextBox 23">
@@ -13310,8 +13640,8 @@
           </p:sp>
         </mc:Fallback>
       </mc:AlternateContent>
-      <mc:AlternateContent xmlns:mc="http://schemas.openxmlformats.org/markup-compatibility/2006">
-        <mc:Choice xmlns:a14="http://schemas.microsoft.com/office/drawing/2010/main" Requires="a14">
+      <mc:AlternateContent xmlns:mc="http://schemas.openxmlformats.org/markup-compatibility/2006" xmlns:a14="http://schemas.microsoft.com/office/drawing/2010/main">
+        <mc:Choice Requires="a14">
           <p:sp>
             <p:nvSpPr>
               <p:cNvPr id="15" name="TextBox 24">
@@ -13361,7 +13691,7 @@
             </p:txBody>
           </p:sp>
         </mc:Choice>
-        <mc:Fallback>
+        <mc:Fallback xmlns="">
           <p:sp>
             <p:nvSpPr>
               <p:cNvPr id="15" name="TextBox 24">
@@ -13406,8 +13736,8 @@
           </p:sp>
         </mc:Fallback>
       </mc:AlternateContent>
-      <mc:AlternateContent xmlns:mc="http://schemas.openxmlformats.org/markup-compatibility/2006">
-        <mc:Choice xmlns:a14="http://schemas.microsoft.com/office/drawing/2010/main" Requires="a14">
+      <mc:AlternateContent xmlns:mc="http://schemas.openxmlformats.org/markup-compatibility/2006" xmlns:a14="http://schemas.microsoft.com/office/drawing/2010/main">
+        <mc:Choice Requires="a14">
           <p:sp>
             <p:nvSpPr>
               <p:cNvPr id="16" name="TextBox 25">
@@ -13457,7 +13787,7 @@
             </p:txBody>
           </p:sp>
         </mc:Choice>
-        <mc:Fallback>
+        <mc:Fallback xmlns="">
           <p:sp>
             <p:nvSpPr>
               <p:cNvPr id="16" name="TextBox 25">
@@ -13502,8 +13832,8 @@
           </p:sp>
         </mc:Fallback>
       </mc:AlternateContent>
-      <mc:AlternateContent xmlns:mc="http://schemas.openxmlformats.org/markup-compatibility/2006">
-        <mc:Choice xmlns:a14="http://schemas.microsoft.com/office/drawing/2010/main" Requires="a14">
+      <mc:AlternateContent xmlns:mc="http://schemas.openxmlformats.org/markup-compatibility/2006" xmlns:a14="http://schemas.microsoft.com/office/drawing/2010/main">
+        <mc:Choice Requires="a14">
           <p:sp>
             <p:nvSpPr>
               <p:cNvPr id="17" name="TextBox 26">
@@ -13553,7 +13883,7 @@
             </p:txBody>
           </p:sp>
         </mc:Choice>
-        <mc:Fallback>
+        <mc:Fallback xmlns="">
           <p:sp>
             <p:nvSpPr>
               <p:cNvPr id="17" name="TextBox 26">
@@ -13598,8 +13928,8 @@
           </p:sp>
         </mc:Fallback>
       </mc:AlternateContent>
-      <mc:AlternateContent xmlns:mc="http://schemas.openxmlformats.org/markup-compatibility/2006">
-        <mc:Choice xmlns:a14="http://schemas.microsoft.com/office/drawing/2010/main" Requires="a14">
+      <mc:AlternateContent xmlns:mc="http://schemas.openxmlformats.org/markup-compatibility/2006" xmlns:a14="http://schemas.microsoft.com/office/drawing/2010/main">
+        <mc:Choice Requires="a14">
           <p:sp>
             <p:nvSpPr>
               <p:cNvPr id="18" name="TextBox 27">
@@ -13665,7 +13995,7 @@
             </p:txBody>
           </p:sp>
         </mc:Choice>
-        <mc:Fallback>
+        <mc:Fallback xmlns="">
           <p:sp>
             <p:nvSpPr>
               <p:cNvPr id="18" name="TextBox 27">
@@ -14037,8 +14367,8 @@
           </a:p>
         </p:txBody>
       </p:sp>
-      <mc:AlternateContent xmlns:mc="http://schemas.openxmlformats.org/markup-compatibility/2006">
-        <mc:Choice xmlns:a14="http://schemas.microsoft.com/office/drawing/2010/main" Requires="a14">
+      <mc:AlternateContent xmlns:mc="http://schemas.openxmlformats.org/markup-compatibility/2006" xmlns:a14="http://schemas.microsoft.com/office/drawing/2010/main">
+        <mc:Choice Requires="a14">
           <p:sp>
             <p:nvSpPr>
               <p:cNvPr id="3" name="Inhaltsplatzhalter 2">
@@ -14322,7 +14652,7 @@
             </p:txBody>
           </p:sp>
         </mc:Choice>
-        <mc:Fallback>
+        <mc:Fallback xmlns="">
           <p:sp>
             <p:nvSpPr>
               <p:cNvPr id="3" name="Inhaltsplatzhalter 2">
@@ -14654,8 +14984,8 @@
           </a:p>
         </p:txBody>
       </p:sp>
-      <mc:AlternateContent xmlns:mc="http://schemas.openxmlformats.org/markup-compatibility/2006">
-        <mc:Choice xmlns:a14="http://schemas.microsoft.com/office/drawing/2010/main" Requires="a14">
+      <mc:AlternateContent xmlns:mc="http://schemas.openxmlformats.org/markup-compatibility/2006" xmlns:a14="http://schemas.microsoft.com/office/drawing/2010/main">
+        <mc:Choice Requires="a14">
           <p:sp>
             <p:nvSpPr>
               <p:cNvPr id="3" name="Inhaltsplatzhalter 2">
@@ -15252,7 +15582,7 @@
             </p:txBody>
           </p:sp>
         </mc:Choice>
-        <mc:Fallback>
+        <mc:Fallback xmlns="">
           <p:sp>
             <p:nvSpPr>
               <p:cNvPr id="3" name="Inhaltsplatzhalter 2">
@@ -15946,8 +16276,8 @@
           </mc:Fallback>
         </mc:AlternateContent>
       </p:grpSp>
-      <mc:AlternateContent xmlns:mc="http://schemas.openxmlformats.org/markup-compatibility/2006">
-        <mc:Choice xmlns:a14="http://schemas.microsoft.com/office/drawing/2010/main" Requires="a14">
+      <mc:AlternateContent xmlns:mc="http://schemas.openxmlformats.org/markup-compatibility/2006" xmlns:a14="http://schemas.microsoft.com/office/drawing/2010/main">
+        <mc:Choice Requires="a14">
           <p:sp>
             <p:nvSpPr>
               <p:cNvPr id="15" name="TextBox 24">
@@ -15999,7 +16329,7 @@
             </p:txBody>
           </p:sp>
         </mc:Choice>
-        <mc:Fallback>
+        <mc:Fallback xmlns="">
           <p:sp>
             <p:nvSpPr>
               <p:cNvPr id="15" name="TextBox 24">
@@ -16108,8 +16438,8 @@
           </a:p>
         </p:txBody>
       </p:sp>
-      <mc:AlternateContent xmlns:mc="http://schemas.openxmlformats.org/markup-compatibility/2006">
-        <mc:Choice xmlns:a14="http://schemas.microsoft.com/office/drawing/2010/main" Requires="a14">
+      <mc:AlternateContent xmlns:mc="http://schemas.openxmlformats.org/markup-compatibility/2006" xmlns:a14="http://schemas.microsoft.com/office/drawing/2010/main">
+        <mc:Choice Requires="a14">
           <p:sp>
             <p:nvSpPr>
               <p:cNvPr id="3" name="Inhaltsplatzhalter 2">
@@ -16565,7 +16895,7 @@
             </p:txBody>
           </p:sp>
         </mc:Choice>
-        <mc:Fallback>
+        <mc:Fallback xmlns="">
           <p:sp>
             <p:nvSpPr>
               <p:cNvPr id="3" name="Inhaltsplatzhalter 2">
@@ -17009,8 +17339,8 @@
           </a:p>
         </p:txBody>
       </p:sp>
-      <mc:AlternateContent xmlns:mc="http://schemas.openxmlformats.org/markup-compatibility/2006">
-        <mc:Choice xmlns:a14="http://schemas.microsoft.com/office/drawing/2010/main" Requires="a14">
+      <mc:AlternateContent xmlns:mc="http://schemas.openxmlformats.org/markup-compatibility/2006" xmlns:a14="http://schemas.microsoft.com/office/drawing/2010/main">
+        <mc:Choice Requires="a14">
           <p:sp>
             <p:nvSpPr>
               <p:cNvPr id="3" name="Inhaltsplatzhalter 2">
@@ -17736,7 +18066,7 @@
             </p:txBody>
           </p:sp>
         </mc:Choice>
-        <mc:Fallback>
+        <mc:Fallback xmlns="">
           <p:sp>
             <p:nvSpPr>
               <p:cNvPr id="3" name="Inhaltsplatzhalter 2">
@@ -17809,8 +18139,8 @@
           </a:p>
         </p:txBody>
       </p:sp>
-      <mc:AlternateContent xmlns:mc="http://schemas.openxmlformats.org/markup-compatibility/2006">
-        <mc:Choice xmlns:a14="http://schemas.microsoft.com/office/drawing/2010/main" Requires="a14">
+      <mc:AlternateContent xmlns:mc="http://schemas.openxmlformats.org/markup-compatibility/2006" xmlns:a14="http://schemas.microsoft.com/office/drawing/2010/main">
+        <mc:Choice Requires="a14">
           <p:sp>
             <p:nvSpPr>
               <p:cNvPr id="5" name="TextBox 3">
@@ -18051,7 +18381,7 @@
             </p:txBody>
           </p:sp>
         </mc:Choice>
-        <mc:Fallback>
+        <mc:Fallback xmlns="">
           <p:sp>
             <p:nvSpPr>
               <p:cNvPr id="5" name="TextBox 3">
@@ -19981,7 +20311,7 @@
         </p:nvSpPr>
         <p:spPr>
           <a:xfrm>
-            <a:off x="1099955" y="3621663"/>
+            <a:off x="1044136" y="3700353"/>
             <a:ext cx="962764" cy="323165"/>
           </a:xfrm>
           <a:prstGeom prst="rect">
@@ -20557,6 +20887,303 @@
           </a:p>
         </p:txBody>
       </p:sp>
+      <p:sp>
+        <p:nvSpPr>
+          <p:cNvPr id="3" name="Textfeld 2">
+            <a:extLst>
+              <a:ext uri="{FF2B5EF4-FFF2-40B4-BE49-F238E27FC236}">
+                <a16:creationId xmlns:a16="http://schemas.microsoft.com/office/drawing/2014/main" id="{9918DAE5-D993-0924-1A55-8750803B894C}"/>
+              </a:ext>
+            </a:extLst>
+          </p:cNvPr>
+          <p:cNvSpPr txBox="1"/>
+          <p:nvPr/>
+        </p:nvSpPr>
+        <p:spPr>
+          <a:xfrm>
+            <a:off x="3923848" y="4659999"/>
+            <a:ext cx="4355164" cy="369332"/>
+          </a:xfrm>
+          <a:prstGeom prst="rect">
+            <a:avLst/>
+          </a:prstGeom>
+          <a:noFill/>
+        </p:spPr>
+        <p:txBody>
+          <a:bodyPr wrap="square" rtlCol="0">
+            <a:spAutoFit/>
+          </a:bodyPr>
+          <a:lstStyle/>
+          <a:p>
+            <a:r>
+              <a:rPr lang="de-DE" i="1" dirty="0" err="1"/>
+              <a:t>Which</a:t>
+            </a:r>
+            <a:r>
+              <a:rPr lang="de-DE" i="1" dirty="0"/>
+              <a:t> </a:t>
+            </a:r>
+            <a:r>
+              <a:rPr lang="de-DE" i="1" dirty="0" err="1"/>
+              <a:t>causal</a:t>
+            </a:r>
+            <a:r>
+              <a:rPr lang="de-DE" i="1" dirty="0"/>
+              <a:t> </a:t>
+            </a:r>
+            <a:r>
+              <a:rPr lang="de-DE" i="1" dirty="0" err="1"/>
+              <a:t>structure</a:t>
+            </a:r>
+            <a:r>
+              <a:rPr lang="de-DE" i="1" dirty="0"/>
+              <a:t> </a:t>
+            </a:r>
+            <a:r>
+              <a:rPr lang="de-DE" i="1" dirty="0" err="1"/>
+              <a:t>is</a:t>
+            </a:r>
+            <a:r>
+              <a:rPr lang="de-DE" i="1" dirty="0"/>
+              <a:t> </a:t>
+            </a:r>
+            <a:r>
+              <a:rPr lang="de-DE" i="1" dirty="0" err="1"/>
+              <a:t>behind</a:t>
+            </a:r>
+            <a:r>
+              <a:rPr lang="de-DE" i="1" dirty="0"/>
+              <a:t> </a:t>
+            </a:r>
+            <a:r>
+              <a:rPr lang="de-DE" i="1" dirty="0" err="1"/>
+              <a:t>the</a:t>
+            </a:r>
+            <a:r>
+              <a:rPr lang="de-DE" i="1" dirty="0"/>
+              <a:t> </a:t>
+            </a:r>
+            <a:r>
+              <a:rPr lang="de-DE" i="1" dirty="0" err="1"/>
+              <a:t>data</a:t>
+            </a:r>
+            <a:r>
+              <a:rPr lang="de-DE" i="1" dirty="0"/>
+              <a:t>?</a:t>
+            </a:r>
+          </a:p>
+        </p:txBody>
+      </p:sp>
+      <p:sp>
+        <p:nvSpPr>
+          <p:cNvPr id="23" name="Textfeld 22">
+            <a:extLst>
+              <a:ext uri="{FF2B5EF4-FFF2-40B4-BE49-F238E27FC236}">
+                <a16:creationId xmlns:a16="http://schemas.microsoft.com/office/drawing/2014/main" id="{5106AC8C-B6C1-72E7-FEBC-1CDB9758121B}"/>
+              </a:ext>
+            </a:extLst>
+          </p:cNvPr>
+          <p:cNvSpPr txBox="1"/>
+          <p:nvPr/>
+        </p:nvSpPr>
+        <p:spPr>
+          <a:xfrm>
+            <a:off x="5200336" y="2581825"/>
+            <a:ext cx="2599008" cy="369331"/>
+          </a:xfrm>
+          <a:prstGeom prst="rect">
+            <a:avLst/>
+          </a:prstGeom>
+          <a:noFill/>
+        </p:spPr>
+        <p:txBody>
+          <a:bodyPr wrap="square">
+            <a:spAutoFit/>
+          </a:bodyPr>
+          <a:lstStyle/>
+          <a:p>
+            <a:r>
+              <a:rPr lang="de-DE" i="1" dirty="0" err="1">
+                <a:sym typeface="Wingdings" panose="05000000000000000000" pitchFamily="2" charset="2"/>
+              </a:rPr>
+              <a:t>What</a:t>
+            </a:r>
+            <a:r>
+              <a:rPr lang="de-DE" i="1" dirty="0">
+                <a:sym typeface="Wingdings" panose="05000000000000000000" pitchFamily="2" charset="2"/>
+              </a:rPr>
+              <a:t> will happen?</a:t>
+            </a:r>
+            <a:endParaRPr lang="de-DE" i="1" dirty="0"/>
+          </a:p>
+        </p:txBody>
+      </p:sp>
+      <p:sp>
+        <p:nvSpPr>
+          <p:cNvPr id="27" name="Textfeld 26">
+            <a:extLst>
+              <a:ext uri="{FF2B5EF4-FFF2-40B4-BE49-F238E27FC236}">
+                <a16:creationId xmlns:a16="http://schemas.microsoft.com/office/drawing/2014/main" id="{841113D8-D342-04A3-69C0-071AF6F143BF}"/>
+              </a:ext>
+            </a:extLst>
+          </p:cNvPr>
+          <p:cNvSpPr txBox="1"/>
+          <p:nvPr/>
+        </p:nvSpPr>
+        <p:spPr>
+          <a:xfrm>
+            <a:off x="4861653" y="5796358"/>
+            <a:ext cx="6096000" cy="923330"/>
+          </a:xfrm>
+          <a:prstGeom prst="rect">
+            <a:avLst/>
+          </a:prstGeom>
+          <a:noFill/>
+        </p:spPr>
+        <p:txBody>
+          <a:bodyPr wrap="square">
+            <a:spAutoFit/>
+          </a:bodyPr>
+          <a:lstStyle/>
+          <a:p>
+            <a:r>
+              <a:rPr lang="de-DE" i="1" dirty="0" err="1"/>
+              <a:t>Probabilistic</a:t>
+            </a:r>
+            <a:r>
+              <a:rPr lang="de-DE" i="1" dirty="0"/>
+              <a:t> </a:t>
+            </a:r>
+            <a:r>
+              <a:rPr lang="de-DE" i="1" dirty="0" err="1"/>
+              <a:t>models</a:t>
+            </a:r>
+            <a:r>
+              <a:rPr lang="de-DE" i="1" dirty="0"/>
+              <a:t> </a:t>
+            </a:r>
+            <a:r>
+              <a:rPr lang="de-DE" i="1" dirty="0" err="1"/>
+              <a:t>describe</a:t>
+            </a:r>
+            <a:r>
+              <a:rPr lang="de-DE" i="1" dirty="0"/>
+              <a:t> </a:t>
+            </a:r>
+            <a:r>
+              <a:rPr lang="de-DE" i="1" dirty="0" err="1"/>
+              <a:t>patterns</a:t>
+            </a:r>
+            <a:r>
+              <a:rPr lang="de-DE" i="1" dirty="0"/>
+              <a:t> in </a:t>
+            </a:r>
+            <a:r>
+              <a:rPr lang="de-DE" i="1" dirty="0" err="1"/>
+              <a:t>observed</a:t>
+            </a:r>
+            <a:r>
+              <a:rPr lang="de-DE" i="1" dirty="0"/>
+              <a:t> </a:t>
+            </a:r>
+            <a:r>
+              <a:rPr lang="de-DE" i="1" dirty="0" err="1"/>
+              <a:t>data</a:t>
+            </a:r>
+            <a:r>
+              <a:rPr lang="de-DE" i="1" dirty="0"/>
+              <a:t>. </a:t>
+            </a:r>
+            <a:r>
+              <a:rPr lang="de-DE" i="1" dirty="0" err="1"/>
+              <a:t>Causal</a:t>
+            </a:r>
+            <a:r>
+              <a:rPr lang="de-DE" i="1" dirty="0"/>
+              <a:t> </a:t>
+            </a:r>
+            <a:r>
+              <a:rPr lang="de-DE" i="1" dirty="0" err="1"/>
+              <a:t>models</a:t>
+            </a:r>
+            <a:r>
+              <a:rPr lang="de-DE" i="1" dirty="0"/>
+              <a:t> </a:t>
+            </a:r>
+            <a:r>
+              <a:rPr lang="de-DE" i="1" dirty="0" err="1"/>
+              <a:t>describe</a:t>
+            </a:r>
+            <a:r>
+              <a:rPr lang="de-DE" i="1" dirty="0"/>
+              <a:t> </a:t>
+            </a:r>
+            <a:r>
+              <a:rPr lang="de-DE" i="1" dirty="0" err="1"/>
+              <a:t>cause</a:t>
+            </a:r>
+            <a:r>
+              <a:rPr lang="de-DE" i="1" dirty="0"/>
+              <a:t>-and-</a:t>
+            </a:r>
+            <a:r>
+              <a:rPr lang="de-DE" i="1" dirty="0" err="1"/>
+              <a:t>effect</a:t>
+            </a:r>
+            <a:r>
+              <a:rPr lang="de-DE" i="1" dirty="0"/>
+              <a:t> </a:t>
+            </a:r>
+            <a:r>
+              <a:rPr lang="de-DE" i="1" dirty="0" err="1"/>
+              <a:t>relationships</a:t>
+            </a:r>
+            <a:r>
+              <a:rPr lang="de-DE" i="1" dirty="0"/>
+              <a:t> </a:t>
+            </a:r>
+            <a:br>
+              <a:rPr lang="de-DE" i="1" dirty="0"/>
+            </a:br>
+            <a:r>
+              <a:rPr lang="de-DE" i="1" dirty="0"/>
+              <a:t>and also </a:t>
+            </a:r>
+            <a:r>
+              <a:rPr lang="de-DE" i="1" dirty="0" err="1"/>
+              <a:t>allow</a:t>
+            </a:r>
+            <a:r>
+              <a:rPr lang="de-DE" i="1" dirty="0"/>
+              <a:t> </a:t>
+            </a:r>
+            <a:r>
+              <a:rPr lang="de-DE" i="1" dirty="0" err="1"/>
+              <a:t>for</a:t>
+            </a:r>
+            <a:r>
+              <a:rPr lang="de-DE" i="1" dirty="0"/>
+              <a:t> </a:t>
+            </a:r>
+            <a:r>
+              <a:rPr lang="de-DE" i="1" dirty="0" err="1"/>
+              <a:t>interventions</a:t>
+            </a:r>
+            <a:r>
+              <a:rPr lang="de-DE" i="1" dirty="0"/>
+              <a:t> and </a:t>
+            </a:r>
+            <a:r>
+              <a:rPr lang="de-DE" i="1" dirty="0" err="1"/>
+              <a:t>counterfactuals</a:t>
+            </a:r>
+            <a:r>
+              <a:rPr lang="de-DE" i="1" dirty="0"/>
+              <a:t>.</a:t>
+            </a:r>
+          </a:p>
+        </p:txBody>
+      </p:sp>
     </p:spTree>
     <p:extLst>
       <p:ext uri="{BB962C8B-B14F-4D97-AF65-F5344CB8AC3E}">
@@ -20649,7 +21276,14 @@
             </a:pPr>
             <a:r>
               <a:rPr lang="en-US" dirty="0"/>
-              <a:t>Directed Acyclic Graph (DAG): random variables (nodes) and their (conditional) dependencies (edges)</a:t>
+              <a:t>Directed Acyclic Graph (DAG): </a:t>
+            </a:r>
+            <a:br>
+              <a:rPr lang="en-US" dirty="0"/>
+            </a:br>
+            <a:r>
+              <a:rPr lang="en-US" dirty="0"/>
+              <a:t>random variables (nodes) and their (conditional) dependencies (edges)</a:t>
             </a:r>
             <a:endParaRPr lang="de-DE" dirty="0"/>
           </a:p>
@@ -20664,7 +21298,7 @@
               <a:buNone/>
             </a:pPr>
             <a:r>
-              <a:rPr lang="en-DE"/>
+              <a:rPr lang="en-DE" dirty="0"/>
               <a:t>Bayesian network: DAG</a:t>
             </a:r>
             <a:r>
@@ -21074,9 +21708,16 @@
                 <p:ph idx="1"/>
               </p:nvPr>
             </p:nvSpPr>
-            <p:spPr/>
+            <p:spPr>
+              <a:xfrm>
+                <a:off x="838199" y="1825625"/>
+                <a:ext cx="10716491" cy="4351338"/>
+              </a:xfrm>
+            </p:spPr>
             <p:txBody>
-              <a:bodyPr/>
+              <a:bodyPr>
+                <a:normAutofit/>
+              </a:bodyPr>
               <a:lstStyle/>
               <a:p>
                 <a:pPr marL="0" indent="0">
@@ -21321,6 +21962,61 @@
                 <a:endParaRPr lang="de-DE" dirty="0"/>
               </a:p>
               <a:p>
+                <a:pPr>
+                  <a:buFont typeface="Wingdings" panose="05000000000000000000" pitchFamily="2" charset="2"/>
+                  <a:buChar char="à"/>
+                </a:pPr>
+                <a:r>
+                  <a:rPr lang="de-DE" dirty="0"/>
+                  <a:t> </a:t>
+                </a:r>
+                <a:r>
+                  <a:rPr lang="de-DE" dirty="0" err="1"/>
+                  <a:t>compact</a:t>
+                </a:r>
+                <a:r>
+                  <a:rPr lang="de-DE" dirty="0"/>
+                  <a:t> </a:t>
+                </a:r>
+                <a:r>
+                  <a:rPr lang="de-DE" dirty="0" err="1"/>
+                  <a:t>representation</a:t>
+                </a:r>
+                <a:r>
+                  <a:rPr lang="de-DE" dirty="0"/>
+                  <a:t> </a:t>
+                </a:r>
+                <a:r>
+                  <a:rPr lang="de-DE" dirty="0" err="1"/>
+                  <a:t>of</a:t>
+                </a:r>
+                <a:r>
+                  <a:rPr lang="de-DE" dirty="0"/>
+                  <a:t> </a:t>
+                </a:r>
+                <a:r>
+                  <a:rPr lang="de-DE" dirty="0" err="1"/>
+                  <a:t>conditional</a:t>
+                </a:r>
+                <a:r>
+                  <a:rPr lang="de-DE" dirty="0"/>
+                  <a:t> </a:t>
+                </a:r>
+                <a:r>
+                  <a:rPr lang="de-DE" dirty="0" err="1"/>
+                  <a:t>probability</a:t>
+                </a:r>
+                <a:r>
+                  <a:rPr lang="de-DE" dirty="0"/>
+                  <a:t> </a:t>
+                </a:r>
+                <a:r>
+                  <a:rPr lang="de-DE" dirty="0" err="1"/>
+                  <a:t>table</a:t>
+                </a:r>
+                <a:endParaRPr lang="de-DE" dirty="0"/>
+              </a:p>
+              <a:p>
                 <a:pPr marL="0" indent="0">
                   <a:buNone/>
                 </a:pPr>
@@ -21328,7 +22024,19 @@
                   <a:rPr lang="de-DE" dirty="0">
                     <a:sym typeface="Wingdings" pitchFamily="2" charset="2"/>
                   </a:rPr>
-                  <a:t></a:t>
+                  <a:t> </a:t>
+                </a:r>
+                <a:r>
+                  <a:rPr lang="de-DE" dirty="0" err="1"/>
+                  <a:t>without</a:t>
+                </a:r>
+                <a:r>
+                  <a:rPr lang="de-DE" dirty="0"/>
+                  <a:t> DAG, </a:t>
+                </a:r>
+                <a:r>
+                  <a:rPr lang="de-DE" dirty="0" err="1"/>
+                  <a:t>one</a:t>
                 </a:r>
                 <a:r>
                   <a:rPr lang="de-DE" dirty="0"/>
@@ -21336,7 +22044,7 @@
                 </a:r>
                 <a:r>
                   <a:rPr lang="de-DE" dirty="0" err="1"/>
-                  <a:t>compact</a:t>
+                  <a:t>would</a:t>
                 </a:r>
                 <a:r>
                   <a:rPr lang="de-DE" dirty="0"/>
@@ -21344,7 +22052,7 @@
                 </a:r>
                 <a:r>
                   <a:rPr lang="de-DE" dirty="0" err="1"/>
-                  <a:t>representation</a:t>
+                  <a:t>need</a:t>
                 </a:r>
                 <a:r>
                   <a:rPr lang="de-DE" dirty="0"/>
@@ -21352,7 +22060,7 @@
                 </a:r>
                 <a:r>
                   <a:rPr lang="de-DE" dirty="0" err="1"/>
-                  <a:t>of</a:t>
+                  <a:t>to</a:t>
                 </a:r>
                 <a:r>
                   <a:rPr lang="de-DE" dirty="0"/>
@@ -21360,7 +22068,7 @@
                 </a:r>
                 <a:r>
                   <a:rPr lang="de-DE" dirty="0" err="1"/>
-                  <a:t>conditional</a:t>
+                  <a:t>model</a:t>
                 </a:r>
                 <a:r>
                   <a:rPr lang="de-DE" dirty="0"/>
@@ -21368,7 +22076,7 @@
                 </a:r>
                 <a:r>
                   <a:rPr lang="de-DE" dirty="0" err="1"/>
-                  <a:t>probability</a:t>
+                  <a:t>the</a:t>
                 </a:r>
                 <a:r>
                   <a:rPr lang="de-DE" dirty="0"/>
@@ -21376,9 +22084,123 @@
                 </a:r>
                 <a:r>
                   <a:rPr lang="de-DE" dirty="0" err="1"/>
-                  <a:t>table</a:t>
-                </a:r>
-                <a:endParaRPr lang="de-DE" dirty="0"/>
+                  <a:t>entire</a:t>
+                </a:r>
+                <a:r>
+                  <a:rPr lang="de-DE" dirty="0"/>
+                  <a:t> </a:t>
+                </a:r>
+                <a:r>
+                  <a:rPr lang="de-DE" dirty="0" err="1"/>
+                  <a:t>joint</a:t>
+                </a:r>
+                <a:r>
+                  <a:rPr lang="de-DE" dirty="0"/>
+                  <a:t> </a:t>
+                </a:r>
+                <a:r>
+                  <a:rPr lang="de-DE" dirty="0" err="1"/>
+                  <a:t>distribution</a:t>
+                </a:r>
+                <a:r>
+                  <a:rPr lang="de-DE" dirty="0"/>
+                  <a:t> </a:t>
+                </a:r>
+                <a14:m>
+                  <m:oMath xmlns:m="http://schemas.openxmlformats.org/officeDocument/2006/math">
+                    <m:r>
+                      <a:rPr lang="de-DE" i="1">
+                        <a:latin typeface="Cambria Math" panose="02040503050406030204" pitchFamily="18" charset="0"/>
+                      </a:rPr>
+                      <m:t>𝑃</m:t>
+                    </m:r>
+                    <m:d>
+                      <m:dPr>
+                        <m:ctrlPr>
+                          <a:rPr lang="de-DE" i="1">
+                            <a:latin typeface="Cambria Math" panose="02040503050406030204" pitchFamily="18" charset="0"/>
+                          </a:rPr>
+                        </m:ctrlPr>
+                      </m:dPr>
+                      <m:e>
+                        <m:r>
+                          <a:rPr lang="de-DE" i="1">
+                            <a:latin typeface="Cambria Math" panose="02040503050406030204" pitchFamily="18" charset="0"/>
+                          </a:rPr>
+                          <m:t>𝐴</m:t>
+                        </m:r>
+                        <m:r>
+                          <a:rPr lang="de-DE" i="1">
+                            <a:latin typeface="Cambria Math" panose="02040503050406030204" pitchFamily="18" charset="0"/>
+                          </a:rPr>
+                          <m:t>,</m:t>
+                        </m:r>
+                        <m:r>
+                          <a:rPr lang="de-DE" i="1">
+                            <a:latin typeface="Cambria Math" panose="02040503050406030204" pitchFamily="18" charset="0"/>
+                          </a:rPr>
+                          <m:t>𝐵</m:t>
+                        </m:r>
+                        <m:r>
+                          <a:rPr lang="de-DE" i="1">
+                            <a:latin typeface="Cambria Math" panose="02040503050406030204" pitchFamily="18" charset="0"/>
+                          </a:rPr>
+                          <m:t>,</m:t>
+                        </m:r>
+                        <m:r>
+                          <a:rPr lang="de-DE" i="1">
+                            <a:latin typeface="Cambria Math" panose="02040503050406030204" pitchFamily="18" charset="0"/>
+                          </a:rPr>
+                          <m:t>𝐶</m:t>
+                        </m:r>
+                      </m:e>
+                    </m:d>
+                  </m:oMath>
+                </a14:m>
+                <a:r>
+                  <a:rPr lang="de-DE" dirty="0"/>
+                  <a:t>, </a:t>
+                </a:r>
+                <a:r>
+                  <a:rPr lang="de-DE" dirty="0" err="1"/>
+                  <a:t>what</a:t>
+                </a:r>
+                <a:r>
+                  <a:rPr lang="de-DE" dirty="0"/>
+                  <a:t> </a:t>
+                </a:r>
+                <a:r>
+                  <a:rPr lang="de-DE" dirty="0" err="1"/>
+                  <a:t>becomes</a:t>
+                </a:r>
+                <a:r>
+                  <a:rPr lang="de-DE" dirty="0"/>
+                  <a:t> </a:t>
+                </a:r>
+                <a:r>
+                  <a:rPr lang="de-DE" dirty="0" err="1"/>
+                  <a:t>extremely</a:t>
+                </a:r>
+                <a:r>
+                  <a:rPr lang="de-DE" dirty="0"/>
+                  <a:t> large </a:t>
+                </a:r>
+                <a:r>
+                  <a:rPr lang="de-DE" dirty="0" err="1"/>
+                  <a:t>for</a:t>
+                </a:r>
+                <a:r>
+                  <a:rPr lang="de-DE" dirty="0"/>
+                  <a:t> </a:t>
+                </a:r>
+                <a:r>
+                  <a:rPr lang="de-DE" dirty="0" err="1"/>
+                  <a:t>many</a:t>
+                </a:r>
+                <a:r>
+                  <a:rPr lang="de-DE" dirty="0"/>
+                  <a:t> variables</a:t>
+                </a:r>
               </a:p>
             </p:txBody>
           </p:sp>
@@ -21401,10 +22223,14 @@
               </p:nvPr>
             </p:nvSpPr>
             <p:spPr>
+              <a:xfrm>
+                <a:off x="838199" y="1825625"/>
+                <a:ext cx="10716491" cy="4351338"/>
+              </a:xfrm>
               <a:blipFill>
                 <a:blip r:embed="rId2"/>
                 <a:stretch>
-                  <a:fillRect l="-1206" t="-2326"/>
+                  <a:fillRect l="-1065" t="-2326" r="-828" b="-291"/>
                 </a:stretch>
               </a:blipFill>
             </p:spPr>
@@ -21511,8 +22337,8 @@
           </a:p>
         </p:txBody>
       </p:sp>
-      <mc:AlternateContent xmlns:mc="http://schemas.openxmlformats.org/markup-compatibility/2006">
-        <mc:Choice xmlns:a14="http://schemas.microsoft.com/office/drawing/2010/main" Requires="a14">
+      <mc:AlternateContent xmlns:mc="http://schemas.openxmlformats.org/markup-compatibility/2006" xmlns:a14="http://schemas.microsoft.com/office/drawing/2010/main">
+        <mc:Choice Requires="a14">
           <p:sp>
             <p:nvSpPr>
               <p:cNvPr id="3" name="Inhaltsplatzhalter 2">
@@ -22068,7 +22894,7 @@
             </p:txBody>
           </p:sp>
         </mc:Choice>
-        <mc:Fallback>
+        <mc:Fallback xmlns="">
           <p:sp>
             <p:nvSpPr>
               <p:cNvPr id="3" name="Inhaltsplatzhalter 2">
@@ -22662,7 +23488,7 @@
         </p:nvSpPr>
         <p:spPr>
           <a:xfrm>
-            <a:off x="457074" y="5020805"/>
+            <a:off x="457074" y="4309605"/>
             <a:ext cx="2342308" cy="246221"/>
           </a:xfrm>
           <a:prstGeom prst="rect">
@@ -22729,7 +23555,7 @@
         </p:nvSpPr>
         <p:spPr>
           <a:xfrm>
-            <a:off x="457074" y="2640658"/>
+            <a:off x="457074" y="1929458"/>
             <a:ext cx="11191905" cy="523220"/>
           </a:xfrm>
           <a:prstGeom prst="rect">
@@ -22829,7 +23655,7 @@
         </p:nvSpPr>
         <p:spPr>
           <a:xfrm>
-            <a:off x="457074" y="3465375"/>
+            <a:off x="457074" y="2754175"/>
             <a:ext cx="11191904" cy="523220"/>
           </a:xfrm>
           <a:prstGeom prst="rect">
@@ -22913,7 +23739,7 @@
         </p:nvSpPr>
         <p:spPr>
           <a:xfrm>
-            <a:off x="457074" y="4290092"/>
+            <a:off x="457074" y="3578892"/>
             <a:ext cx="11191904" cy="523220"/>
           </a:xfrm>
           <a:prstGeom prst="rect">
@@ -23002,6 +23828,72 @@
               <a:rPr lang="de-DE" sz="2000" dirty="0"/>
               <a:t> ML</a:t>
             </a:r>
+          </a:p>
+        </p:txBody>
+      </p:sp>
+      <p:sp>
+        <p:nvSpPr>
+          <p:cNvPr id="3" name="Textfeld 2">
+            <a:extLst>
+              <a:ext uri="{FF2B5EF4-FFF2-40B4-BE49-F238E27FC236}">
+                <a16:creationId xmlns:a16="http://schemas.microsoft.com/office/drawing/2014/main" id="{36FB3CFB-083C-C640-163E-95C044A73455}"/>
+              </a:ext>
+            </a:extLst>
+          </p:cNvPr>
+          <p:cNvSpPr txBox="1"/>
+          <p:nvPr/>
+        </p:nvSpPr>
+        <p:spPr>
+          <a:xfrm>
+            <a:off x="533400" y="4868333"/>
+            <a:ext cx="7863563" cy="1200329"/>
+          </a:xfrm>
+          <a:prstGeom prst="rect">
+            <a:avLst/>
+          </a:prstGeom>
+          <a:noFill/>
+        </p:spPr>
+        <p:txBody>
+          <a:bodyPr wrap="none" rtlCol="0">
+            <a:spAutoFit/>
+          </a:bodyPr>
+          <a:lstStyle/>
+          <a:p>
+            <a:r>
+              <a:rPr lang="en-US" dirty="0"/>
+              <a:t>Example:</a:t>
+            </a:r>
+          </a:p>
+          <a:p>
+            <a:r>
+              <a:rPr lang="en-US" b="1" dirty="0"/>
+              <a:t>III</a:t>
+            </a:r>
+            <a:r>
+              <a:rPr lang="en-US" dirty="0"/>
+              <a:t>	 What would have happened if I hadn't sent the customer a voucher?</a:t>
+            </a:r>
+          </a:p>
+          <a:p>
+            <a:r>
+              <a:rPr lang="en-US" b="1" dirty="0"/>
+              <a:t>II</a:t>
+            </a:r>
+            <a:r>
+              <a:rPr lang="en-US" dirty="0"/>
+              <a:t>	 What happens when I send vouchers?</a:t>
+            </a:r>
+          </a:p>
+          <a:p>
+            <a:r>
+              <a:rPr lang="en-US" b="1" dirty="0"/>
+              <a:t>I</a:t>
+            </a:r>
+            <a:r>
+              <a:rPr lang="en-US" dirty="0"/>
+              <a:t>	 What do I see? Shoppers with vouchers spend more.</a:t>
+            </a:r>
+            <a:endParaRPr lang="de-DE" dirty="0"/>
           </a:p>
         </p:txBody>
       </p:sp>
